--- a/docs/slides/Week9_Recap.pptx
+++ b/docs/slides/Week9_Recap.pptx
@@ -5,17 +5,19 @@
     <p:sldMasterId id="2147485087" r:id="rId1"/>
   </p:sldMasterIdLst>
   <p:notesMasterIdLst>
-    <p:notesMasterId r:id="rId7"/>
+    <p:notesMasterId r:id="rId9"/>
   </p:notesMasterIdLst>
   <p:handoutMasterIdLst>
-    <p:handoutMasterId r:id="rId8"/>
+    <p:handoutMasterId r:id="rId10"/>
   </p:handoutMasterIdLst>
   <p:sldIdLst>
     <p:sldId id="256" r:id="rId2"/>
     <p:sldId id="642" r:id="rId3"/>
-    <p:sldId id="644" r:id="rId4"/>
-    <p:sldId id="637" r:id="rId5"/>
-    <p:sldId id="525" r:id="rId6"/>
+    <p:sldId id="637" r:id="rId4"/>
+    <p:sldId id="644" r:id="rId5"/>
+    <p:sldId id="646" r:id="rId6"/>
+    <p:sldId id="647" r:id="rId7"/>
+    <p:sldId id="525" r:id="rId8"/>
   </p:sldIdLst>
   <p:sldSz cx="9144000" cy="6858000" type="screen4x3"/>
   <p:notesSz cx="7010400" cy="9296400"/>
@@ -177,239 +179,46 @@
 </p:presentation>
 </file>
 
+<file path=ppt/revisionInfo.xml><?xml version="1.0" encoding="utf-8"?>
+<p1510:revInfo xmlns:a="http://schemas.openxmlformats.org/drawingml/2006/main" xmlns:r="http://schemas.openxmlformats.org/officeDocument/2006/relationships" xmlns:p1510="http://schemas.microsoft.com/office/powerpoint/2015/10/main">
+  <p1510:revLst>
+    <p1510:client id="{FF4A295F-209E-4E66-9C89-6991218A666E}" v="88" dt="2026-03-24T01:18:19.157"/>
+  </p1510:revLst>
+</p1510:revInfo>
+</file>
+
 <file path=ppt/changesInfos/changesInfo1.xml><?xml version="1.0" encoding="utf-8"?>
 <pc:chgInfo xmlns:a="http://schemas.openxmlformats.org/drawingml/2006/main" xmlns:r="http://schemas.openxmlformats.org/officeDocument/2006/relationships" xmlns:ac="http://schemas.microsoft.com/office/drawing/2013/main/command" xmlns:pc="http://schemas.microsoft.com/office/powerpoint/2013/main/command">
   <pc:docChgLst>
-    <pc:chgData name="dcszjin@nus.edu.sg" userId="cd05a825-544c-438a-9ba1-08e63db50b47" providerId="ADAL" clId="{6F17B5A8-8938-4206-8B5F-1DF9007C99AC}"/>
-    <pc:docChg chg="undo custSel addSld delSld modSld sldOrd">
-      <pc:chgData name="dcszjin@nus.edu.sg" userId="cd05a825-544c-438a-9ba1-08e63db50b47" providerId="ADAL" clId="{6F17B5A8-8938-4206-8B5F-1DF9007C99AC}" dt="2021-03-08T06:53:03.979" v="1111" actId="20577"/>
+    <pc:chgData name="Zhao Jin" userId="cd05a825-544c-438a-9ba1-08e63db50b47" providerId="ADAL" clId="{5DF3A229-1965-414E-AF54-F4C37AC7DF68}"/>
+    <pc:docChg chg="undo custSel modSld">
+      <pc:chgData name="Zhao Jin" userId="cd05a825-544c-438a-9ba1-08e63db50b47" providerId="ADAL" clId="{5DF3A229-1965-414E-AF54-F4C37AC7DF68}" dt="2026-03-24T01:18:19.157" v="516" actId="20577"/>
       <pc:docMkLst>
         <pc:docMk/>
       </pc:docMkLst>
-      <pc:sldChg chg="modSp mod">
-        <pc:chgData name="dcszjin@nus.edu.sg" userId="cd05a825-544c-438a-9ba1-08e63db50b47" providerId="ADAL" clId="{6F17B5A8-8938-4206-8B5F-1DF9007C99AC}" dt="2021-03-01T07:08:40.699" v="1092" actId="1076"/>
+      <pc:sldChg chg="modSp mod modAnim">
+        <pc:chgData name="Zhao Jin" userId="cd05a825-544c-438a-9ba1-08e63db50b47" providerId="ADAL" clId="{5DF3A229-1965-414E-AF54-F4C37AC7DF68}" dt="2026-03-24T01:13:55.369" v="167"/>
         <pc:sldMkLst>
           <pc:docMk/>
-          <pc:sldMk cId="0" sldId="256"/>
+          <pc:sldMk cId="1916564042" sldId="637"/>
         </pc:sldMkLst>
+        <pc:spChg chg="mod">
+          <ac:chgData name="Zhao Jin" userId="cd05a825-544c-438a-9ba1-08e63db50b47" providerId="ADAL" clId="{5DF3A229-1965-414E-AF54-F4C37AC7DF68}" dt="2026-03-24T01:12:53.662" v="161" actId="948"/>
+          <ac:spMkLst>
+            <pc:docMk/>
+            <pc:sldMk cId="1916564042" sldId="637"/>
+            <ac:spMk id="13" creationId="{00000000-0000-0000-0000-000000000000}"/>
+          </ac:spMkLst>
+        </pc:spChg>
       </pc:sldChg>
-      <pc:sldChg chg="modSp mod">
-        <pc:chgData name="dcszjin@nus.edu.sg" userId="cd05a825-544c-438a-9ba1-08e63db50b47" providerId="ADAL" clId="{6F17B5A8-8938-4206-8B5F-1DF9007C99AC}" dt="2021-03-01T06:53:46.482" v="1091"/>
-        <pc:sldMkLst>
-          <pc:docMk/>
-          <pc:sldMk cId="4078418712" sldId="525"/>
-        </pc:sldMkLst>
-      </pc:sldChg>
-      <pc:sldChg chg="modSp add del">
-        <pc:chgData name="dcszjin@nus.edu.sg" userId="cd05a825-544c-438a-9ba1-08e63db50b47" providerId="ADAL" clId="{6F17B5A8-8938-4206-8B5F-1DF9007C99AC}" dt="2021-03-01T06:53:41.009" v="1088"/>
-        <pc:sldMkLst>
-          <pc:docMk/>
-          <pc:sldMk cId="1427618944" sldId="553"/>
-        </pc:sldMkLst>
-      </pc:sldChg>
-      <pc:sldChg chg="del">
-        <pc:chgData name="dcszjin@nus.edu.sg" userId="cd05a825-544c-438a-9ba1-08e63db50b47" providerId="ADAL" clId="{6F17B5A8-8938-4206-8B5F-1DF9007C99AC}" dt="2021-03-01T06:25:00.903" v="56" actId="47"/>
-        <pc:sldMkLst>
-          <pc:docMk/>
-          <pc:sldMk cId="1663851036" sldId="559"/>
-        </pc:sldMkLst>
-      </pc:sldChg>
-      <pc:sldChg chg="del">
-        <pc:chgData name="dcszjin@nus.edu.sg" userId="cd05a825-544c-438a-9ba1-08e63db50b47" providerId="ADAL" clId="{6F17B5A8-8938-4206-8B5F-1DF9007C99AC}" dt="2021-03-01T06:25:00.903" v="56" actId="47"/>
-        <pc:sldMkLst>
-          <pc:docMk/>
-          <pc:sldMk cId="1971208294" sldId="560"/>
-        </pc:sldMkLst>
-      </pc:sldChg>
-      <pc:sldChg chg="del">
-        <pc:chgData name="dcszjin@nus.edu.sg" userId="cd05a825-544c-438a-9ba1-08e63db50b47" providerId="ADAL" clId="{6F17B5A8-8938-4206-8B5F-1DF9007C99AC}" dt="2021-03-01T06:25:00.903" v="56" actId="47"/>
-        <pc:sldMkLst>
-          <pc:docMk/>
-          <pc:sldMk cId="894186310" sldId="564"/>
-        </pc:sldMkLst>
-      </pc:sldChg>
-      <pc:sldChg chg="del">
-        <pc:chgData name="dcszjin@nus.edu.sg" userId="cd05a825-544c-438a-9ba1-08e63db50b47" providerId="ADAL" clId="{6F17B5A8-8938-4206-8B5F-1DF9007C99AC}" dt="2021-03-01T06:25:00.903" v="56" actId="47"/>
-        <pc:sldMkLst>
-          <pc:docMk/>
-          <pc:sldMk cId="4156536479" sldId="590"/>
-        </pc:sldMkLst>
-      </pc:sldChg>
-      <pc:sldChg chg="del">
-        <pc:chgData name="dcszjin@nus.edu.sg" userId="cd05a825-544c-438a-9ba1-08e63db50b47" providerId="ADAL" clId="{6F17B5A8-8938-4206-8B5F-1DF9007C99AC}" dt="2021-03-01T06:25:00.903" v="56" actId="47"/>
-        <pc:sldMkLst>
-          <pc:docMk/>
-          <pc:sldMk cId="2217225800" sldId="594"/>
-        </pc:sldMkLst>
-      </pc:sldChg>
-      <pc:sldChg chg="del">
-        <pc:chgData name="dcszjin@nus.edu.sg" userId="cd05a825-544c-438a-9ba1-08e63db50b47" providerId="ADAL" clId="{6F17B5A8-8938-4206-8B5F-1DF9007C99AC}" dt="2021-03-01T06:25:00.903" v="56" actId="47"/>
-        <pc:sldMkLst>
-          <pc:docMk/>
-          <pc:sldMk cId="2419983458" sldId="595"/>
-        </pc:sldMkLst>
-      </pc:sldChg>
-      <pc:sldChg chg="addSp delSp modSp add mod ord delAnim">
-        <pc:chgData name="dcszjin@nus.edu.sg" userId="cd05a825-544c-438a-9ba1-08e63db50b47" providerId="ADAL" clId="{6F17B5A8-8938-4206-8B5F-1DF9007C99AC}" dt="2021-03-01T06:53:44.441" v="1090"/>
-        <pc:sldMkLst>
-          <pc:docMk/>
-          <pc:sldMk cId="1542002799" sldId="602"/>
-        </pc:sldMkLst>
-      </pc:sldChg>
-      <pc:sldChg chg="addSp delSp modSp add del mod addAnim delAnim">
-        <pc:chgData name="dcszjin@nus.edu.sg" userId="cd05a825-544c-438a-9ba1-08e63db50b47" providerId="ADAL" clId="{6F17B5A8-8938-4206-8B5F-1DF9007C99AC}" dt="2021-03-01T07:15:54.669" v="1096" actId="47"/>
-        <pc:sldMkLst>
-          <pc:docMk/>
-          <pc:sldMk cId="600747522" sldId="604"/>
-        </pc:sldMkLst>
-      </pc:sldChg>
-      <pc:sldChg chg="modSp add mod">
-        <pc:chgData name="dcszjin@nus.edu.sg" userId="cd05a825-544c-438a-9ba1-08e63db50b47" providerId="ADAL" clId="{6F17B5A8-8938-4206-8B5F-1DF9007C99AC}" dt="2021-03-01T06:53:31.297" v="1084"/>
-        <pc:sldMkLst>
-          <pc:docMk/>
-          <pc:sldMk cId="2489370454" sldId="605"/>
-        </pc:sldMkLst>
-      </pc:sldChg>
-      <pc:sldChg chg="delSp modSp add mod">
-        <pc:chgData name="dcszjin@nus.edu.sg" userId="cd05a825-544c-438a-9ba1-08e63db50b47" providerId="ADAL" clId="{6F17B5A8-8938-4206-8B5F-1DF9007C99AC}" dt="2021-03-01T07:17:37.118" v="1107" actId="478"/>
-        <pc:sldMkLst>
-          <pc:docMk/>
-          <pc:sldMk cId="640598186" sldId="606"/>
-        </pc:sldMkLst>
-      </pc:sldChg>
-      <pc:sldChg chg="addSp delSp modSp add del mod delAnim modAnim">
-        <pc:chgData name="dcszjin@nus.edu.sg" userId="cd05a825-544c-438a-9ba1-08e63db50b47" providerId="ADAL" clId="{6F17B5A8-8938-4206-8B5F-1DF9007C99AC}" dt="2021-03-01T06:37:08.889" v="418" actId="47"/>
-        <pc:sldMkLst>
-          <pc:docMk/>
-          <pc:sldMk cId="4199745321" sldId="619"/>
-        </pc:sldMkLst>
-      </pc:sldChg>
-      <pc:sldChg chg="modSp add">
-        <pc:chgData name="dcszjin@nus.edu.sg" userId="cd05a825-544c-438a-9ba1-08e63db50b47" providerId="ADAL" clId="{6F17B5A8-8938-4206-8B5F-1DF9007C99AC}" dt="2021-03-01T06:53:33.809" v="1085"/>
-        <pc:sldMkLst>
-          <pc:docMk/>
-          <pc:sldMk cId="282410985" sldId="620"/>
-        </pc:sldMkLst>
-      </pc:sldChg>
-      <pc:sldChg chg="add del">
-        <pc:chgData name="dcszjin@nus.edu.sg" userId="cd05a825-544c-438a-9ba1-08e63db50b47" providerId="ADAL" clId="{6F17B5A8-8938-4206-8B5F-1DF9007C99AC}" dt="2021-03-01T06:34:44.863" v="242" actId="47"/>
-        <pc:sldMkLst>
-          <pc:docMk/>
-          <pc:sldMk cId="846468992" sldId="621"/>
-        </pc:sldMkLst>
-      </pc:sldChg>
-      <pc:sldChg chg="addSp modSp add mod">
-        <pc:chgData name="dcszjin@nus.edu.sg" userId="cd05a825-544c-438a-9ba1-08e63db50b47" providerId="ADAL" clId="{6F17B5A8-8938-4206-8B5F-1DF9007C99AC}" dt="2021-03-01T06:53:35.760" v="1086"/>
-        <pc:sldMkLst>
-          <pc:docMk/>
-          <pc:sldMk cId="3503582036" sldId="622"/>
-        </pc:sldMkLst>
-      </pc:sldChg>
-      <pc:sldChg chg="modSp add">
-        <pc:chgData name="dcszjin@nus.edu.sg" userId="cd05a825-544c-438a-9ba1-08e63db50b47" providerId="ADAL" clId="{6F17B5A8-8938-4206-8B5F-1DF9007C99AC}" dt="2021-03-01T06:53:37.536" v="1087"/>
-        <pc:sldMkLst>
-          <pc:docMk/>
-          <pc:sldMk cId="1258830549" sldId="635"/>
-        </pc:sldMkLst>
-      </pc:sldChg>
-      <pc:sldChg chg="delSp modSp add del mod delAnim">
-        <pc:chgData name="dcszjin@nus.edu.sg" userId="cd05a825-544c-438a-9ba1-08e63db50b47" providerId="ADAL" clId="{6F17B5A8-8938-4206-8B5F-1DF9007C99AC}" dt="2021-03-01T06:38:19.926" v="441" actId="47"/>
-        <pc:sldMkLst>
-          <pc:docMk/>
-          <pc:sldMk cId="1364216338" sldId="636"/>
-        </pc:sldMkLst>
-      </pc:sldChg>
-      <pc:sldChg chg="addSp delSp modSp add del mod">
-        <pc:chgData name="dcszjin@nus.edu.sg" userId="cd05a825-544c-438a-9ba1-08e63db50b47" providerId="ADAL" clId="{6F17B5A8-8938-4206-8B5F-1DF9007C99AC}" dt="2021-03-01T06:49:01.783" v="721" actId="47"/>
-        <pc:sldMkLst>
-          <pc:docMk/>
-          <pc:sldMk cId="3364444345" sldId="636"/>
-        </pc:sldMkLst>
-      </pc:sldChg>
-      <pc:sldChg chg="add del">
-        <pc:chgData name="dcszjin@nus.edu.sg" userId="cd05a825-544c-438a-9ba1-08e63db50b47" providerId="ADAL" clId="{6F17B5A8-8938-4206-8B5F-1DF9007C99AC}" dt="2021-03-01T06:41:43.577" v="611"/>
-        <pc:sldMkLst>
-          <pc:docMk/>
-          <pc:sldMk cId="1109647801" sldId="637"/>
-        </pc:sldMkLst>
-      </pc:sldChg>
-      <pc:sldChg chg="addSp modSp add mod">
-        <pc:chgData name="dcszjin@nus.edu.sg" userId="cd05a825-544c-438a-9ba1-08e63db50b47" providerId="ADAL" clId="{6F17B5A8-8938-4206-8B5F-1DF9007C99AC}" dt="2021-03-08T06:53:03.979" v="1111" actId="20577"/>
-        <pc:sldMkLst>
-          <pc:docMk/>
-          <pc:sldMk cId="1235845528" sldId="637"/>
-        </pc:sldMkLst>
-      </pc:sldChg>
-    </pc:docChg>
-  </pc:docChgLst>
-  <pc:docChgLst>
-    <pc:chgData name="Zhao Jin" userId="cd05a825-544c-438a-9ba1-08e63db50b47" providerId="ADAL" clId="{40B02829-7445-394A-990C-032942059FD9}"/>
-    <pc:docChg chg="custSel modSld">
-      <pc:chgData name="Zhao Jin" userId="cd05a825-544c-438a-9ba1-08e63db50b47" providerId="ADAL" clId="{40B02829-7445-394A-990C-032942059FD9}" dt="2021-01-18T05:50:34.611" v="4" actId="478"/>
-      <pc:docMkLst>
-        <pc:docMk/>
-      </pc:docMkLst>
-      <pc:sldChg chg="delSp">
-        <pc:chgData name="Zhao Jin" userId="cd05a825-544c-438a-9ba1-08e63db50b47" providerId="ADAL" clId="{40B02829-7445-394A-990C-032942059FD9}" dt="2021-01-18T05:50:34.611" v="4" actId="478"/>
-        <pc:sldMkLst>
-          <pc:docMk/>
-          <pc:sldMk cId="3871162519" sldId="525"/>
-        </pc:sldMkLst>
-      </pc:sldChg>
-      <pc:sldChg chg="modSp">
-        <pc:chgData name="Zhao Jin" userId="cd05a825-544c-438a-9ba1-08e63db50b47" providerId="ADAL" clId="{40B02829-7445-394A-990C-032942059FD9}" dt="2021-01-18T05:50:03.685" v="3" actId="122"/>
-        <pc:sldMkLst>
-          <pc:docMk/>
-          <pc:sldMk cId="770306953" sldId="526"/>
-        </pc:sldMkLst>
-      </pc:sldChg>
-      <pc:sldChg chg="modAnim">
-        <pc:chgData name="Zhao Jin" userId="cd05a825-544c-438a-9ba1-08e63db50b47" providerId="ADAL" clId="{40B02829-7445-394A-990C-032942059FD9}" dt="2021-01-18T05:49:08.491" v="0"/>
-        <pc:sldMkLst>
-          <pc:docMk/>
-          <pc:sldMk cId="4288789163" sldId="527"/>
-        </pc:sldMkLst>
-      </pc:sldChg>
-    </pc:docChg>
-  </pc:docChgLst>
-  <pc:docChgLst>
-    <pc:chgData name="Zhao Jin" userId="cd05a825-544c-438a-9ba1-08e63db50b47" providerId="ADAL" clId="{6A3951C8-7780-4031-8A2B-7971BC0F9707}"/>
-    <pc:docChg chg="modSld">
-      <pc:chgData name="Zhao Jin" userId="cd05a825-544c-438a-9ba1-08e63db50b47" providerId="ADAL" clId="{6A3951C8-7780-4031-8A2B-7971BC0F9707}" dt="2021-01-27T06:40:05.693" v="157" actId="20577"/>
-      <pc:docMkLst>
-        <pc:docMk/>
-      </pc:docMkLst>
-      <pc:sldChg chg="addSp modSp mod">
-        <pc:chgData name="Zhao Jin" userId="cd05a825-544c-438a-9ba1-08e63db50b47" providerId="ADAL" clId="{6A3951C8-7780-4031-8A2B-7971BC0F9707}" dt="2021-01-27T06:39:09.281" v="89" actId="1036"/>
-        <pc:sldMkLst>
-          <pc:docMk/>
-          <pc:sldMk cId="3949125736" sldId="548"/>
-        </pc:sldMkLst>
-      </pc:sldChg>
-      <pc:sldChg chg="addSp modSp mod">
-        <pc:chgData name="Zhao Jin" userId="cd05a825-544c-438a-9ba1-08e63db50b47" providerId="ADAL" clId="{6A3951C8-7780-4031-8A2B-7971BC0F9707}" dt="2021-01-27T06:40:05.693" v="157" actId="20577"/>
-        <pc:sldMkLst>
-          <pc:docMk/>
-          <pc:sldMk cId="2939077141" sldId="549"/>
-        </pc:sldMkLst>
-      </pc:sldChg>
-    </pc:docChg>
-  </pc:docChgLst>
-  <pc:docChgLst>
-    <pc:chgData name="Zhao Jin" userId="cd05a825-544c-438a-9ba1-08e63db50b47" providerId="ADAL" clId="{1642A756-5ABB-4887-9EBD-57E178CA902C}"/>
-    <pc:docChg chg="undo custSel modSld">
-      <pc:chgData name="Zhao Jin" userId="cd05a825-544c-438a-9ba1-08e63db50b47" providerId="ADAL" clId="{1642A756-5ABB-4887-9EBD-57E178CA902C}" dt="2025-03-24T05:48:49.074" v="29" actId="20577"/>
-      <pc:docMkLst>
-        <pc:docMk/>
-      </pc:docMkLst>
-      <pc:sldChg chg="modSp mod">
-        <pc:chgData name="Zhao Jin" userId="cd05a825-544c-438a-9ba1-08e63db50b47" providerId="ADAL" clId="{1642A756-5ABB-4887-9EBD-57E178CA902C}" dt="2025-03-24T05:48:49.074" v="29" actId="20577"/>
+      <pc:sldChg chg="modSp mod addAnim delAnim modAnim">
+        <pc:chgData name="Zhao Jin" userId="cd05a825-544c-438a-9ba1-08e63db50b47" providerId="ADAL" clId="{5DF3A229-1965-414E-AF54-F4C37AC7DF68}" dt="2026-03-24T01:11:11.049" v="27"/>
         <pc:sldMkLst>
           <pc:docMk/>
           <pc:sldMk cId="1179750071" sldId="642"/>
         </pc:sldMkLst>
         <pc:spChg chg="mod">
-          <ac:chgData name="Zhao Jin" userId="cd05a825-544c-438a-9ba1-08e63db50b47" providerId="ADAL" clId="{1642A756-5ABB-4887-9EBD-57E178CA902C}" dt="2025-03-24T05:48:49.074" v="29" actId="20577"/>
+          <ac:chgData name="Zhao Jin" userId="cd05a825-544c-438a-9ba1-08e63db50b47" providerId="ADAL" clId="{5DF3A229-1965-414E-AF54-F4C37AC7DF68}" dt="2026-03-24T01:09:07.738" v="21" actId="207"/>
           <ac:spMkLst>
             <pc:docMk/>
             <pc:sldMk cId="1179750071" sldId="642"/>
@@ -417,1052 +226,184 @@
           </ac:spMkLst>
         </pc:spChg>
       </pc:sldChg>
-      <pc:sldChg chg="modSp mod">
-        <pc:chgData name="Zhao Jin" userId="cd05a825-544c-438a-9ba1-08e63db50b47" providerId="ADAL" clId="{1642A756-5ABB-4887-9EBD-57E178CA902C}" dt="2025-03-24T05:46:35.962" v="6" actId="15"/>
+      <pc:sldChg chg="modAnim">
+        <pc:chgData name="Zhao Jin" userId="cd05a825-544c-438a-9ba1-08e63db50b47" providerId="ADAL" clId="{5DF3A229-1965-414E-AF54-F4C37AC7DF68}" dt="2026-03-24T01:15:34.707" v="176"/>
+        <pc:sldMkLst>
+          <pc:docMk/>
+          <pc:sldMk cId="2088874760" sldId="646"/>
+        </pc:sldMkLst>
+      </pc:sldChg>
+      <pc:sldChg chg="modSp mod addAnim delAnim modAnim">
+        <pc:chgData name="Zhao Jin" userId="cd05a825-544c-438a-9ba1-08e63db50b47" providerId="ADAL" clId="{5DF3A229-1965-414E-AF54-F4C37AC7DF68}" dt="2026-03-24T01:18:19.157" v="516" actId="20577"/>
+        <pc:sldMkLst>
+          <pc:docMk/>
+          <pc:sldMk cId="281145632" sldId="647"/>
+        </pc:sldMkLst>
+        <pc:spChg chg="mod">
+          <ac:chgData name="Zhao Jin" userId="cd05a825-544c-438a-9ba1-08e63db50b47" providerId="ADAL" clId="{5DF3A229-1965-414E-AF54-F4C37AC7DF68}" dt="2026-03-24T01:18:19.157" v="516" actId="20577"/>
+          <ac:spMkLst>
+            <pc:docMk/>
+            <pc:sldMk cId="281145632" sldId="647"/>
+            <ac:spMk id="8" creationId="{D28E8E80-E5E0-A73E-5905-E85A34A23CA1}"/>
+          </ac:spMkLst>
+        </pc:spChg>
+      </pc:sldChg>
+    </pc:docChg>
+  </pc:docChgLst>
+  <pc:docChgLst>
+    <pc:chgData name="Zhao Jin" userId="cd05a825-544c-438a-9ba1-08e63db50b47" providerId="ADAL" clId="{7346625B-7E8F-4E9B-A9F0-94C1DD70E907}"/>
+    <pc:docChg chg="undo custSel addSld delSld modSld sldOrd">
+      <pc:chgData name="Zhao Jin" userId="cd05a825-544c-438a-9ba1-08e63db50b47" providerId="ADAL" clId="{7346625B-7E8F-4E9B-A9F0-94C1DD70E907}" dt="2026-03-17T12:25:22.656" v="1811" actId="20577"/>
+      <pc:docMkLst>
+        <pc:docMk/>
+      </pc:docMkLst>
+      <pc:sldChg chg="modSp mod ord">
+        <pc:chgData name="Zhao Jin" userId="cd05a825-544c-438a-9ba1-08e63db50b47" providerId="ADAL" clId="{7346625B-7E8F-4E9B-A9F0-94C1DD70E907}" dt="2026-03-17T12:25:22.656" v="1811" actId="20577"/>
+        <pc:sldMkLst>
+          <pc:docMk/>
+          <pc:sldMk cId="1916564042" sldId="637"/>
+        </pc:sldMkLst>
+        <pc:spChg chg="mod">
+          <ac:chgData name="Zhao Jin" userId="cd05a825-544c-438a-9ba1-08e63db50b47" providerId="ADAL" clId="{7346625B-7E8F-4E9B-A9F0-94C1DD70E907}" dt="2026-03-17T12:25:22.656" v="1811" actId="20577"/>
+          <ac:spMkLst>
+            <pc:docMk/>
+            <pc:sldMk cId="1916564042" sldId="637"/>
+            <ac:spMk id="14338" creationId="{00000000-0000-0000-0000-000000000000}"/>
+          </ac:spMkLst>
+        </pc:spChg>
+      </pc:sldChg>
+      <pc:sldChg chg="addSp delSp modSp mod">
+        <pc:chgData name="Zhao Jin" userId="cd05a825-544c-438a-9ba1-08e63db50b47" providerId="ADAL" clId="{7346625B-7E8F-4E9B-A9F0-94C1DD70E907}" dt="2026-03-17T12:19:44.345" v="1458"/>
         <pc:sldMkLst>
           <pc:docMk/>
           <pc:sldMk cId="2535690228" sldId="644"/>
         </pc:sldMkLst>
         <pc:spChg chg="mod">
-          <ac:chgData name="Zhao Jin" userId="cd05a825-544c-438a-9ba1-08e63db50b47" providerId="ADAL" clId="{1642A756-5ABB-4887-9EBD-57E178CA902C}" dt="2025-03-24T05:46:35.962" v="6" actId="15"/>
+          <ac:chgData name="Zhao Jin" userId="cd05a825-544c-438a-9ba1-08e63db50b47" providerId="ADAL" clId="{7346625B-7E8F-4E9B-A9F0-94C1DD70E907}" dt="2026-03-17T12:13:12.256" v="837" actId="1038"/>
+          <ac:spMkLst>
+            <pc:docMk/>
+            <pc:sldMk cId="2535690228" sldId="644"/>
+            <ac:spMk id="3" creationId="{68B17616-6AD3-512B-A578-A8549B4ED836}"/>
+          </ac:spMkLst>
+        </pc:spChg>
+        <pc:spChg chg="mod">
+          <ac:chgData name="Zhao Jin" userId="cd05a825-544c-438a-9ba1-08e63db50b47" providerId="ADAL" clId="{7346625B-7E8F-4E9B-A9F0-94C1DD70E907}" dt="2026-03-17T12:13:12.256" v="837" actId="1038"/>
+          <ac:spMkLst>
+            <pc:docMk/>
+            <pc:sldMk cId="2535690228" sldId="644"/>
+            <ac:spMk id="4" creationId="{6F771720-4760-BCAA-F602-7D17575D9495}"/>
+          </ac:spMkLst>
+        </pc:spChg>
+        <pc:spChg chg="mod">
+          <ac:chgData name="Zhao Jin" userId="cd05a825-544c-438a-9ba1-08e63db50b47" providerId="ADAL" clId="{7346625B-7E8F-4E9B-A9F0-94C1DD70E907}" dt="2026-03-17T12:13:12.256" v="837" actId="1038"/>
+          <ac:spMkLst>
+            <pc:docMk/>
+            <pc:sldMk cId="2535690228" sldId="644"/>
+            <ac:spMk id="5" creationId="{5F355CDB-7E0B-C5C0-7C75-145ADDB08325}"/>
+          </ac:spMkLst>
+        </pc:spChg>
+        <pc:spChg chg="mod">
+          <ac:chgData name="Zhao Jin" userId="cd05a825-544c-438a-9ba1-08e63db50b47" providerId="ADAL" clId="{7346625B-7E8F-4E9B-A9F0-94C1DD70E907}" dt="2026-03-17T12:13:12.256" v="837" actId="1038"/>
+          <ac:spMkLst>
+            <pc:docMk/>
+            <pc:sldMk cId="2535690228" sldId="644"/>
+            <ac:spMk id="6" creationId="{BAAF8AA1-931E-E0EE-1C4C-0C341FD3902E}"/>
+          </ac:spMkLst>
+        </pc:spChg>
+        <pc:spChg chg="mod ord">
+          <ac:chgData name="Zhao Jin" userId="cd05a825-544c-438a-9ba1-08e63db50b47" providerId="ADAL" clId="{7346625B-7E8F-4E9B-A9F0-94C1DD70E907}" dt="2026-03-17T12:13:18.958" v="842" actId="20577"/>
           <ac:spMkLst>
             <pc:docMk/>
             <pc:sldMk cId="2535690228" sldId="644"/>
             <ac:spMk id="8" creationId="{00000000-0000-0000-0000-000000000000}"/>
           </ac:spMkLst>
         </pc:spChg>
+        <pc:spChg chg="mod">
+          <ac:chgData name="Zhao Jin" userId="cd05a825-544c-438a-9ba1-08e63db50b47" providerId="ADAL" clId="{7346625B-7E8F-4E9B-A9F0-94C1DD70E907}" dt="2026-03-17T12:13:12.256" v="837" actId="1038"/>
+          <ac:spMkLst>
+            <pc:docMk/>
+            <pc:sldMk cId="2535690228" sldId="644"/>
+            <ac:spMk id="9" creationId="{06C3558C-F82E-A66B-3009-66EDD32523CE}"/>
+          </ac:spMkLst>
+        </pc:spChg>
+        <pc:spChg chg="mod">
+          <ac:chgData name="Zhao Jin" userId="cd05a825-544c-438a-9ba1-08e63db50b47" providerId="ADAL" clId="{7346625B-7E8F-4E9B-A9F0-94C1DD70E907}" dt="2026-03-17T12:13:12.256" v="837" actId="1038"/>
+          <ac:spMkLst>
+            <pc:docMk/>
+            <pc:sldMk cId="2535690228" sldId="644"/>
+            <ac:spMk id="10" creationId="{D9C57781-4336-573D-C913-933EB0DD2169}"/>
+          </ac:spMkLst>
+        </pc:spChg>
+        <pc:spChg chg="mod">
+          <ac:chgData name="Zhao Jin" userId="cd05a825-544c-438a-9ba1-08e63db50b47" providerId="ADAL" clId="{7346625B-7E8F-4E9B-A9F0-94C1DD70E907}" dt="2026-03-17T12:13:12.256" v="837" actId="1038"/>
+          <ac:spMkLst>
+            <pc:docMk/>
+            <pc:sldMk cId="2535690228" sldId="644"/>
+            <ac:spMk id="11" creationId="{FA8C9829-A2CA-C391-1D93-301EAD4AD4CD}"/>
+          </ac:spMkLst>
+        </pc:spChg>
+        <pc:spChg chg="mod">
+          <ac:chgData name="Zhao Jin" userId="cd05a825-544c-438a-9ba1-08e63db50b47" providerId="ADAL" clId="{7346625B-7E8F-4E9B-A9F0-94C1DD70E907}" dt="2026-03-17T12:13:12.256" v="837" actId="1038"/>
+          <ac:spMkLst>
+            <pc:docMk/>
+            <pc:sldMk cId="2535690228" sldId="644"/>
+            <ac:spMk id="14" creationId="{3B70FE07-2B01-893B-071C-862536951384}"/>
+          </ac:spMkLst>
+        </pc:spChg>
+        <pc:spChg chg="mod">
+          <ac:chgData name="Zhao Jin" userId="cd05a825-544c-438a-9ba1-08e63db50b47" providerId="ADAL" clId="{7346625B-7E8F-4E9B-A9F0-94C1DD70E907}" dt="2026-03-17T12:13:12.256" v="837" actId="1038"/>
+          <ac:spMkLst>
+            <pc:docMk/>
+            <pc:sldMk cId="2535690228" sldId="644"/>
+            <ac:spMk id="15" creationId="{F985CC01-2576-42B9-9D7B-79704E332D04}"/>
+          </ac:spMkLst>
+        </pc:spChg>
+        <pc:spChg chg="mod">
+          <ac:chgData name="Zhao Jin" userId="cd05a825-544c-438a-9ba1-08e63db50b47" providerId="ADAL" clId="{7346625B-7E8F-4E9B-A9F0-94C1DD70E907}" dt="2026-03-17T12:04:42.467" v="202" actId="20577"/>
+          <ac:spMkLst>
+            <pc:docMk/>
+            <pc:sldMk cId="2535690228" sldId="644"/>
+            <ac:spMk id="14338" creationId="{00000000-0000-0000-0000-000000000000}"/>
+          </ac:spMkLst>
+        </pc:spChg>
       </pc:sldChg>
-    </pc:docChg>
-  </pc:docChgLst>
-  <pc:docChgLst>
-    <pc:chgData name="Zhao Jin" userId="cd05a825-544c-438a-9ba1-08e63db50b47" providerId="ADAL" clId="{867F3690-C100-40EE-A937-14612E9F3314}"/>
-    <pc:docChg chg="undo custSel addSld delSld modSld">
-      <pc:chgData name="Zhao Jin" userId="cd05a825-544c-438a-9ba1-08e63db50b47" providerId="ADAL" clId="{867F3690-C100-40EE-A937-14612E9F3314}" dt="2021-02-15T05:07:12.447" v="312" actId="1076"/>
-      <pc:docMkLst>
-        <pc:docMk/>
-      </pc:docMkLst>
-      <pc:sldChg chg="modSp mod">
-        <pc:chgData name="Zhao Jin" userId="cd05a825-544c-438a-9ba1-08e63db50b47" providerId="ADAL" clId="{867F3690-C100-40EE-A937-14612E9F3314}" dt="2021-02-10T03:53:02.282" v="0" actId="20577"/>
+      <pc:sldChg chg="addSp modSp add mod">
+        <pc:chgData name="Zhao Jin" userId="cd05a825-544c-438a-9ba1-08e63db50b47" providerId="ADAL" clId="{7346625B-7E8F-4E9B-A9F0-94C1DD70E907}" dt="2026-03-17T12:20:41.728" v="1536" actId="20577"/>
         <pc:sldMkLst>
           <pc:docMk/>
-          <pc:sldMk cId="0" sldId="256"/>
+          <pc:sldMk cId="2088874760" sldId="646"/>
         </pc:sldMkLst>
+        <pc:spChg chg="mod">
+          <ac:chgData name="Zhao Jin" userId="cd05a825-544c-438a-9ba1-08e63db50b47" providerId="ADAL" clId="{7346625B-7E8F-4E9B-A9F0-94C1DD70E907}" dt="2026-03-17T12:20:41.728" v="1536" actId="20577"/>
+          <ac:spMkLst>
+            <pc:docMk/>
+            <pc:sldMk cId="2088874760" sldId="646"/>
+            <ac:spMk id="8" creationId="{3DCB1477-F6B2-BF27-D5A1-2B29CED6D18A}"/>
+          </ac:spMkLst>
+        </pc:spChg>
+        <pc:spChg chg="add mod">
+          <ac:chgData name="Zhao Jin" userId="cd05a825-544c-438a-9ba1-08e63db50b47" providerId="ADAL" clId="{7346625B-7E8F-4E9B-A9F0-94C1DD70E907}" dt="2026-03-17T12:20:15.463" v="1517" actId="1076"/>
+          <ac:spMkLst>
+            <pc:docMk/>
+            <pc:sldMk cId="2088874760" sldId="646"/>
+            <ac:spMk id="13" creationId="{BCA93678-0C8C-46B6-70E0-11B092222AF1}"/>
+          </ac:spMkLst>
+        </pc:spChg>
       </pc:sldChg>
-      <pc:sldChg chg="modSp del">
-        <pc:chgData name="Zhao Jin" userId="cd05a825-544c-438a-9ba1-08e63db50b47" providerId="ADAL" clId="{867F3690-C100-40EE-A937-14612E9F3314}" dt="2021-02-11T11:12:55.303" v="2" actId="47"/>
+      <pc:sldChg chg="modSp add mod">
+        <pc:chgData name="Zhao Jin" userId="cd05a825-544c-438a-9ba1-08e63db50b47" providerId="ADAL" clId="{7346625B-7E8F-4E9B-A9F0-94C1DD70E907}" dt="2026-03-17T12:23:55.089" v="1787" actId="20577"/>
         <pc:sldMkLst>
           <pc:docMk/>
-          <pc:sldMk cId="2775173622" sldId="524"/>
+          <pc:sldMk cId="281145632" sldId="647"/>
         </pc:sldMkLst>
-      </pc:sldChg>
-      <pc:sldChg chg="modSp mod">
-        <pc:chgData name="Zhao Jin" userId="cd05a825-544c-438a-9ba1-08e63db50b47" providerId="ADAL" clId="{867F3690-C100-40EE-A937-14612E9F3314}" dt="2021-02-11T11:16:16.653" v="199" actId="207"/>
-        <pc:sldMkLst>
-          <pc:docMk/>
-          <pc:sldMk cId="4078418712" sldId="525"/>
-        </pc:sldMkLst>
-      </pc:sldChg>
-      <pc:sldChg chg="modSp del">
-        <pc:chgData name="Zhao Jin" userId="cd05a825-544c-438a-9ba1-08e63db50b47" providerId="ADAL" clId="{867F3690-C100-40EE-A937-14612E9F3314}" dt="2021-02-11T11:12:55.303" v="2" actId="47"/>
-        <pc:sldMkLst>
-          <pc:docMk/>
-          <pc:sldMk cId="2882118053" sldId="552"/>
-        </pc:sldMkLst>
-      </pc:sldChg>
-      <pc:sldChg chg="modSp add mod">
-        <pc:chgData name="Zhao Jin" userId="cd05a825-544c-438a-9ba1-08e63db50b47" providerId="ADAL" clId="{867F3690-C100-40EE-A937-14612E9F3314}" dt="2021-02-15T04:57:13.323" v="201"/>
-        <pc:sldMkLst>
-          <pc:docMk/>
-          <pc:sldMk cId="1427618944" sldId="553"/>
-        </pc:sldMkLst>
-      </pc:sldChg>
-      <pc:sldChg chg="modSp del">
-        <pc:chgData name="Zhao Jin" userId="cd05a825-544c-438a-9ba1-08e63db50b47" providerId="ADAL" clId="{867F3690-C100-40EE-A937-14612E9F3314}" dt="2021-02-11T11:12:55.303" v="2" actId="47"/>
-        <pc:sldMkLst>
-          <pc:docMk/>
-          <pc:sldMk cId="2082920116" sldId="553"/>
-        </pc:sldMkLst>
-      </pc:sldChg>
-      <pc:sldChg chg="modSp del">
-        <pc:chgData name="Zhao Jin" userId="cd05a825-544c-438a-9ba1-08e63db50b47" providerId="ADAL" clId="{867F3690-C100-40EE-A937-14612E9F3314}" dt="2021-02-11T11:12:55.303" v="2" actId="47"/>
-        <pc:sldMkLst>
-          <pc:docMk/>
-          <pc:sldMk cId="1659983766" sldId="554"/>
-        </pc:sldMkLst>
-      </pc:sldChg>
-      <pc:sldChg chg="modSp del">
-        <pc:chgData name="Zhao Jin" userId="cd05a825-544c-438a-9ba1-08e63db50b47" providerId="ADAL" clId="{867F3690-C100-40EE-A937-14612E9F3314}" dt="2021-02-11T11:12:55.303" v="2" actId="47"/>
-        <pc:sldMkLst>
-          <pc:docMk/>
-          <pc:sldMk cId="686532275" sldId="558"/>
-        </pc:sldMkLst>
-      </pc:sldChg>
-      <pc:sldChg chg="modSp add del mod">
-        <pc:chgData name="Zhao Jin" userId="cd05a825-544c-438a-9ba1-08e63db50b47" providerId="ADAL" clId="{867F3690-C100-40EE-A937-14612E9F3314}" dt="2021-02-15T04:59:11.851" v="203" actId="207"/>
-        <pc:sldMkLst>
-          <pc:docMk/>
-          <pc:sldMk cId="1663851036" sldId="559"/>
-        </pc:sldMkLst>
-      </pc:sldChg>
-      <pc:sldChg chg="addSp delSp modSp add mod">
-        <pc:chgData name="Zhao Jin" userId="cd05a825-544c-438a-9ba1-08e63db50b47" providerId="ADAL" clId="{867F3690-C100-40EE-A937-14612E9F3314}" dt="2021-02-15T05:07:12.447" v="312" actId="1076"/>
-        <pc:sldMkLst>
-          <pc:docMk/>
-          <pc:sldMk cId="1971208294" sldId="560"/>
-        </pc:sldMkLst>
-      </pc:sldChg>
-      <pc:sldChg chg="modSp del">
-        <pc:chgData name="Zhao Jin" userId="cd05a825-544c-438a-9ba1-08e63db50b47" providerId="ADAL" clId="{867F3690-C100-40EE-A937-14612E9F3314}" dt="2021-02-11T11:12:55.303" v="2" actId="47"/>
-        <pc:sldMkLst>
-          <pc:docMk/>
-          <pc:sldMk cId="1986771488" sldId="561"/>
-        </pc:sldMkLst>
-      </pc:sldChg>
-      <pc:sldChg chg="modSp add mod">
-        <pc:chgData name="Zhao Jin" userId="cd05a825-544c-438a-9ba1-08e63db50b47" providerId="ADAL" clId="{867F3690-C100-40EE-A937-14612E9F3314}" dt="2021-02-11T11:14:08.750" v="27" actId="20577"/>
-        <pc:sldMkLst>
-          <pc:docMk/>
-          <pc:sldMk cId="894186310" sldId="564"/>
-        </pc:sldMkLst>
-      </pc:sldChg>
-      <pc:sldChg chg="modSp del">
-        <pc:chgData name="Zhao Jin" userId="cd05a825-544c-438a-9ba1-08e63db50b47" providerId="ADAL" clId="{867F3690-C100-40EE-A937-14612E9F3314}" dt="2021-02-11T11:12:55.303" v="2" actId="47"/>
-        <pc:sldMkLst>
-          <pc:docMk/>
-          <pc:sldMk cId="1276365520" sldId="564"/>
-        </pc:sldMkLst>
-      </pc:sldChg>
-      <pc:sldChg chg="modSp del">
-        <pc:chgData name="Zhao Jin" userId="cd05a825-544c-438a-9ba1-08e63db50b47" providerId="ADAL" clId="{867F3690-C100-40EE-A937-14612E9F3314}" dt="2021-02-11T11:12:55.303" v="2" actId="47"/>
-        <pc:sldMkLst>
-          <pc:docMk/>
-          <pc:sldMk cId="827193018" sldId="565"/>
-        </pc:sldMkLst>
-      </pc:sldChg>
-      <pc:sldChg chg="modSp del">
-        <pc:chgData name="Zhao Jin" userId="cd05a825-544c-438a-9ba1-08e63db50b47" providerId="ADAL" clId="{867F3690-C100-40EE-A937-14612E9F3314}" dt="2021-02-11T11:12:55.303" v="2" actId="47"/>
-        <pc:sldMkLst>
-          <pc:docMk/>
-          <pc:sldMk cId="3959984611" sldId="566"/>
-        </pc:sldMkLst>
-      </pc:sldChg>
-      <pc:sldChg chg="modSp del">
-        <pc:chgData name="Zhao Jin" userId="cd05a825-544c-438a-9ba1-08e63db50b47" providerId="ADAL" clId="{867F3690-C100-40EE-A937-14612E9F3314}" dt="2021-02-11T11:12:55.303" v="2" actId="47"/>
-        <pc:sldMkLst>
-          <pc:docMk/>
-          <pc:sldMk cId="2879329457" sldId="568"/>
-        </pc:sldMkLst>
-      </pc:sldChg>
-      <pc:sldChg chg="modSp del">
-        <pc:chgData name="Zhao Jin" userId="cd05a825-544c-438a-9ba1-08e63db50b47" providerId="ADAL" clId="{867F3690-C100-40EE-A937-14612E9F3314}" dt="2021-02-11T11:12:55.303" v="2" actId="47"/>
-        <pc:sldMkLst>
-          <pc:docMk/>
-          <pc:sldMk cId="4240540711" sldId="569"/>
-        </pc:sldMkLst>
-      </pc:sldChg>
-      <pc:sldChg chg="delSp modSp add mod delAnim">
-        <pc:chgData name="Zhao Jin" userId="cd05a825-544c-438a-9ba1-08e63db50b47" providerId="ADAL" clId="{867F3690-C100-40EE-A937-14612E9F3314}" dt="2021-02-15T04:58:14.889" v="202" actId="478"/>
-        <pc:sldMkLst>
-          <pc:docMk/>
-          <pc:sldMk cId="4156536479" sldId="590"/>
-        </pc:sldMkLst>
-      </pc:sldChg>
-      <pc:sldChg chg="modSp add mod">
-        <pc:chgData name="Zhao Jin" userId="cd05a825-544c-438a-9ba1-08e63db50b47" providerId="ADAL" clId="{867F3690-C100-40EE-A937-14612E9F3314}" dt="2021-02-11T11:13:35.741" v="11"/>
-        <pc:sldMkLst>
-          <pc:docMk/>
-          <pc:sldMk cId="2217225800" sldId="594"/>
-        </pc:sldMkLst>
-      </pc:sldChg>
-      <pc:sldChg chg="delSp modSp add mod">
-        <pc:chgData name="Zhao Jin" userId="cd05a825-544c-438a-9ba1-08e63db50b47" providerId="ADAL" clId="{867F3690-C100-40EE-A937-14612E9F3314}" dt="2021-02-11T11:13:40.184" v="13" actId="478"/>
-        <pc:sldMkLst>
-          <pc:docMk/>
-          <pc:sldMk cId="2419983458" sldId="595"/>
-        </pc:sldMkLst>
-      </pc:sldChg>
-    </pc:docChg>
-  </pc:docChgLst>
-  <pc:docChgLst>
-    <pc:chgData name="Zhao Jin" userId="cd05a825-544c-438a-9ba1-08e63db50b47" providerId="ADAL" clId="{1850DC85-5AAB-47D5-8AE5-72D9190B7D0B}"/>
-    <pc:docChg chg="modSld">
-      <pc:chgData name="Zhao Jin" userId="cd05a825-544c-438a-9ba1-08e63db50b47" providerId="ADAL" clId="{1850DC85-5AAB-47D5-8AE5-72D9190B7D0B}" dt="2024-01-31T05:15:16.123" v="1"/>
-      <pc:docMkLst>
-        <pc:docMk/>
-      </pc:docMkLst>
-      <pc:sldChg chg="addSp modSp">
-        <pc:chgData name="Zhao Jin" userId="cd05a825-544c-438a-9ba1-08e63db50b47" providerId="ADAL" clId="{1850DC85-5AAB-47D5-8AE5-72D9190B7D0B}" dt="2024-01-31T05:13:44.611" v="0"/>
-        <pc:sldMkLst>
-          <pc:docMk/>
-          <pc:sldMk cId="0" sldId="256"/>
-        </pc:sldMkLst>
-      </pc:sldChg>
-      <pc:sldChg chg="modSp">
-        <pc:chgData name="Zhao Jin" userId="cd05a825-544c-438a-9ba1-08e63db50b47" providerId="ADAL" clId="{1850DC85-5AAB-47D5-8AE5-72D9190B7D0B}" dt="2024-01-31T05:15:16.123" v="1"/>
-        <pc:sldMkLst>
-          <pc:docMk/>
-          <pc:sldMk cId="4078418712" sldId="525"/>
-        </pc:sldMkLst>
-      </pc:sldChg>
-      <pc:sldChg chg="modSp">
-        <pc:chgData name="Zhao Jin" userId="cd05a825-544c-438a-9ba1-08e63db50b47" providerId="ADAL" clId="{1850DC85-5AAB-47D5-8AE5-72D9190B7D0B}" dt="2024-01-31T05:15:16.123" v="1"/>
-        <pc:sldMkLst>
-          <pc:docMk/>
-          <pc:sldMk cId="1813128722" sldId="617"/>
-        </pc:sldMkLst>
-      </pc:sldChg>
-      <pc:sldChg chg="modSp">
-        <pc:chgData name="Zhao Jin" userId="cd05a825-544c-438a-9ba1-08e63db50b47" providerId="ADAL" clId="{1850DC85-5AAB-47D5-8AE5-72D9190B7D0B}" dt="2024-01-31T05:15:16.123" v="1"/>
-        <pc:sldMkLst>
-          <pc:docMk/>
-          <pc:sldMk cId="4274114340" sldId="618"/>
-        </pc:sldMkLst>
-      </pc:sldChg>
-      <pc:sldChg chg="modSp">
-        <pc:chgData name="Zhao Jin" userId="cd05a825-544c-438a-9ba1-08e63db50b47" providerId="ADAL" clId="{1850DC85-5AAB-47D5-8AE5-72D9190B7D0B}" dt="2024-01-31T05:15:16.123" v="1"/>
-        <pc:sldMkLst>
-          <pc:docMk/>
-          <pc:sldMk cId="3454948446" sldId="636"/>
-        </pc:sldMkLst>
-      </pc:sldChg>
-      <pc:sldChg chg="modSp">
-        <pc:chgData name="Zhao Jin" userId="cd05a825-544c-438a-9ba1-08e63db50b47" providerId="ADAL" clId="{1850DC85-5AAB-47D5-8AE5-72D9190B7D0B}" dt="2024-01-31T05:15:16.123" v="1"/>
-        <pc:sldMkLst>
-          <pc:docMk/>
-          <pc:sldMk cId="1916564042" sldId="637"/>
-        </pc:sldMkLst>
-      </pc:sldChg>
-      <pc:sldChg chg="modSp">
-        <pc:chgData name="Zhao Jin" userId="cd05a825-544c-438a-9ba1-08e63db50b47" providerId="ADAL" clId="{1850DC85-5AAB-47D5-8AE5-72D9190B7D0B}" dt="2024-01-31T05:15:16.123" v="1"/>
-        <pc:sldMkLst>
-          <pc:docMk/>
-          <pc:sldMk cId="3504527826" sldId="646"/>
-        </pc:sldMkLst>
-      </pc:sldChg>
-      <pc:sldChg chg="modSp">
-        <pc:chgData name="Zhao Jin" userId="cd05a825-544c-438a-9ba1-08e63db50b47" providerId="ADAL" clId="{1850DC85-5AAB-47D5-8AE5-72D9190B7D0B}" dt="2024-01-31T05:15:16.123" v="1"/>
-        <pc:sldMkLst>
-          <pc:docMk/>
-          <pc:sldMk cId="3615520278" sldId="648"/>
-        </pc:sldMkLst>
-      </pc:sldChg>
-      <pc:sldChg chg="modSp">
-        <pc:chgData name="Zhao Jin" userId="cd05a825-544c-438a-9ba1-08e63db50b47" providerId="ADAL" clId="{1850DC85-5AAB-47D5-8AE5-72D9190B7D0B}" dt="2024-01-31T05:15:16.123" v="1"/>
-        <pc:sldMkLst>
-          <pc:docMk/>
-          <pc:sldMk cId="310617255" sldId="650"/>
-        </pc:sldMkLst>
-      </pc:sldChg>
-    </pc:docChg>
-  </pc:docChgLst>
-  <pc:docChgLst>
-    <pc:chgData name="Zhao Jin" userId="cd05a825-544c-438a-9ba1-08e63db50b47" providerId="ADAL" clId="{D2C53CB4-D98E-4A4D-AB3B-F903C3FA77B9}"/>
-    <pc:docChg chg="undo custSel addSld delSld modSld">
-      <pc:chgData name="Zhao Jin" userId="cd05a825-544c-438a-9ba1-08e63db50b47" providerId="ADAL" clId="{D2C53CB4-D98E-4A4D-AB3B-F903C3FA77B9}" dt="2021-03-08T05:37:18.936" v="540"/>
-      <pc:docMkLst>
-        <pc:docMk/>
-      </pc:docMkLst>
-      <pc:sldChg chg="modSp mod">
-        <pc:chgData name="Zhao Jin" userId="cd05a825-544c-438a-9ba1-08e63db50b47" providerId="ADAL" clId="{D2C53CB4-D98E-4A4D-AB3B-F903C3FA77B9}" dt="2021-03-01T05:22:09.674" v="0" actId="20577"/>
-        <pc:sldMkLst>
-          <pc:docMk/>
-          <pc:sldMk cId="0" sldId="256"/>
-        </pc:sldMkLst>
-      </pc:sldChg>
-      <pc:sldChg chg="modAnim">
-        <pc:chgData name="Zhao Jin" userId="cd05a825-544c-438a-9ba1-08e63db50b47" providerId="ADAL" clId="{D2C53CB4-D98E-4A4D-AB3B-F903C3FA77B9}" dt="2021-03-08T05:37:18.936" v="540"/>
-        <pc:sldMkLst>
-          <pc:docMk/>
-          <pc:sldMk cId="1427618944" sldId="553"/>
-        </pc:sldMkLst>
-      </pc:sldChg>
-      <pc:sldChg chg="delSp modSp add del mod">
-        <pc:chgData name="Zhao Jin" userId="cd05a825-544c-438a-9ba1-08e63db50b47" providerId="ADAL" clId="{D2C53CB4-D98E-4A4D-AB3B-F903C3FA77B9}" dt="2021-03-08T05:22:34.940" v="208" actId="47"/>
-        <pc:sldMkLst>
-          <pc:docMk/>
-          <pc:sldMk cId="830535321" sldId="603"/>
-        </pc:sldMkLst>
-      </pc:sldChg>
-      <pc:sldChg chg="modSp mod">
-        <pc:chgData name="Zhao Jin" userId="cd05a825-544c-438a-9ba1-08e63db50b47" providerId="ADAL" clId="{D2C53CB4-D98E-4A4D-AB3B-F903C3FA77B9}" dt="2021-03-08T05:28:03.001" v="534" actId="20577"/>
-        <pc:sldMkLst>
-          <pc:docMk/>
-          <pc:sldMk cId="640598186" sldId="606"/>
-        </pc:sldMkLst>
-      </pc:sldChg>
-      <pc:sldChg chg="addSp delSp modSp add mod modAnim">
-        <pc:chgData name="Zhao Jin" userId="cd05a825-544c-438a-9ba1-08e63db50b47" providerId="ADAL" clId="{D2C53CB4-D98E-4A4D-AB3B-F903C3FA77B9}" dt="2021-03-08T05:36:39.052" v="539" actId="20577"/>
-        <pc:sldMkLst>
-          <pc:docMk/>
-          <pc:sldMk cId="3042096305" sldId="638"/>
-        </pc:sldMkLst>
-      </pc:sldChg>
-    </pc:docChg>
-  </pc:docChgLst>
-  <pc:docChgLst>
-    <pc:chgData name="Zhao Jin" userId="cd05a825-544c-438a-9ba1-08e63db50b47" providerId="ADAL" clId="{39F94C1A-1739-2146-9770-28C6D97CD74A}"/>
-    <pc:docChg chg="undo custSel addSld delSld modSld">
-      <pc:chgData name="Zhao Jin" userId="cd05a825-544c-438a-9ba1-08e63db50b47" providerId="ADAL" clId="{39F94C1A-1739-2146-9770-28C6D97CD74A}" dt="2021-01-27T04:54:28.852" v="864" actId="20577"/>
-      <pc:docMkLst>
-        <pc:docMk/>
-      </pc:docMkLst>
-      <pc:sldChg chg="modSp">
-        <pc:chgData name="Zhao Jin" userId="cd05a825-544c-438a-9ba1-08e63db50b47" providerId="ADAL" clId="{39F94C1A-1739-2146-9770-28C6D97CD74A}" dt="2021-01-27T04:29:55.834" v="1" actId="20577"/>
-        <pc:sldMkLst>
-          <pc:docMk/>
-          <pc:sldMk cId="0" sldId="256"/>
-        </pc:sldMkLst>
-      </pc:sldChg>
-      <pc:sldChg chg="addSp delSp modSp add delAnim modAnim">
-        <pc:chgData name="Zhao Jin" userId="cd05a825-544c-438a-9ba1-08e63db50b47" providerId="ADAL" clId="{39F94C1A-1739-2146-9770-28C6D97CD74A}" dt="2021-01-27T04:54:22.999" v="862" actId="20577"/>
-        <pc:sldMkLst>
-          <pc:docMk/>
-          <pc:sldMk cId="1492339910" sldId="485"/>
-        </pc:sldMkLst>
-      </pc:sldChg>
-      <pc:sldChg chg="addSp delSp modSp add modAnim">
-        <pc:chgData name="Zhao Jin" userId="cd05a825-544c-438a-9ba1-08e63db50b47" providerId="ADAL" clId="{39F94C1A-1739-2146-9770-28C6D97CD74A}" dt="2021-01-27T04:54:02.548" v="843" actId="20577"/>
-        <pc:sldMkLst>
-          <pc:docMk/>
-          <pc:sldMk cId="2775173622" sldId="524"/>
-        </pc:sldMkLst>
-      </pc:sldChg>
-      <pc:sldChg chg="add del">
-        <pc:chgData name="Zhao Jin" userId="cd05a825-544c-438a-9ba1-08e63db50b47" providerId="ADAL" clId="{39F94C1A-1739-2146-9770-28C6D97CD74A}" dt="2021-01-27T04:50:24.218" v="666"/>
-        <pc:sldMkLst>
-          <pc:docMk/>
-          <pc:sldMk cId="4023450610" sldId="524"/>
-        </pc:sldMkLst>
-      </pc:sldChg>
-      <pc:sldChg chg="del">
-        <pc:chgData name="Zhao Jin" userId="cd05a825-544c-438a-9ba1-08e63db50b47" providerId="ADAL" clId="{39F94C1A-1739-2146-9770-28C6D97CD74A}" dt="2021-01-27T04:30:02.278" v="7" actId="2696"/>
-        <pc:sldMkLst>
-          <pc:docMk/>
-          <pc:sldMk cId="3871162519" sldId="525"/>
-        </pc:sldMkLst>
-      </pc:sldChg>
-      <pc:sldChg chg="delSp modSp add">
-        <pc:chgData name="Zhao Jin" userId="cd05a825-544c-438a-9ba1-08e63db50b47" providerId="ADAL" clId="{39F94C1A-1739-2146-9770-28C6D97CD74A}" dt="2021-01-27T04:54:28.852" v="864" actId="20577"/>
-        <pc:sldMkLst>
-          <pc:docMk/>
-          <pc:sldMk cId="4078418712" sldId="525"/>
-        </pc:sldMkLst>
-      </pc:sldChg>
-      <pc:sldChg chg="del">
-        <pc:chgData name="Zhao Jin" userId="cd05a825-544c-438a-9ba1-08e63db50b47" providerId="ADAL" clId="{39F94C1A-1739-2146-9770-28C6D97CD74A}" dt="2021-01-27T04:30:02.169" v="2" actId="2696"/>
-        <pc:sldMkLst>
-          <pc:docMk/>
-          <pc:sldMk cId="2543678377" sldId="531"/>
-        </pc:sldMkLst>
-      </pc:sldChg>
-      <pc:sldChg chg="del">
-        <pc:chgData name="Zhao Jin" userId="cd05a825-544c-438a-9ba1-08e63db50b47" providerId="ADAL" clId="{39F94C1A-1739-2146-9770-28C6D97CD74A}" dt="2021-01-27T04:30:02.196" v="3" actId="2696"/>
-        <pc:sldMkLst>
-          <pc:docMk/>
-          <pc:sldMk cId="2025693378" sldId="532"/>
-        </pc:sldMkLst>
-      </pc:sldChg>
-      <pc:sldChg chg="del">
-        <pc:chgData name="Zhao Jin" userId="cd05a825-544c-438a-9ba1-08e63db50b47" providerId="ADAL" clId="{39F94C1A-1739-2146-9770-28C6D97CD74A}" dt="2021-01-27T04:30:02.254" v="5" actId="2696"/>
-        <pc:sldMkLst>
-          <pc:docMk/>
-          <pc:sldMk cId="266706937" sldId="533"/>
-        </pc:sldMkLst>
-      </pc:sldChg>
-      <pc:sldChg chg="del">
-        <pc:chgData name="Zhao Jin" userId="cd05a825-544c-438a-9ba1-08e63db50b47" providerId="ADAL" clId="{39F94C1A-1739-2146-9770-28C6D97CD74A}" dt="2021-01-27T04:30:02.230" v="4" actId="2696"/>
-        <pc:sldMkLst>
-          <pc:docMk/>
-          <pc:sldMk cId="3198948174" sldId="535"/>
-        </pc:sldMkLst>
-      </pc:sldChg>
-      <pc:sldChg chg="del">
-        <pc:chgData name="Zhao Jin" userId="cd05a825-544c-438a-9ba1-08e63db50b47" providerId="ADAL" clId="{39F94C1A-1739-2146-9770-28C6D97CD74A}" dt="2021-01-27T04:30:02.268" v="6" actId="2696"/>
-        <pc:sldMkLst>
-          <pc:docMk/>
-          <pc:sldMk cId="3984392134" sldId="537"/>
-        </pc:sldMkLst>
-      </pc:sldChg>
-      <pc:sldChg chg="modSp add">
-        <pc:chgData name="Zhao Jin" userId="cd05a825-544c-438a-9ba1-08e63db50b47" providerId="ADAL" clId="{39F94C1A-1739-2146-9770-28C6D97CD74A}" dt="2021-01-27T04:54:10.942" v="852" actId="20577"/>
-        <pc:sldMkLst>
-          <pc:docMk/>
-          <pc:sldMk cId="3949125736" sldId="548"/>
-        </pc:sldMkLst>
-      </pc:sldChg>
-      <pc:sldChg chg="modSp add">
-        <pc:chgData name="Zhao Jin" userId="cd05a825-544c-438a-9ba1-08e63db50b47" providerId="ADAL" clId="{39F94C1A-1739-2146-9770-28C6D97CD74A}" dt="2021-01-27T04:54:14.716" v="857" actId="20577"/>
-        <pc:sldMkLst>
-          <pc:docMk/>
-          <pc:sldMk cId="2939077141" sldId="549"/>
-        </pc:sldMkLst>
-      </pc:sldChg>
-    </pc:docChg>
-  </pc:docChgLst>
-  <pc:docChgLst>
-    <pc:chgData name="Zhao Jin" userId="cd05a825-544c-438a-9ba1-08e63db50b47" providerId="ADAL" clId="{1F7E6095-F298-4BFC-8850-34CFE2B7F292}"/>
-    <pc:docChg chg="modSld modMainMaster">
-      <pc:chgData name="Zhao Jin" userId="cd05a825-544c-438a-9ba1-08e63db50b47" providerId="ADAL" clId="{1F7E6095-F298-4BFC-8850-34CFE2B7F292}" dt="2024-02-01T09:43:59.479" v="0"/>
-      <pc:docMkLst>
-        <pc:docMk/>
-      </pc:docMkLst>
-      <pc:sldChg chg="modSp">
-        <pc:chgData name="Zhao Jin" userId="cd05a825-544c-438a-9ba1-08e63db50b47" providerId="ADAL" clId="{1F7E6095-F298-4BFC-8850-34CFE2B7F292}" dt="2024-02-01T09:43:59.479" v="0"/>
-        <pc:sldMkLst>
-          <pc:docMk/>
-          <pc:sldMk cId="4078418712" sldId="525"/>
-        </pc:sldMkLst>
-      </pc:sldChg>
-      <pc:sldChg chg="modSp">
-        <pc:chgData name="Zhao Jin" userId="cd05a825-544c-438a-9ba1-08e63db50b47" providerId="ADAL" clId="{1F7E6095-F298-4BFC-8850-34CFE2B7F292}" dt="2024-02-01T09:43:59.479" v="0"/>
-        <pc:sldMkLst>
-          <pc:docMk/>
-          <pc:sldMk cId="1813128722" sldId="617"/>
-        </pc:sldMkLst>
-      </pc:sldChg>
-      <pc:sldChg chg="modSp">
-        <pc:chgData name="Zhao Jin" userId="cd05a825-544c-438a-9ba1-08e63db50b47" providerId="ADAL" clId="{1F7E6095-F298-4BFC-8850-34CFE2B7F292}" dt="2024-02-01T09:43:59.479" v="0"/>
-        <pc:sldMkLst>
-          <pc:docMk/>
-          <pc:sldMk cId="4274114340" sldId="618"/>
-        </pc:sldMkLst>
-      </pc:sldChg>
-      <pc:sldChg chg="modSp">
-        <pc:chgData name="Zhao Jin" userId="cd05a825-544c-438a-9ba1-08e63db50b47" providerId="ADAL" clId="{1F7E6095-F298-4BFC-8850-34CFE2B7F292}" dt="2024-02-01T09:43:59.479" v="0"/>
-        <pc:sldMkLst>
-          <pc:docMk/>
-          <pc:sldMk cId="3454948446" sldId="636"/>
-        </pc:sldMkLst>
-      </pc:sldChg>
-      <pc:sldChg chg="modSp">
-        <pc:chgData name="Zhao Jin" userId="cd05a825-544c-438a-9ba1-08e63db50b47" providerId="ADAL" clId="{1F7E6095-F298-4BFC-8850-34CFE2B7F292}" dt="2024-02-01T09:43:59.479" v="0"/>
-        <pc:sldMkLst>
-          <pc:docMk/>
-          <pc:sldMk cId="1916564042" sldId="637"/>
-        </pc:sldMkLst>
-      </pc:sldChg>
-      <pc:sldChg chg="modSp">
-        <pc:chgData name="Zhao Jin" userId="cd05a825-544c-438a-9ba1-08e63db50b47" providerId="ADAL" clId="{1F7E6095-F298-4BFC-8850-34CFE2B7F292}" dt="2024-02-01T09:43:59.479" v="0"/>
-        <pc:sldMkLst>
-          <pc:docMk/>
-          <pc:sldMk cId="3504527826" sldId="646"/>
-        </pc:sldMkLst>
-      </pc:sldChg>
-      <pc:sldChg chg="modSp">
-        <pc:chgData name="Zhao Jin" userId="cd05a825-544c-438a-9ba1-08e63db50b47" providerId="ADAL" clId="{1F7E6095-F298-4BFC-8850-34CFE2B7F292}" dt="2024-02-01T09:43:59.479" v="0"/>
-        <pc:sldMkLst>
-          <pc:docMk/>
-          <pc:sldMk cId="3615520278" sldId="648"/>
-        </pc:sldMkLst>
-      </pc:sldChg>
-      <pc:sldChg chg="modSp">
-        <pc:chgData name="Zhao Jin" userId="cd05a825-544c-438a-9ba1-08e63db50b47" providerId="ADAL" clId="{1F7E6095-F298-4BFC-8850-34CFE2B7F292}" dt="2024-02-01T09:43:59.479" v="0"/>
-        <pc:sldMkLst>
-          <pc:docMk/>
-          <pc:sldMk cId="310617255" sldId="650"/>
-        </pc:sldMkLst>
-      </pc:sldChg>
-      <pc:sldMasterChg chg="modSp modSldLayout">
-        <pc:chgData name="Zhao Jin" userId="cd05a825-544c-438a-9ba1-08e63db50b47" providerId="ADAL" clId="{1F7E6095-F298-4BFC-8850-34CFE2B7F292}" dt="2024-02-01T09:43:59.479" v="0"/>
-        <pc:sldMasterMkLst>
-          <pc:docMk/>
-          <pc:sldMasterMk cId="0" sldId="2147485087"/>
-        </pc:sldMasterMkLst>
-        <pc:sldLayoutChg chg="modSp">
-          <pc:chgData name="Zhao Jin" userId="cd05a825-544c-438a-9ba1-08e63db50b47" providerId="ADAL" clId="{1F7E6095-F298-4BFC-8850-34CFE2B7F292}" dt="2024-02-01T09:43:59.479" v="0"/>
-          <pc:sldLayoutMkLst>
+        <pc:spChg chg="mod">
+          <ac:chgData name="Zhao Jin" userId="cd05a825-544c-438a-9ba1-08e63db50b47" providerId="ADAL" clId="{7346625B-7E8F-4E9B-A9F0-94C1DD70E907}" dt="2026-03-17T12:23:55.089" v="1787" actId="20577"/>
+          <ac:spMkLst>
             <pc:docMk/>
-            <pc:sldMasterMk cId="0" sldId="2147485087"/>
-            <pc:sldLayoutMk cId="0" sldId="2147485088"/>
-          </pc:sldLayoutMkLst>
-        </pc:sldLayoutChg>
-        <pc:sldLayoutChg chg="modSp">
-          <pc:chgData name="Zhao Jin" userId="cd05a825-544c-438a-9ba1-08e63db50b47" providerId="ADAL" clId="{1F7E6095-F298-4BFC-8850-34CFE2B7F292}" dt="2024-02-01T09:43:59.479" v="0"/>
-          <pc:sldLayoutMkLst>
-            <pc:docMk/>
-            <pc:sldMasterMk cId="0" sldId="2147485087"/>
-            <pc:sldLayoutMk cId="0" sldId="2147485089"/>
-          </pc:sldLayoutMkLst>
-        </pc:sldLayoutChg>
-        <pc:sldLayoutChg chg="modSp">
-          <pc:chgData name="Zhao Jin" userId="cd05a825-544c-438a-9ba1-08e63db50b47" providerId="ADAL" clId="{1F7E6095-F298-4BFC-8850-34CFE2B7F292}" dt="2024-02-01T09:43:59.479" v="0"/>
-          <pc:sldLayoutMkLst>
-            <pc:docMk/>
-            <pc:sldMasterMk cId="0" sldId="2147485087"/>
-            <pc:sldLayoutMk cId="0" sldId="2147485090"/>
-          </pc:sldLayoutMkLst>
-        </pc:sldLayoutChg>
-        <pc:sldLayoutChg chg="modSp">
-          <pc:chgData name="Zhao Jin" userId="cd05a825-544c-438a-9ba1-08e63db50b47" providerId="ADAL" clId="{1F7E6095-F298-4BFC-8850-34CFE2B7F292}" dt="2024-02-01T09:43:59.479" v="0"/>
-          <pc:sldLayoutMkLst>
-            <pc:docMk/>
-            <pc:sldMasterMk cId="0" sldId="2147485087"/>
-            <pc:sldLayoutMk cId="0" sldId="2147485091"/>
-          </pc:sldLayoutMkLst>
-        </pc:sldLayoutChg>
-        <pc:sldLayoutChg chg="modSp">
-          <pc:chgData name="Zhao Jin" userId="cd05a825-544c-438a-9ba1-08e63db50b47" providerId="ADAL" clId="{1F7E6095-F298-4BFC-8850-34CFE2B7F292}" dt="2024-02-01T09:43:59.479" v="0"/>
-          <pc:sldLayoutMkLst>
-            <pc:docMk/>
-            <pc:sldMasterMk cId="0" sldId="2147485087"/>
-            <pc:sldLayoutMk cId="0" sldId="2147485092"/>
-          </pc:sldLayoutMkLst>
-        </pc:sldLayoutChg>
-        <pc:sldLayoutChg chg="modSp">
-          <pc:chgData name="Zhao Jin" userId="cd05a825-544c-438a-9ba1-08e63db50b47" providerId="ADAL" clId="{1F7E6095-F298-4BFC-8850-34CFE2B7F292}" dt="2024-02-01T09:43:59.479" v="0"/>
-          <pc:sldLayoutMkLst>
-            <pc:docMk/>
-            <pc:sldMasterMk cId="0" sldId="2147485087"/>
-            <pc:sldLayoutMk cId="0" sldId="2147485093"/>
-          </pc:sldLayoutMkLst>
-        </pc:sldLayoutChg>
-        <pc:sldLayoutChg chg="modSp">
-          <pc:chgData name="Zhao Jin" userId="cd05a825-544c-438a-9ba1-08e63db50b47" providerId="ADAL" clId="{1F7E6095-F298-4BFC-8850-34CFE2B7F292}" dt="2024-02-01T09:43:59.479" v="0"/>
-          <pc:sldLayoutMkLst>
-            <pc:docMk/>
-            <pc:sldMasterMk cId="0" sldId="2147485087"/>
-            <pc:sldLayoutMk cId="0" sldId="2147485094"/>
-          </pc:sldLayoutMkLst>
-        </pc:sldLayoutChg>
-        <pc:sldLayoutChg chg="modSp">
-          <pc:chgData name="Zhao Jin" userId="cd05a825-544c-438a-9ba1-08e63db50b47" providerId="ADAL" clId="{1F7E6095-F298-4BFC-8850-34CFE2B7F292}" dt="2024-02-01T09:43:59.479" v="0"/>
-          <pc:sldLayoutMkLst>
-            <pc:docMk/>
-            <pc:sldMasterMk cId="0" sldId="2147485087"/>
-            <pc:sldLayoutMk cId="0" sldId="2147485095"/>
-          </pc:sldLayoutMkLst>
-        </pc:sldLayoutChg>
-        <pc:sldLayoutChg chg="modSp">
-          <pc:chgData name="Zhao Jin" userId="cd05a825-544c-438a-9ba1-08e63db50b47" providerId="ADAL" clId="{1F7E6095-F298-4BFC-8850-34CFE2B7F292}" dt="2024-02-01T09:43:59.479" v="0"/>
-          <pc:sldLayoutMkLst>
-            <pc:docMk/>
-            <pc:sldMasterMk cId="0" sldId="2147485087"/>
-            <pc:sldLayoutMk cId="0" sldId="2147485096"/>
-          </pc:sldLayoutMkLst>
-        </pc:sldLayoutChg>
-        <pc:sldLayoutChg chg="modSp">
-          <pc:chgData name="Zhao Jin" userId="cd05a825-544c-438a-9ba1-08e63db50b47" providerId="ADAL" clId="{1F7E6095-F298-4BFC-8850-34CFE2B7F292}" dt="2024-02-01T09:43:59.479" v="0"/>
-          <pc:sldLayoutMkLst>
-            <pc:docMk/>
-            <pc:sldMasterMk cId="0" sldId="2147485087"/>
-            <pc:sldLayoutMk cId="0" sldId="2147485097"/>
-          </pc:sldLayoutMkLst>
-        </pc:sldLayoutChg>
-        <pc:sldLayoutChg chg="modSp">
-          <pc:chgData name="Zhao Jin" userId="cd05a825-544c-438a-9ba1-08e63db50b47" providerId="ADAL" clId="{1F7E6095-F298-4BFC-8850-34CFE2B7F292}" dt="2024-02-01T09:43:59.479" v="0"/>
-          <pc:sldLayoutMkLst>
-            <pc:docMk/>
-            <pc:sldMasterMk cId="0" sldId="2147485087"/>
-            <pc:sldLayoutMk cId="0" sldId="2147485098"/>
-          </pc:sldLayoutMkLst>
-        </pc:sldLayoutChg>
-      </pc:sldMasterChg>
-    </pc:docChg>
-  </pc:docChgLst>
-  <pc:docChgLst>
-    <pc:chgData name="Zhao Jin" userId="cd05a825-544c-438a-9ba1-08e63db50b47" providerId="ADAL" clId="{FB8F02A0-9B99-4C9E-A1D1-3BF41D9621D7}"/>
-    <pc:docChg chg="undo custSel addSld delSld modSld sldOrd">
-      <pc:chgData name="Zhao Jin" userId="cd05a825-544c-438a-9ba1-08e63db50b47" providerId="ADAL" clId="{FB8F02A0-9B99-4C9E-A1D1-3BF41D9621D7}" dt="2021-02-08T02:21:29.074" v="2208" actId="20577"/>
-      <pc:docMkLst>
-        <pc:docMk/>
-      </pc:docMkLst>
-      <pc:sldChg chg="modSp">
-        <pc:chgData name="Zhao Jin" userId="cd05a825-544c-438a-9ba1-08e63db50b47" providerId="ADAL" clId="{FB8F02A0-9B99-4C9E-A1D1-3BF41D9621D7}" dt="2021-02-03T06:53:35.324" v="0"/>
-        <pc:sldMkLst>
-          <pc:docMk/>
-          <pc:sldMk cId="0" sldId="256"/>
-        </pc:sldMkLst>
-      </pc:sldChg>
-      <pc:sldChg chg="modSp del">
-        <pc:chgData name="Zhao Jin" userId="cd05a825-544c-438a-9ba1-08e63db50b47" providerId="ADAL" clId="{FB8F02A0-9B99-4C9E-A1D1-3BF41D9621D7}" dt="2021-02-03T07:15:04.758" v="547" actId="47"/>
-        <pc:sldMkLst>
-          <pc:docMk/>
-          <pc:sldMk cId="1492339910" sldId="485"/>
-        </pc:sldMkLst>
-      </pc:sldChg>
-      <pc:sldChg chg="addSp modSp add del mod">
-        <pc:chgData name="Zhao Jin" userId="cd05a825-544c-438a-9ba1-08e63db50b47" providerId="ADAL" clId="{FB8F02A0-9B99-4C9E-A1D1-3BF41D9621D7}" dt="2021-02-03T07:45:22.990" v="2123" actId="20577"/>
-        <pc:sldMkLst>
-          <pc:docMk/>
-          <pc:sldMk cId="2775173622" sldId="524"/>
-        </pc:sldMkLst>
-      </pc:sldChg>
-      <pc:sldChg chg="modSp mod">
-        <pc:chgData name="Zhao Jin" userId="cd05a825-544c-438a-9ba1-08e63db50b47" providerId="ADAL" clId="{FB8F02A0-9B99-4C9E-A1D1-3BF41D9621D7}" dt="2021-02-03T09:16:16.308" v="2184" actId="20577"/>
-        <pc:sldMkLst>
-          <pc:docMk/>
-          <pc:sldMk cId="4078418712" sldId="525"/>
-        </pc:sldMkLst>
-      </pc:sldChg>
-      <pc:sldChg chg="modSp del">
-        <pc:chgData name="Zhao Jin" userId="cd05a825-544c-438a-9ba1-08e63db50b47" providerId="ADAL" clId="{FB8F02A0-9B99-4C9E-A1D1-3BF41D9621D7}" dt="2021-02-03T07:02:36.712" v="7" actId="47"/>
-        <pc:sldMkLst>
-          <pc:docMk/>
-          <pc:sldMk cId="3949125736" sldId="548"/>
-        </pc:sldMkLst>
-      </pc:sldChg>
-      <pc:sldChg chg="modSp del">
-        <pc:chgData name="Zhao Jin" userId="cd05a825-544c-438a-9ba1-08e63db50b47" providerId="ADAL" clId="{FB8F02A0-9B99-4C9E-A1D1-3BF41D9621D7}" dt="2021-02-03T07:02:36.889" v="8" actId="47"/>
-        <pc:sldMkLst>
-          <pc:docMk/>
-          <pc:sldMk cId="2939077141" sldId="549"/>
-        </pc:sldMkLst>
-      </pc:sldChg>
-      <pc:sldChg chg="add del">
-        <pc:chgData name="Zhao Jin" userId="cd05a825-544c-438a-9ba1-08e63db50b47" providerId="ADAL" clId="{FB8F02A0-9B99-4C9E-A1D1-3BF41D9621D7}" dt="2021-02-03T07:07:45.930" v="221" actId="47"/>
-        <pc:sldMkLst>
-          <pc:docMk/>
-          <pc:sldMk cId="1352675019" sldId="551"/>
-        </pc:sldMkLst>
-      </pc:sldChg>
-      <pc:sldChg chg="addSp delSp modSp add mod">
-        <pc:chgData name="Zhao Jin" userId="cd05a825-544c-438a-9ba1-08e63db50b47" providerId="ADAL" clId="{FB8F02A0-9B99-4C9E-A1D1-3BF41D9621D7}" dt="2021-02-03T07:41:34.595" v="1864" actId="20578"/>
-        <pc:sldMkLst>
-          <pc:docMk/>
-          <pc:sldMk cId="2882118053" sldId="552"/>
-        </pc:sldMkLst>
-      </pc:sldChg>
-      <pc:sldChg chg="modSp add mod">
-        <pc:chgData name="Zhao Jin" userId="cd05a825-544c-438a-9ba1-08e63db50b47" providerId="ADAL" clId="{FB8F02A0-9B99-4C9E-A1D1-3BF41D9621D7}" dt="2021-02-03T07:20:30.275" v="935"/>
-        <pc:sldMkLst>
-          <pc:docMk/>
-          <pc:sldMk cId="2082920116" sldId="553"/>
-        </pc:sldMkLst>
-      </pc:sldChg>
-      <pc:sldChg chg="addSp delSp modSp add mod modAnim">
-        <pc:chgData name="Zhao Jin" userId="cd05a825-544c-438a-9ba1-08e63db50b47" providerId="ADAL" clId="{FB8F02A0-9B99-4C9E-A1D1-3BF41D9621D7}" dt="2021-02-03T07:42:15.454" v="1867" actId="20577"/>
-        <pc:sldMkLst>
-          <pc:docMk/>
-          <pc:sldMk cId="1659983766" sldId="554"/>
-        </pc:sldMkLst>
-      </pc:sldChg>
-      <pc:sldChg chg="addSp delSp modSp add del mod">
-        <pc:chgData name="Zhao Jin" userId="cd05a825-544c-438a-9ba1-08e63db50b47" providerId="ADAL" clId="{FB8F02A0-9B99-4C9E-A1D1-3BF41D9621D7}" dt="2021-02-03T07:07:06.993" v="219" actId="47"/>
-        <pc:sldMkLst>
-          <pc:docMk/>
-          <pc:sldMk cId="1268238251" sldId="555"/>
-        </pc:sldMkLst>
-      </pc:sldChg>
-      <pc:sldChg chg="modSp add del mod">
-        <pc:chgData name="Zhao Jin" userId="cd05a825-544c-438a-9ba1-08e63db50b47" providerId="ADAL" clId="{FB8F02A0-9B99-4C9E-A1D1-3BF41D9621D7}" dt="2021-02-03T07:42:30.854" v="1869" actId="47"/>
-        <pc:sldMkLst>
-          <pc:docMk/>
-          <pc:sldMk cId="788021743" sldId="557"/>
-        </pc:sldMkLst>
-      </pc:sldChg>
-      <pc:sldChg chg="delSp modSp add mod">
-        <pc:chgData name="Zhao Jin" userId="cd05a825-544c-438a-9ba1-08e63db50b47" providerId="ADAL" clId="{FB8F02A0-9B99-4C9E-A1D1-3BF41D9621D7}" dt="2021-02-08T02:19:37.781" v="2198" actId="478"/>
-        <pc:sldMkLst>
-          <pc:docMk/>
-          <pc:sldMk cId="686532275" sldId="558"/>
-        </pc:sldMkLst>
-      </pc:sldChg>
-      <pc:sldChg chg="delSp modSp add del mod delAnim">
-        <pc:chgData name="Zhao Jin" userId="cd05a825-544c-438a-9ba1-08e63db50b47" providerId="ADAL" clId="{FB8F02A0-9B99-4C9E-A1D1-3BF41D9621D7}" dt="2021-02-03T07:30:13.895" v="1095" actId="47"/>
-        <pc:sldMkLst>
-          <pc:docMk/>
-          <pc:sldMk cId="182578491" sldId="559"/>
-        </pc:sldMkLst>
-      </pc:sldChg>
-      <pc:sldChg chg="modSp add mod">
-        <pc:chgData name="Zhao Jin" userId="cd05a825-544c-438a-9ba1-08e63db50b47" providerId="ADAL" clId="{FB8F02A0-9B99-4C9E-A1D1-3BF41D9621D7}" dt="2021-02-03T07:20:33.509" v="937"/>
-        <pc:sldMkLst>
-          <pc:docMk/>
-          <pc:sldMk cId="1986771488" sldId="561"/>
-        </pc:sldMkLst>
-      </pc:sldChg>
-      <pc:sldChg chg="addSp delSp modSp add del mod delAnim modAnim">
-        <pc:chgData name="Zhao Jin" userId="cd05a825-544c-438a-9ba1-08e63db50b47" providerId="ADAL" clId="{FB8F02A0-9B99-4C9E-A1D1-3BF41D9621D7}" dt="2021-02-03T07:41:57.313" v="1865" actId="47"/>
-        <pc:sldMkLst>
-          <pc:docMk/>
-          <pc:sldMk cId="92291925" sldId="563"/>
-        </pc:sldMkLst>
-      </pc:sldChg>
-      <pc:sldChg chg="addSp modSp add mod modAnim">
-        <pc:chgData name="Zhao Jin" userId="cd05a825-544c-438a-9ba1-08e63db50b47" providerId="ADAL" clId="{FB8F02A0-9B99-4C9E-A1D1-3BF41D9621D7}" dt="2021-02-03T07:20:31.915" v="936"/>
-        <pc:sldMkLst>
-          <pc:docMk/>
-          <pc:sldMk cId="1276365520" sldId="564"/>
-        </pc:sldMkLst>
-      </pc:sldChg>
-      <pc:sldChg chg="delSp modSp add mod">
-        <pc:chgData name="Zhao Jin" userId="cd05a825-544c-438a-9ba1-08e63db50b47" providerId="ADAL" clId="{FB8F02A0-9B99-4C9E-A1D1-3BF41D9621D7}" dt="2021-02-03T07:20:28.829" v="934"/>
-        <pc:sldMkLst>
-          <pc:docMk/>
-          <pc:sldMk cId="827193018" sldId="565"/>
-        </pc:sldMkLst>
-      </pc:sldChg>
-      <pc:sldChg chg="modSp add mod">
-        <pc:chgData name="Zhao Jin" userId="cd05a825-544c-438a-9ba1-08e63db50b47" providerId="ADAL" clId="{FB8F02A0-9B99-4C9E-A1D1-3BF41D9621D7}" dt="2021-02-08T02:21:29.074" v="2208" actId="20577"/>
-        <pc:sldMkLst>
-          <pc:docMk/>
-          <pc:sldMk cId="3959984611" sldId="566"/>
-        </pc:sldMkLst>
-      </pc:sldChg>
-      <pc:sldChg chg="add del">
-        <pc:chgData name="Zhao Jin" userId="cd05a825-544c-438a-9ba1-08e63db50b47" providerId="ADAL" clId="{FB8F02A0-9B99-4C9E-A1D1-3BF41D9621D7}" dt="2021-02-03T07:34:00.322" v="1372" actId="47"/>
-        <pc:sldMkLst>
-          <pc:docMk/>
-          <pc:sldMk cId="243231529" sldId="567"/>
-        </pc:sldMkLst>
-      </pc:sldChg>
-      <pc:sldChg chg="modSp add del mod">
-        <pc:chgData name="Zhao Jin" userId="cd05a825-544c-438a-9ba1-08e63db50b47" providerId="ADAL" clId="{FB8F02A0-9B99-4C9E-A1D1-3BF41D9621D7}" dt="2021-02-03T07:30:57.488" v="1096" actId="47"/>
-        <pc:sldMkLst>
-          <pc:docMk/>
-          <pc:sldMk cId="3003604107" sldId="567"/>
-        </pc:sldMkLst>
-      </pc:sldChg>
-      <pc:sldChg chg="addSp delSp modSp add mod ord">
-        <pc:chgData name="Zhao Jin" userId="cd05a825-544c-438a-9ba1-08e63db50b47" providerId="ADAL" clId="{FB8F02A0-9B99-4C9E-A1D1-3BF41D9621D7}" dt="2021-02-03T07:45:20.173" v="2121" actId="20577"/>
-        <pc:sldMkLst>
-          <pc:docMk/>
-          <pc:sldMk cId="2879329457" sldId="568"/>
-        </pc:sldMkLst>
-      </pc:sldChg>
-      <pc:sldChg chg="modSp add mod">
-        <pc:chgData name="Zhao Jin" userId="cd05a825-544c-438a-9ba1-08e63db50b47" providerId="ADAL" clId="{FB8F02A0-9B99-4C9E-A1D1-3BF41D9621D7}" dt="2021-02-03T07:42:36.973" v="1870"/>
-        <pc:sldMkLst>
-          <pc:docMk/>
-          <pc:sldMk cId="4240540711" sldId="569"/>
-        </pc:sldMkLst>
-      </pc:sldChg>
-    </pc:docChg>
-  </pc:docChgLst>
-  <pc:docChgLst>
-    <pc:chgData name="Zhao Jin" userId="cd05a825-544c-438a-9ba1-08e63db50b47" providerId="ADAL" clId="{47F51979-2E84-4B6D-8D75-5B6314554A76}"/>
-    <pc:docChg chg="undo custSel addSld delSld modSld">
-      <pc:chgData name="Zhao Jin" userId="cd05a825-544c-438a-9ba1-08e63db50b47" providerId="ADAL" clId="{47F51979-2E84-4B6D-8D75-5B6314554A76}" dt="2024-03-26T01:40:53.769" v="1955" actId="20577"/>
-      <pc:docMkLst>
-        <pc:docMk/>
-      </pc:docMkLst>
-      <pc:sldChg chg="modSp mod">
-        <pc:chgData name="Zhao Jin" userId="cd05a825-544c-438a-9ba1-08e63db50b47" providerId="ADAL" clId="{47F51979-2E84-4B6D-8D75-5B6314554A76}" dt="2024-03-26T01:40:53.769" v="1955" actId="20577"/>
-        <pc:sldMkLst>
-          <pc:docMk/>
-          <pc:sldMk cId="4078418712" sldId="525"/>
-        </pc:sldMkLst>
-      </pc:sldChg>
-      <pc:sldChg chg="modSp add del">
-        <pc:chgData name="Zhao Jin" userId="cd05a825-544c-438a-9ba1-08e63db50b47" providerId="ADAL" clId="{47F51979-2E84-4B6D-8D75-5B6314554A76}" dt="2024-03-21T07:34:06.871" v="389" actId="47"/>
-        <pc:sldMkLst>
-          <pc:docMk/>
-          <pc:sldMk cId="1427618944" sldId="553"/>
-        </pc:sldMkLst>
-      </pc:sldChg>
-      <pc:sldChg chg="modSp del mod">
-        <pc:chgData name="Zhao Jin" userId="cd05a825-544c-438a-9ba1-08e63db50b47" providerId="ADAL" clId="{47F51979-2E84-4B6D-8D75-5B6314554A76}" dt="2024-03-21T07:28:00.328" v="9" actId="47"/>
-        <pc:sldMkLst>
-          <pc:docMk/>
-          <pc:sldMk cId="1813128722" sldId="617"/>
-        </pc:sldMkLst>
-      </pc:sldChg>
-      <pc:sldChg chg="del">
-        <pc:chgData name="Zhao Jin" userId="cd05a825-544c-438a-9ba1-08e63db50b47" providerId="ADAL" clId="{47F51979-2E84-4B6D-8D75-5B6314554A76}" dt="2024-03-21T07:28:00.328" v="9" actId="47"/>
-        <pc:sldMkLst>
-          <pc:docMk/>
-          <pc:sldMk cId="4274114340" sldId="618"/>
-        </pc:sldMkLst>
-      </pc:sldChg>
-      <pc:sldChg chg="del">
-        <pc:chgData name="Zhao Jin" userId="cd05a825-544c-438a-9ba1-08e63db50b47" providerId="ADAL" clId="{47F51979-2E84-4B6D-8D75-5B6314554A76}" dt="2024-03-21T07:28:00.328" v="9" actId="47"/>
-        <pc:sldMkLst>
-          <pc:docMk/>
-          <pc:sldMk cId="3454948446" sldId="636"/>
-        </pc:sldMkLst>
-      </pc:sldChg>
-      <pc:sldChg chg="addSp delSp modSp mod delAnim">
-        <pc:chgData name="Zhao Jin" userId="cd05a825-544c-438a-9ba1-08e63db50b47" providerId="ADAL" clId="{47F51979-2E84-4B6D-8D75-5B6314554A76}" dt="2024-03-26T01:37:32.256" v="1696" actId="20577"/>
-        <pc:sldMkLst>
-          <pc:docMk/>
-          <pc:sldMk cId="1916564042" sldId="637"/>
-        </pc:sldMkLst>
-      </pc:sldChg>
-      <pc:sldChg chg="addSp delSp modSp add mod addAnim delAnim">
-        <pc:chgData name="Zhao Jin" userId="cd05a825-544c-438a-9ba1-08e63db50b47" providerId="ADAL" clId="{47F51979-2E84-4B6D-8D75-5B6314554A76}" dt="2024-03-21T07:34:01.319" v="388" actId="20577"/>
-        <pc:sldMkLst>
-          <pc:docMk/>
-          <pc:sldMk cId="1179750071" sldId="642"/>
-        </pc:sldMkLst>
-      </pc:sldChg>
-      <pc:sldChg chg="addSp delSp modSp add del mod delAnim">
-        <pc:chgData name="Zhao Jin" userId="cd05a825-544c-438a-9ba1-08e63db50b47" providerId="ADAL" clId="{47F51979-2E84-4B6D-8D75-5B6314554A76}" dt="2024-03-21T07:34:06.871" v="389" actId="47"/>
-        <pc:sldMkLst>
-          <pc:docMk/>
-          <pc:sldMk cId="723901272" sldId="643"/>
-        </pc:sldMkLst>
-      </pc:sldChg>
-      <pc:sldChg chg="modSp add del">
-        <pc:chgData name="Zhao Jin" userId="cd05a825-544c-438a-9ba1-08e63db50b47" providerId="ADAL" clId="{47F51979-2E84-4B6D-8D75-5B6314554A76}" dt="2024-03-21T07:34:08.049" v="390" actId="47"/>
-        <pc:sldMkLst>
-          <pc:docMk/>
-          <pc:sldMk cId="1514327557" sldId="644"/>
-        </pc:sldMkLst>
-      </pc:sldChg>
-      <pc:sldChg chg="addSp delSp modSp add mod">
-        <pc:chgData name="Zhao Jin" userId="cd05a825-544c-438a-9ba1-08e63db50b47" providerId="ADAL" clId="{47F51979-2E84-4B6D-8D75-5B6314554A76}" dt="2024-03-26T01:38:31.365" v="1852" actId="20577"/>
-        <pc:sldMkLst>
-          <pc:docMk/>
-          <pc:sldMk cId="2535690228" sldId="644"/>
-        </pc:sldMkLst>
-      </pc:sldChg>
-      <pc:sldChg chg="modSp add del">
-        <pc:chgData name="Zhao Jin" userId="cd05a825-544c-438a-9ba1-08e63db50b47" providerId="ADAL" clId="{47F51979-2E84-4B6D-8D75-5B6314554A76}" dt="2024-03-21T07:27:51.530" v="8" actId="47"/>
-        <pc:sldMkLst>
-          <pc:docMk/>
-          <pc:sldMk cId="1862784809" sldId="645"/>
-        </pc:sldMkLst>
-      </pc:sldChg>
-      <pc:sldChg chg="modSp del mod">
-        <pc:chgData name="Zhao Jin" userId="cd05a825-544c-438a-9ba1-08e63db50b47" providerId="ADAL" clId="{47F51979-2E84-4B6D-8D75-5B6314554A76}" dt="2024-03-21T07:41:44.127" v="878" actId="47"/>
-        <pc:sldMkLst>
-          <pc:docMk/>
-          <pc:sldMk cId="3504527826" sldId="646"/>
-        </pc:sldMkLst>
-      </pc:sldChg>
-      <pc:sldChg chg="addSp delSp modSp del mod">
-        <pc:chgData name="Zhao Jin" userId="cd05a825-544c-438a-9ba1-08e63db50b47" providerId="ADAL" clId="{47F51979-2E84-4B6D-8D75-5B6314554A76}" dt="2024-03-21T07:46:22.325" v="1246" actId="47"/>
-        <pc:sldMkLst>
-          <pc:docMk/>
-          <pc:sldMk cId="3615520278" sldId="648"/>
-        </pc:sldMkLst>
-      </pc:sldChg>
-      <pc:sldChg chg="modSp del mod">
-        <pc:chgData name="Zhao Jin" userId="cd05a825-544c-438a-9ba1-08e63db50b47" providerId="ADAL" clId="{47F51979-2E84-4B6D-8D75-5B6314554A76}" dt="2024-03-21T07:45:29.534" v="1166" actId="47"/>
-        <pc:sldMkLst>
-          <pc:docMk/>
-          <pc:sldMk cId="310617255" sldId="650"/>
-        </pc:sldMkLst>
-      </pc:sldChg>
-      <pc:sldChg chg="modSp add del">
-        <pc:chgData name="Zhao Jin" userId="cd05a825-544c-438a-9ba1-08e63db50b47" providerId="ADAL" clId="{47F51979-2E84-4B6D-8D75-5B6314554A76}" dt="2024-03-21T07:34:06.871" v="389" actId="47"/>
-        <pc:sldMkLst>
-          <pc:docMk/>
-          <pc:sldMk cId="3737971943" sldId="651"/>
-        </pc:sldMkLst>
-      </pc:sldChg>
-      <pc:sldChg chg="addSp delSp add del mod">
-        <pc:chgData name="Zhao Jin" userId="cd05a825-544c-438a-9ba1-08e63db50b47" providerId="ADAL" clId="{47F51979-2E84-4B6D-8D75-5B6314554A76}" dt="2024-03-21T07:31:19.816" v="84"/>
-        <pc:sldMkLst>
-          <pc:docMk/>
-          <pc:sldMk cId="2230761952" sldId="652"/>
-        </pc:sldMkLst>
-      </pc:sldChg>
-    </pc:docChg>
-  </pc:docChgLst>
-  <pc:docChgLst>
-    <pc:chgData name="Zhao Jin" userId="cd05a825-544c-438a-9ba1-08e63db50b47" providerId="ADAL" clId="{6C0F4B72-FBBE-4161-8B0A-CAD3484D7CC3}"/>
-    <pc:docChg chg="undo custSel addSld delSld modSld">
-      <pc:chgData name="Zhao Jin" userId="cd05a825-544c-438a-9ba1-08e63db50b47" providerId="ADAL" clId="{6C0F4B72-FBBE-4161-8B0A-CAD3484D7CC3}" dt="2021-03-22T03:51:13.059" v="278" actId="1076"/>
-      <pc:docMkLst>
-        <pc:docMk/>
-      </pc:docMkLst>
-      <pc:sldChg chg="modSp mod">
-        <pc:chgData name="Zhao Jin" userId="cd05a825-544c-438a-9ba1-08e63db50b47" providerId="ADAL" clId="{6C0F4B72-FBBE-4161-8B0A-CAD3484D7CC3}" dt="2021-03-10T03:37:20.021" v="0" actId="20577"/>
-        <pc:sldMkLst>
-          <pc:docMk/>
-          <pc:sldMk cId="0" sldId="256"/>
-        </pc:sldMkLst>
-      </pc:sldChg>
-      <pc:sldChg chg="modSp mod">
-        <pc:chgData name="Zhao Jin" userId="cd05a825-544c-438a-9ba1-08e63db50b47" providerId="ADAL" clId="{6C0F4B72-FBBE-4161-8B0A-CAD3484D7CC3}" dt="2021-03-15T04:12:42.096" v="259" actId="20577"/>
-        <pc:sldMkLst>
-          <pc:docMk/>
-          <pc:sldMk cId="4078418712" sldId="525"/>
-        </pc:sldMkLst>
-      </pc:sldChg>
-      <pc:sldChg chg="modSp del">
-        <pc:chgData name="Zhao Jin" userId="cd05a825-544c-438a-9ba1-08e63db50b47" providerId="ADAL" clId="{6C0F4B72-FBBE-4161-8B0A-CAD3484D7CC3}" dt="2021-03-15T04:08:23.257" v="2" actId="47"/>
-        <pc:sldMkLst>
-          <pc:docMk/>
-          <pc:sldMk cId="1427618944" sldId="553"/>
-        </pc:sldMkLst>
-      </pc:sldChg>
-      <pc:sldChg chg="modSp del">
-        <pc:chgData name="Zhao Jin" userId="cd05a825-544c-438a-9ba1-08e63db50b47" providerId="ADAL" clId="{6C0F4B72-FBBE-4161-8B0A-CAD3484D7CC3}" dt="2021-03-15T04:08:23.257" v="2" actId="47"/>
-        <pc:sldMkLst>
-          <pc:docMk/>
-          <pc:sldMk cId="1542002799" sldId="602"/>
-        </pc:sldMkLst>
-      </pc:sldChg>
-      <pc:sldChg chg="modSp del">
-        <pc:chgData name="Zhao Jin" userId="cd05a825-544c-438a-9ba1-08e63db50b47" providerId="ADAL" clId="{6C0F4B72-FBBE-4161-8B0A-CAD3484D7CC3}" dt="2021-03-15T04:08:23.257" v="2" actId="47"/>
-        <pc:sldMkLst>
-          <pc:docMk/>
-          <pc:sldMk cId="2489370454" sldId="605"/>
-        </pc:sldMkLst>
-      </pc:sldChg>
-      <pc:sldChg chg="modSp del">
-        <pc:chgData name="Zhao Jin" userId="cd05a825-544c-438a-9ba1-08e63db50b47" providerId="ADAL" clId="{6C0F4B72-FBBE-4161-8B0A-CAD3484D7CC3}" dt="2021-03-15T04:08:23.257" v="2" actId="47"/>
-        <pc:sldMkLst>
-          <pc:docMk/>
-          <pc:sldMk cId="640598186" sldId="606"/>
-        </pc:sldMkLst>
-      </pc:sldChg>
-      <pc:sldChg chg="modSp add mod">
-        <pc:chgData name="Zhao Jin" userId="cd05a825-544c-438a-9ba1-08e63db50b47" providerId="ADAL" clId="{6C0F4B72-FBBE-4161-8B0A-CAD3484D7CC3}" dt="2021-03-15T04:10:09.343" v="51" actId="20577"/>
-        <pc:sldMkLst>
-          <pc:docMk/>
-          <pc:sldMk cId="1813128722" sldId="617"/>
-        </pc:sldMkLst>
-      </pc:sldChg>
-      <pc:sldChg chg="modSp add mod">
-        <pc:chgData name="Zhao Jin" userId="cd05a825-544c-438a-9ba1-08e63db50b47" providerId="ADAL" clId="{6C0F4B72-FBBE-4161-8B0A-CAD3484D7CC3}" dt="2021-03-15T04:09:44.781" v="43" actId="20577"/>
-        <pc:sldMkLst>
-          <pc:docMk/>
-          <pc:sldMk cId="4274114340" sldId="618"/>
-        </pc:sldMkLst>
-      </pc:sldChg>
-      <pc:sldChg chg="modSp del">
-        <pc:chgData name="Zhao Jin" userId="cd05a825-544c-438a-9ba1-08e63db50b47" providerId="ADAL" clId="{6C0F4B72-FBBE-4161-8B0A-CAD3484D7CC3}" dt="2021-03-15T04:08:23.257" v="2" actId="47"/>
-        <pc:sldMkLst>
-          <pc:docMk/>
-          <pc:sldMk cId="282410985" sldId="620"/>
-        </pc:sldMkLst>
-      </pc:sldChg>
-      <pc:sldChg chg="modSp del">
-        <pc:chgData name="Zhao Jin" userId="cd05a825-544c-438a-9ba1-08e63db50b47" providerId="ADAL" clId="{6C0F4B72-FBBE-4161-8B0A-CAD3484D7CC3}" dt="2021-03-15T04:08:23.257" v="2" actId="47"/>
-        <pc:sldMkLst>
-          <pc:docMk/>
-          <pc:sldMk cId="3503582036" sldId="622"/>
-        </pc:sldMkLst>
-      </pc:sldChg>
-      <pc:sldChg chg="modSp del">
-        <pc:chgData name="Zhao Jin" userId="cd05a825-544c-438a-9ba1-08e63db50b47" providerId="ADAL" clId="{6C0F4B72-FBBE-4161-8B0A-CAD3484D7CC3}" dt="2021-03-15T04:08:23.257" v="2" actId="47"/>
-        <pc:sldMkLst>
-          <pc:docMk/>
-          <pc:sldMk cId="1258830549" sldId="635"/>
-        </pc:sldMkLst>
-      </pc:sldChg>
-      <pc:sldChg chg="delSp modSp add mod">
-        <pc:chgData name="Zhao Jin" userId="cd05a825-544c-438a-9ba1-08e63db50b47" providerId="ADAL" clId="{6C0F4B72-FBBE-4161-8B0A-CAD3484D7CC3}" dt="2021-03-15T04:08:57.298" v="31" actId="1076"/>
-        <pc:sldMkLst>
-          <pc:docMk/>
-          <pc:sldMk cId="3454948446" sldId="636"/>
-        </pc:sldMkLst>
-      </pc:sldChg>
-      <pc:sldChg chg="add del">
-        <pc:chgData name="Zhao Jin" userId="cd05a825-544c-438a-9ba1-08e63db50b47" providerId="ADAL" clId="{6C0F4B72-FBBE-4161-8B0A-CAD3484D7CC3}" dt="2021-03-15T04:10:03.611" v="45" actId="47"/>
-        <pc:sldMkLst>
-          <pc:docMk/>
-          <pc:sldMk cId="1222248400" sldId="637"/>
-        </pc:sldMkLst>
-      </pc:sldChg>
-      <pc:sldChg chg="modSp del">
-        <pc:chgData name="Zhao Jin" userId="cd05a825-544c-438a-9ba1-08e63db50b47" providerId="ADAL" clId="{6C0F4B72-FBBE-4161-8B0A-CAD3484D7CC3}" dt="2021-03-15T04:08:23.257" v="2" actId="47"/>
-        <pc:sldMkLst>
-          <pc:docMk/>
-          <pc:sldMk cId="1235845528" sldId="637"/>
-        </pc:sldMkLst>
-      </pc:sldChg>
-      <pc:sldChg chg="modSp add mod">
-        <pc:chgData name="Zhao Jin" userId="cd05a825-544c-438a-9ba1-08e63db50b47" providerId="ADAL" clId="{6C0F4B72-FBBE-4161-8B0A-CAD3484D7CC3}" dt="2021-03-15T04:10:51.585" v="59"/>
-        <pc:sldMkLst>
-          <pc:docMk/>
-          <pc:sldMk cId="1916564042" sldId="637"/>
-        </pc:sldMkLst>
-      </pc:sldChg>
-      <pc:sldChg chg="modSp del">
-        <pc:chgData name="Zhao Jin" userId="cd05a825-544c-438a-9ba1-08e63db50b47" providerId="ADAL" clId="{6C0F4B72-FBBE-4161-8B0A-CAD3484D7CC3}" dt="2021-03-15T04:08:23.257" v="2" actId="47"/>
-        <pc:sldMkLst>
-          <pc:docMk/>
-          <pc:sldMk cId="3042096305" sldId="638"/>
-        </pc:sldMkLst>
-      </pc:sldChg>
-      <pc:sldChg chg="modSp add mod">
-        <pc:chgData name="Zhao Jin" userId="cd05a825-544c-438a-9ba1-08e63db50b47" providerId="ADAL" clId="{6C0F4B72-FBBE-4161-8B0A-CAD3484D7CC3}" dt="2021-03-15T04:10:44.279" v="58" actId="20577"/>
-        <pc:sldMkLst>
-          <pc:docMk/>
-          <pc:sldMk cId="3504527826" sldId="646"/>
-        </pc:sldMkLst>
-      </pc:sldChg>
-      <pc:sldChg chg="addSp modSp add mod">
-        <pc:chgData name="Zhao Jin" userId="cd05a825-544c-438a-9ba1-08e63db50b47" providerId="ADAL" clId="{6C0F4B72-FBBE-4161-8B0A-CAD3484D7CC3}" dt="2021-03-22T03:51:13.059" v="278" actId="1076"/>
-        <pc:sldMkLst>
-          <pc:docMk/>
-          <pc:sldMk cId="3615520278" sldId="648"/>
-        </pc:sldMkLst>
-      </pc:sldChg>
-      <pc:sldChg chg="modSp add mod">
-        <pc:chgData name="Zhao Jin" userId="cd05a825-544c-438a-9ba1-08e63db50b47" providerId="ADAL" clId="{6C0F4B72-FBBE-4161-8B0A-CAD3484D7CC3}" dt="2021-03-15T04:11:47.847" v="71" actId="6549"/>
-        <pc:sldMkLst>
-          <pc:docMk/>
-          <pc:sldMk cId="310617255" sldId="650"/>
-        </pc:sldMkLst>
-      </pc:sldChg>
-    </pc:docChg>
-  </pc:docChgLst>
-  <pc:docChgLst>
-    <pc:chgData name="Zhao Jin" userId="cd05a825-544c-438a-9ba1-08e63db50b47" providerId="ADAL" clId="{A4A0FEF4-5388-4642-A424-D6144C2A9D07}"/>
-    <pc:docChg chg="undo custSel modSld">
-      <pc:chgData name="Zhao Jin" userId="cd05a825-544c-438a-9ba1-08e63db50b47" providerId="ADAL" clId="{A4A0FEF4-5388-4642-A424-D6144C2A9D07}" dt="2021-01-25T03:36:28.487" v="214" actId="20577"/>
-      <pc:docMkLst>
-        <pc:docMk/>
-      </pc:docMkLst>
-      <pc:sldChg chg="delSp modSp">
-        <pc:chgData name="Zhao Jin" userId="cd05a825-544c-438a-9ba1-08e63db50b47" providerId="ADAL" clId="{A4A0FEF4-5388-4642-A424-D6144C2A9D07}" dt="2021-01-25T03:33:46.226" v="179"/>
-        <pc:sldMkLst>
-          <pc:docMk/>
-          <pc:sldMk cId="2543678377" sldId="531"/>
-        </pc:sldMkLst>
-      </pc:sldChg>
-      <pc:sldChg chg="delSp modSp">
-        <pc:chgData name="Zhao Jin" userId="cd05a825-544c-438a-9ba1-08e63db50b47" providerId="ADAL" clId="{A4A0FEF4-5388-4642-A424-D6144C2A9D07}" dt="2021-01-25T03:33:46.226" v="179"/>
-        <pc:sldMkLst>
-          <pc:docMk/>
-          <pc:sldMk cId="2025693378" sldId="532"/>
-        </pc:sldMkLst>
-      </pc:sldChg>
-      <pc:sldChg chg="delSp modSp">
-        <pc:chgData name="Zhao Jin" userId="cd05a825-544c-438a-9ba1-08e63db50b47" providerId="ADAL" clId="{A4A0FEF4-5388-4642-A424-D6144C2A9D07}" dt="2021-01-25T03:36:13.902" v="213" actId="403"/>
-        <pc:sldMkLst>
-          <pc:docMk/>
-          <pc:sldMk cId="266706937" sldId="533"/>
-        </pc:sldMkLst>
-      </pc:sldChg>
-      <pc:sldChg chg="addSp delSp modSp">
-        <pc:chgData name="Zhao Jin" userId="cd05a825-544c-438a-9ba1-08e63db50b47" providerId="ADAL" clId="{A4A0FEF4-5388-4642-A424-D6144C2A9D07}" dt="2021-01-25T03:36:28.487" v="214" actId="20577"/>
-        <pc:sldMkLst>
-          <pc:docMk/>
-          <pc:sldMk cId="3198948174" sldId="535"/>
-        </pc:sldMkLst>
-      </pc:sldChg>
-    </pc:docChg>
-  </pc:docChgLst>
-  <pc:docChgLst>
-    <pc:chgData name="Zhao Jin" userId="cd05a825-544c-438a-9ba1-08e63db50b47" providerId="ADAL" clId="{C328B041-D897-B548-9F0A-DA2B3CC3BF8E}"/>
-    <pc:docChg chg="undo custSel modSld">
-      <pc:chgData name="Zhao Jin" userId="cd05a825-544c-438a-9ba1-08e63db50b47" providerId="ADAL" clId="{C328B041-D897-B548-9F0A-DA2B3CC3BF8E}" dt="2021-03-08T02:30:29.708" v="502" actId="478"/>
-      <pc:docMkLst>
-        <pc:docMk/>
-      </pc:docMkLst>
-      <pc:sldChg chg="addSp delSp modSp">
-        <pc:chgData name="Zhao Jin" userId="cd05a825-544c-438a-9ba1-08e63db50b47" providerId="ADAL" clId="{C328B041-D897-B548-9F0A-DA2B3CC3BF8E}" dt="2021-03-08T01:59:34.595" v="472" actId="1076"/>
-        <pc:sldMkLst>
-          <pc:docMk/>
-          <pc:sldMk cId="640598186" sldId="606"/>
-        </pc:sldMkLst>
-      </pc:sldChg>
-      <pc:sldChg chg="addSp delSp modSp delAnim modAnim">
-        <pc:chgData name="Zhao Jin" userId="cd05a825-544c-438a-9ba1-08e63db50b47" providerId="ADAL" clId="{C328B041-D897-B548-9F0A-DA2B3CC3BF8E}" dt="2021-03-08T02:29:23.604" v="485"/>
-        <pc:sldMkLst>
-          <pc:docMk/>
-          <pc:sldMk cId="282410985" sldId="620"/>
-        </pc:sldMkLst>
-      </pc:sldChg>
-      <pc:sldChg chg="modAnim">
-        <pc:chgData name="Zhao Jin" userId="cd05a825-544c-438a-9ba1-08e63db50b47" providerId="ADAL" clId="{C328B041-D897-B548-9F0A-DA2B3CC3BF8E}" dt="2021-03-08T02:28:00.489" v="483"/>
-        <pc:sldMkLst>
-          <pc:docMk/>
-          <pc:sldMk cId="3503582036" sldId="622"/>
-        </pc:sldMkLst>
-      </pc:sldChg>
-      <pc:sldChg chg="delSp modSp modAnim">
-        <pc:chgData name="Zhao Jin" userId="cd05a825-544c-438a-9ba1-08e63db50b47" providerId="ADAL" clId="{C328B041-D897-B548-9F0A-DA2B3CC3BF8E}" dt="2021-03-08T02:30:29.708" v="502" actId="478"/>
-        <pc:sldMkLst>
-          <pc:docMk/>
-          <pc:sldMk cId="1258830549" sldId="635"/>
-        </pc:sldMkLst>
+            <pc:sldMk cId="281145632" sldId="647"/>
+            <ac:spMk id="8" creationId="{D28E8E80-E5E0-A73E-5905-E85A34A23CA1}"/>
+          </ac:spMkLst>
+        </pc:spChg>
       </pc:sldChg>
     </pc:docChg>
   </pc:docChgLst>
@@ -1943,7 +884,7 @@
               <a:pPr>
                 <a:defRPr/>
               </a:pPr>
-              <a:t>3/24/2025</a:t>
+              <a:t>3/24/2026</a:t>
             </a:fld>
             <a:endParaRPr lang="en-US"/>
           </a:p>
@@ -2435,7 +1376,7 @@
           <a:lstStyle/>
           <a:p>
             <a:r>
-              <a:rPr lang="en-US"/>
+              <a:rPr lang="en-US" dirty="0"/>
               <a:t>CS1010 Programming Methodology</a:t>
             </a:r>
           </a:p>
@@ -2494,7 +1435,7 @@
     </p:spTree>
     <p:extLst>
       <p:ext uri="{BB962C8B-B14F-4D97-AF65-F5344CB8AC3E}">
-        <p14:creationId xmlns:p14="http://schemas.microsoft.com/office/powerpoint/2010/main" val="4109179995"/>
+        <p14:creationId xmlns:p14="http://schemas.microsoft.com/office/powerpoint/2010/main" val="3257243782"/>
       </p:ext>
     </p:extLst>
   </p:cSld>
@@ -2552,7 +1493,7 @@
           <a:lstStyle/>
           <a:p>
             <a:r>
-              <a:rPr lang="en-US" dirty="0"/>
+              <a:rPr lang="en-US"/>
               <a:t>CS1010 Programming Methodology</a:t>
             </a:r>
           </a:p>
@@ -2611,7 +1552,7 @@
     </p:spTree>
     <p:extLst>
       <p:ext uri="{BB962C8B-B14F-4D97-AF65-F5344CB8AC3E}">
-        <p14:creationId xmlns:p14="http://schemas.microsoft.com/office/powerpoint/2010/main" val="3257243782"/>
+        <p14:creationId xmlns:p14="http://schemas.microsoft.com/office/powerpoint/2010/main" val="4109179995"/>
       </p:ext>
     </p:extLst>
   </p:cSld>
@@ -2622,6 +1563,288 @@
 </file>
 
 <file path=ppt/notesSlides/notesSlide5.xml><?xml version="1.0" encoding="utf-8"?>
+<p:notes xmlns:a="http://schemas.openxmlformats.org/drawingml/2006/main" xmlns:r="http://schemas.openxmlformats.org/officeDocument/2006/relationships" xmlns:p="http://schemas.openxmlformats.org/presentationml/2006/main">
+  <p:cSld>
+    <p:spTree>
+      <p:nvGrpSpPr>
+        <p:cNvPr id="1" name="">
+          <a:extLst>
+            <a:ext uri="{FF2B5EF4-FFF2-40B4-BE49-F238E27FC236}">
+              <a16:creationId xmlns:a16="http://schemas.microsoft.com/office/drawing/2014/main" id="{9D98F9AD-DA28-E75D-E819-7CABCD07D8D5}"/>
+            </a:ext>
+          </a:extLst>
+        </p:cNvPr>
+        <p:cNvGrpSpPr/>
+        <p:nvPr/>
+      </p:nvGrpSpPr>
+      <p:grpSpPr>
+        <a:xfrm>
+          <a:off x="0" y="0"/>
+          <a:ext cx="0" cy="0"/>
+          <a:chOff x="0" y="0"/>
+          <a:chExt cx="0" cy="0"/>
+        </a:xfrm>
+      </p:grpSpPr>
+      <p:sp>
+        <p:nvSpPr>
+          <p:cNvPr id="64514" name="Rectangle 2">
+            <a:extLst>
+              <a:ext uri="{FF2B5EF4-FFF2-40B4-BE49-F238E27FC236}">
+                <a16:creationId xmlns:a16="http://schemas.microsoft.com/office/drawing/2014/main" id="{996B8C44-FB6E-37CD-C8A8-D4B426D724C5}"/>
+              </a:ext>
+            </a:extLst>
+          </p:cNvPr>
+          <p:cNvSpPr>
+            <a:spLocks noGrp="1" noChangeArrowheads="1"/>
+          </p:cNvSpPr>
+          <p:nvPr>
+            <p:ph type="hdr" sz="quarter"/>
+          </p:nvPr>
+        </p:nvSpPr>
+        <p:spPr bwMode="auto">
+          <a:xfrm>
+            <a:off x="0" y="0"/>
+            <a:ext cx="3038786" cy="465341"/>
+          </a:xfrm>
+          <a:noFill/>
+          <a:ln>
+            <a:miter lim="800000"/>
+            <a:headEnd/>
+            <a:tailEnd/>
+          </a:ln>
+        </p:spPr>
+        <p:txBody>
+          <a:bodyPr wrap="square" numCol="1" anchor="t" anchorCtr="0" compatLnSpc="1">
+            <a:prstTxWarp prst="textNoShape">
+              <a:avLst/>
+            </a:prstTxWarp>
+          </a:bodyPr>
+          <a:lstStyle/>
+          <a:p>
+            <a:r>
+              <a:rPr lang="en-US"/>
+              <a:t>CS1010 Programming Methodology</a:t>
+            </a:r>
+          </a:p>
+        </p:txBody>
+      </p:sp>
+      <p:sp>
+        <p:nvSpPr>
+          <p:cNvPr id="64515" name="Rectangle 2">
+            <a:extLst>
+              <a:ext uri="{FF2B5EF4-FFF2-40B4-BE49-F238E27FC236}">
+                <a16:creationId xmlns:a16="http://schemas.microsoft.com/office/drawing/2014/main" id="{78B43AC5-8F01-AB5A-58C1-2017B633DFEC}"/>
+              </a:ext>
+            </a:extLst>
+          </p:cNvPr>
+          <p:cNvSpPr>
+            <a:spLocks noGrp="1" noRot="1" noChangeAspect="1" noChangeArrowheads="1" noTextEdit="1"/>
+          </p:cNvSpPr>
+          <p:nvPr>
+            <p:ph type="sldImg"/>
+          </p:nvPr>
+        </p:nvSpPr>
+        <p:spPr bwMode="auto">
+          <a:xfrm>
+            <a:off x="1182688" y="696913"/>
+            <a:ext cx="4648200" cy="3486150"/>
+          </a:xfrm>
+          <a:noFill/>
+          <a:ln>
+            <a:solidFill>
+              <a:srgbClr val="000000"/>
+            </a:solidFill>
+            <a:miter lim="800000"/>
+            <a:headEnd/>
+            <a:tailEnd/>
+          </a:ln>
+        </p:spPr>
+      </p:sp>
+      <p:sp>
+        <p:nvSpPr>
+          <p:cNvPr id="64516" name="Rectangle 3">
+            <a:extLst>
+              <a:ext uri="{FF2B5EF4-FFF2-40B4-BE49-F238E27FC236}">
+                <a16:creationId xmlns:a16="http://schemas.microsoft.com/office/drawing/2014/main" id="{EEAECD59-CC78-DD6B-3CD7-8EF2F2305A13}"/>
+              </a:ext>
+            </a:extLst>
+          </p:cNvPr>
+          <p:cNvSpPr>
+            <a:spLocks noGrp="1" noChangeArrowheads="1"/>
+          </p:cNvSpPr>
+          <p:nvPr>
+            <p:ph type="body" idx="1"/>
+          </p:nvPr>
+        </p:nvSpPr>
+        <p:spPr>
+          <a:ln w="9525"/>
+        </p:spPr>
+        <p:txBody>
+          <a:bodyPr/>
+          <a:lstStyle/>
+          <a:p>
+            <a:pPr eaLnBrk="1" hangingPunct="1">
+              <a:defRPr/>
+            </a:pPr>
+            <a:endParaRPr lang="en-US" dirty="0"/>
+          </a:p>
+        </p:txBody>
+      </p:sp>
+    </p:spTree>
+    <p:extLst>
+      <p:ext uri="{BB962C8B-B14F-4D97-AF65-F5344CB8AC3E}">
+        <p14:creationId xmlns:p14="http://schemas.microsoft.com/office/powerpoint/2010/main" val="1680432506"/>
+      </p:ext>
+    </p:extLst>
+  </p:cSld>
+  <p:clrMapOvr>
+    <a:masterClrMapping/>
+  </p:clrMapOvr>
+</p:notes>
+</file>
+
+<file path=ppt/notesSlides/notesSlide6.xml><?xml version="1.0" encoding="utf-8"?>
+<p:notes xmlns:a="http://schemas.openxmlformats.org/drawingml/2006/main" xmlns:r="http://schemas.openxmlformats.org/officeDocument/2006/relationships" xmlns:p="http://schemas.openxmlformats.org/presentationml/2006/main">
+  <p:cSld>
+    <p:spTree>
+      <p:nvGrpSpPr>
+        <p:cNvPr id="1" name="">
+          <a:extLst>
+            <a:ext uri="{FF2B5EF4-FFF2-40B4-BE49-F238E27FC236}">
+              <a16:creationId xmlns:a16="http://schemas.microsoft.com/office/drawing/2014/main" id="{6A06D5E2-A693-E742-6ACB-A8BA96C26F99}"/>
+            </a:ext>
+          </a:extLst>
+        </p:cNvPr>
+        <p:cNvGrpSpPr/>
+        <p:nvPr/>
+      </p:nvGrpSpPr>
+      <p:grpSpPr>
+        <a:xfrm>
+          <a:off x="0" y="0"/>
+          <a:ext cx="0" cy="0"/>
+          <a:chOff x="0" y="0"/>
+          <a:chExt cx="0" cy="0"/>
+        </a:xfrm>
+      </p:grpSpPr>
+      <p:sp>
+        <p:nvSpPr>
+          <p:cNvPr id="64514" name="Rectangle 2">
+            <a:extLst>
+              <a:ext uri="{FF2B5EF4-FFF2-40B4-BE49-F238E27FC236}">
+                <a16:creationId xmlns:a16="http://schemas.microsoft.com/office/drawing/2014/main" id="{23BF07D0-2128-944C-3D52-9EC404ED1AD3}"/>
+              </a:ext>
+            </a:extLst>
+          </p:cNvPr>
+          <p:cNvSpPr>
+            <a:spLocks noGrp="1" noChangeArrowheads="1"/>
+          </p:cNvSpPr>
+          <p:nvPr>
+            <p:ph type="hdr" sz="quarter"/>
+          </p:nvPr>
+        </p:nvSpPr>
+        <p:spPr bwMode="auto">
+          <a:xfrm>
+            <a:off x="0" y="0"/>
+            <a:ext cx="3038786" cy="465341"/>
+          </a:xfrm>
+          <a:noFill/>
+          <a:ln>
+            <a:miter lim="800000"/>
+            <a:headEnd/>
+            <a:tailEnd/>
+          </a:ln>
+        </p:spPr>
+        <p:txBody>
+          <a:bodyPr wrap="square" numCol="1" anchor="t" anchorCtr="0" compatLnSpc="1">
+            <a:prstTxWarp prst="textNoShape">
+              <a:avLst/>
+            </a:prstTxWarp>
+          </a:bodyPr>
+          <a:lstStyle/>
+          <a:p>
+            <a:r>
+              <a:rPr lang="en-US"/>
+              <a:t>CS1010 Programming Methodology</a:t>
+            </a:r>
+          </a:p>
+        </p:txBody>
+      </p:sp>
+      <p:sp>
+        <p:nvSpPr>
+          <p:cNvPr id="64515" name="Rectangle 2">
+            <a:extLst>
+              <a:ext uri="{FF2B5EF4-FFF2-40B4-BE49-F238E27FC236}">
+                <a16:creationId xmlns:a16="http://schemas.microsoft.com/office/drawing/2014/main" id="{E852469C-FD90-15C2-C7EE-AE8E1C3D1E80}"/>
+              </a:ext>
+            </a:extLst>
+          </p:cNvPr>
+          <p:cNvSpPr>
+            <a:spLocks noGrp="1" noRot="1" noChangeAspect="1" noChangeArrowheads="1" noTextEdit="1"/>
+          </p:cNvSpPr>
+          <p:nvPr>
+            <p:ph type="sldImg"/>
+          </p:nvPr>
+        </p:nvSpPr>
+        <p:spPr bwMode="auto">
+          <a:xfrm>
+            <a:off x="1182688" y="696913"/>
+            <a:ext cx="4648200" cy="3486150"/>
+          </a:xfrm>
+          <a:noFill/>
+          <a:ln>
+            <a:solidFill>
+              <a:srgbClr val="000000"/>
+            </a:solidFill>
+            <a:miter lim="800000"/>
+            <a:headEnd/>
+            <a:tailEnd/>
+          </a:ln>
+        </p:spPr>
+      </p:sp>
+      <p:sp>
+        <p:nvSpPr>
+          <p:cNvPr id="64516" name="Rectangle 3">
+            <a:extLst>
+              <a:ext uri="{FF2B5EF4-FFF2-40B4-BE49-F238E27FC236}">
+                <a16:creationId xmlns:a16="http://schemas.microsoft.com/office/drawing/2014/main" id="{48D3AF0F-8D70-A789-1E19-2EAF9F3A79DB}"/>
+              </a:ext>
+            </a:extLst>
+          </p:cNvPr>
+          <p:cNvSpPr>
+            <a:spLocks noGrp="1" noChangeArrowheads="1"/>
+          </p:cNvSpPr>
+          <p:nvPr>
+            <p:ph type="body" idx="1"/>
+          </p:nvPr>
+        </p:nvSpPr>
+        <p:spPr>
+          <a:ln w="9525"/>
+        </p:spPr>
+        <p:txBody>
+          <a:bodyPr/>
+          <a:lstStyle/>
+          <a:p>
+            <a:pPr eaLnBrk="1" hangingPunct="1">
+              <a:defRPr/>
+            </a:pPr>
+            <a:endParaRPr lang="en-US" dirty="0"/>
+          </a:p>
+        </p:txBody>
+      </p:sp>
+    </p:spTree>
+    <p:extLst>
+      <p:ext uri="{BB962C8B-B14F-4D97-AF65-F5344CB8AC3E}">
+        <p14:creationId xmlns:p14="http://schemas.microsoft.com/office/powerpoint/2010/main" val="1850839806"/>
+      </p:ext>
+    </p:extLst>
+  </p:cSld>
+  <p:clrMapOvr>
+    <a:masterClrMapping/>
+  </p:clrMapOvr>
+</p:notes>
+</file>
+
+<file path=ppt/notesSlides/notesSlide7.xml><?xml version="1.0" encoding="utf-8"?>
 <p:notes xmlns:a="http://schemas.openxmlformats.org/drawingml/2006/main" xmlns:r="http://schemas.openxmlformats.org/officeDocument/2006/relationships" xmlns:p="http://schemas.openxmlformats.org/presentationml/2006/main">
   <p:cSld>
     <p:spTree>
@@ -6770,12 +5993,24 @@
             </a:pPr>
             <a:r>
               <a:rPr lang="en-US" dirty="0"/>
-              <a:t>Use of 2D arrays (esp. in </a:t>
-            </a:r>
-            <a:r>
-              <a:rPr lang="en-US"/>
-              <a:t>functions)</a:t>
-            </a:r>
+              <a:t>Use of 2D arrays (esp. in functions)</a:t>
+            </a:r>
+          </a:p>
+          <a:p>
+            <a:pPr marL="274320" lvl="1" indent="0">
+              <a:spcBef>
+                <a:spcPts val="600"/>
+              </a:spcBef>
+              <a:buClr>
+                <a:schemeClr val="tx1">
+                  <a:lumMod val="90000"/>
+                  <a:lumOff val="10000"/>
+                </a:schemeClr>
+              </a:buClr>
+              <a:buSzPct val="100000"/>
+              <a:buNone/>
+              <a:defRPr/>
+            </a:pPr>
             <a:endParaRPr lang="en-US" dirty="0"/>
           </a:p>
           <a:p>
@@ -6794,7 +6029,14 @@
               <a:buChar char="§"/>
               <a:defRPr/>
             </a:pPr>
-            <a:endParaRPr lang="en-US" dirty="0"/>
+            <a:r>
+              <a:rPr lang="en-US" dirty="0">
+                <a:solidFill>
+                  <a:srgbClr val="0000FF"/>
+                </a:solidFill>
+              </a:rPr>
+              <a:t>Problem Solving</a:t>
+            </a:r>
           </a:p>
           <a:p>
             <a:pPr marL="347663" indent="-347663">
@@ -6851,23 +6093,6 @@
             <a:endParaRPr lang="en-US" dirty="0"/>
           </a:p>
           <a:p>
-            <a:pPr marL="0" indent="0">
-              <a:spcBef>
-                <a:spcPts val="600"/>
-              </a:spcBef>
-              <a:buClr>
-                <a:schemeClr val="tx1">
-                  <a:lumMod val="90000"/>
-                  <a:lumOff val="10000"/>
-                </a:schemeClr>
-              </a:buClr>
-              <a:buSzPct val="100000"/>
-              <a:buNone/>
-              <a:defRPr/>
-            </a:pPr>
-            <a:endParaRPr lang="en-US" dirty="0"/>
-          </a:p>
-          <a:p>
             <a:pPr marL="347663" indent="-347663">
               <a:spcBef>
                 <a:spcPts val="600"/>
@@ -6883,7 +6108,24 @@
               <a:buChar char="§"/>
               <a:defRPr/>
             </a:pPr>
-            <a:endParaRPr lang="en-US" sz="2800" dirty="0"/>
+            <a:endParaRPr lang="en-US" dirty="0"/>
+          </a:p>
+          <a:p>
+            <a:pPr marL="0" indent="0">
+              <a:spcBef>
+                <a:spcPts val="600"/>
+              </a:spcBef>
+              <a:buClr>
+                <a:schemeClr val="tx1">
+                  <a:lumMod val="90000"/>
+                  <a:lumOff val="10000"/>
+                </a:schemeClr>
+              </a:buClr>
+              <a:buSzPct val="100000"/>
+              <a:buNone/>
+              <a:defRPr/>
+            </a:pPr>
+            <a:endParaRPr lang="en-US" dirty="0"/>
           </a:p>
           <a:p>
             <a:pPr marL="347663" indent="-347663">
@@ -7029,6 +6271,24 @@
             </a:pPr>
             <a:endParaRPr lang="en-US" sz="2800" dirty="0"/>
           </a:p>
+          <a:p>
+            <a:pPr marL="347663" indent="-347663">
+              <a:spcBef>
+                <a:spcPts val="600"/>
+              </a:spcBef>
+              <a:buClr>
+                <a:schemeClr val="tx1">
+                  <a:lumMod val="90000"/>
+                  <a:lumOff val="10000"/>
+                </a:schemeClr>
+              </a:buClr>
+              <a:buSzPct val="100000"/>
+              <a:buFont typeface="Wingdings" panose="05000000000000000000" pitchFamily="2" charset="2"/>
+              <a:buChar char="§"/>
+              <a:defRPr/>
+            </a:pPr>
+            <a:endParaRPr lang="en-US" sz="2800" dirty="0"/>
+          </a:p>
         </p:txBody>
       </p:sp>
       <p:sp>
@@ -7145,6 +6405,330 @@
   <p:transition>
     <p:fade/>
   </p:transition>
+  <p:timing>
+    <p:tnLst>
+      <p:par>
+        <p:cTn id="1" dur="indefinite" restart="never" nodeType="tmRoot">
+          <p:childTnLst>
+            <p:seq concurrent="1" nextAc="seek">
+              <p:cTn id="2" dur="indefinite" nodeType="mainSeq">
+                <p:childTnLst>
+                  <p:par>
+                    <p:cTn id="3" fill="hold">
+                      <p:stCondLst>
+                        <p:cond delay="indefinite"/>
+                      </p:stCondLst>
+                      <p:childTnLst>
+                        <p:par>
+                          <p:cTn id="4" fill="hold">
+                            <p:stCondLst>
+                              <p:cond delay="0"/>
+                            </p:stCondLst>
+                            <p:childTnLst>
+                              <p:par>
+                                <p:cTn id="5" presetID="1" presetClass="entr" presetSubtype="0" fill="hold" nodeType="clickEffect">
+                                  <p:stCondLst>
+                                    <p:cond delay="0"/>
+                                  </p:stCondLst>
+                                  <p:childTnLst>
+                                    <p:set>
+                                      <p:cBhvr>
+                                        <p:cTn id="6" dur="1" fill="hold">
+                                          <p:stCondLst>
+                                            <p:cond delay="0"/>
+                                          </p:stCondLst>
+                                        </p:cTn>
+                                        <p:tgtEl>
+                                          <p:spTgt spid="8">
+                                            <p:txEl>
+                                              <p:pRg st="1" end="1"/>
+                                            </p:txEl>
+                                          </p:spTgt>
+                                        </p:tgtEl>
+                                        <p:attrNameLst>
+                                          <p:attrName>style.visibility</p:attrName>
+                                        </p:attrNameLst>
+                                      </p:cBhvr>
+                                      <p:to>
+                                        <p:strVal val="visible"/>
+                                      </p:to>
+                                    </p:set>
+                                  </p:childTnLst>
+                                </p:cTn>
+                              </p:par>
+                            </p:childTnLst>
+                          </p:cTn>
+                        </p:par>
+                      </p:childTnLst>
+                    </p:cTn>
+                  </p:par>
+                  <p:par>
+                    <p:cTn id="7" fill="hold">
+                      <p:stCondLst>
+                        <p:cond delay="indefinite"/>
+                      </p:stCondLst>
+                      <p:childTnLst>
+                        <p:par>
+                          <p:cTn id="8" fill="hold">
+                            <p:stCondLst>
+                              <p:cond delay="0"/>
+                            </p:stCondLst>
+                            <p:childTnLst>
+                              <p:par>
+                                <p:cTn id="9" presetID="1" presetClass="entr" presetSubtype="0" fill="hold" nodeType="clickEffect">
+                                  <p:stCondLst>
+                                    <p:cond delay="0"/>
+                                  </p:stCondLst>
+                                  <p:childTnLst>
+                                    <p:set>
+                                      <p:cBhvr>
+                                        <p:cTn id="10" dur="1" fill="hold">
+                                          <p:stCondLst>
+                                            <p:cond delay="0"/>
+                                          </p:stCondLst>
+                                        </p:cTn>
+                                        <p:tgtEl>
+                                          <p:spTgt spid="8">
+                                            <p:txEl>
+                                              <p:pRg st="2" end="2"/>
+                                            </p:txEl>
+                                          </p:spTgt>
+                                        </p:tgtEl>
+                                        <p:attrNameLst>
+                                          <p:attrName>style.visibility</p:attrName>
+                                        </p:attrNameLst>
+                                      </p:cBhvr>
+                                      <p:to>
+                                        <p:strVal val="visible"/>
+                                      </p:to>
+                                    </p:set>
+                                  </p:childTnLst>
+                                </p:cTn>
+                              </p:par>
+                            </p:childTnLst>
+                          </p:cTn>
+                        </p:par>
+                      </p:childTnLst>
+                    </p:cTn>
+                  </p:par>
+                  <p:par>
+                    <p:cTn id="11" fill="hold">
+                      <p:stCondLst>
+                        <p:cond delay="indefinite"/>
+                      </p:stCondLst>
+                      <p:childTnLst>
+                        <p:par>
+                          <p:cTn id="12" fill="hold">
+                            <p:stCondLst>
+                              <p:cond delay="0"/>
+                            </p:stCondLst>
+                            <p:childTnLst>
+                              <p:par>
+                                <p:cTn id="13" presetID="1" presetClass="entr" presetSubtype="0" fill="hold" nodeType="clickEffect">
+                                  <p:stCondLst>
+                                    <p:cond delay="0"/>
+                                  </p:stCondLst>
+                                  <p:childTnLst>
+                                    <p:set>
+                                      <p:cBhvr>
+                                        <p:cTn id="14" dur="1" fill="hold">
+                                          <p:stCondLst>
+                                            <p:cond delay="0"/>
+                                          </p:stCondLst>
+                                        </p:cTn>
+                                        <p:tgtEl>
+                                          <p:spTgt spid="8">
+                                            <p:txEl>
+                                              <p:pRg st="3" end="3"/>
+                                            </p:txEl>
+                                          </p:spTgt>
+                                        </p:tgtEl>
+                                        <p:attrNameLst>
+                                          <p:attrName>style.visibility</p:attrName>
+                                        </p:attrNameLst>
+                                      </p:cBhvr>
+                                      <p:to>
+                                        <p:strVal val="visible"/>
+                                      </p:to>
+                                    </p:set>
+                                  </p:childTnLst>
+                                </p:cTn>
+                              </p:par>
+                            </p:childTnLst>
+                          </p:cTn>
+                        </p:par>
+                      </p:childTnLst>
+                    </p:cTn>
+                  </p:par>
+                  <p:par>
+                    <p:cTn id="15" fill="hold">
+                      <p:stCondLst>
+                        <p:cond delay="indefinite"/>
+                      </p:stCondLst>
+                      <p:childTnLst>
+                        <p:par>
+                          <p:cTn id="16" fill="hold">
+                            <p:stCondLst>
+                              <p:cond delay="0"/>
+                            </p:stCondLst>
+                            <p:childTnLst>
+                              <p:par>
+                                <p:cTn id="17" presetID="1" presetClass="entr" presetSubtype="0" fill="hold" nodeType="clickEffect">
+                                  <p:stCondLst>
+                                    <p:cond delay="0"/>
+                                  </p:stCondLst>
+                                  <p:childTnLst>
+                                    <p:set>
+                                      <p:cBhvr>
+                                        <p:cTn id="18" dur="1" fill="hold">
+                                          <p:stCondLst>
+                                            <p:cond delay="0"/>
+                                          </p:stCondLst>
+                                        </p:cTn>
+                                        <p:tgtEl>
+                                          <p:spTgt spid="8">
+                                            <p:txEl>
+                                              <p:pRg st="6" end="6"/>
+                                            </p:txEl>
+                                          </p:spTgt>
+                                        </p:tgtEl>
+                                        <p:attrNameLst>
+                                          <p:attrName>style.visibility</p:attrName>
+                                        </p:attrNameLst>
+                                      </p:cBhvr>
+                                      <p:to>
+                                        <p:strVal val="visible"/>
+                                      </p:to>
+                                    </p:set>
+                                  </p:childTnLst>
+                                </p:cTn>
+                              </p:par>
+                            </p:childTnLst>
+                          </p:cTn>
+                        </p:par>
+                      </p:childTnLst>
+                    </p:cTn>
+                  </p:par>
+                  <p:par>
+                    <p:cTn id="19" fill="hold">
+                      <p:stCondLst>
+                        <p:cond delay="indefinite"/>
+                      </p:stCondLst>
+                      <p:childTnLst>
+                        <p:par>
+                          <p:cTn id="20" fill="hold">
+                            <p:stCondLst>
+                              <p:cond delay="0"/>
+                            </p:stCondLst>
+                            <p:childTnLst>
+                              <p:par>
+                                <p:cTn id="21" presetID="1" presetClass="entr" presetSubtype="0" fill="hold" nodeType="clickEffect">
+                                  <p:stCondLst>
+                                    <p:cond delay="0"/>
+                                  </p:stCondLst>
+                                  <p:childTnLst>
+                                    <p:set>
+                                      <p:cBhvr>
+                                        <p:cTn id="22" dur="1" fill="hold">
+                                          <p:stCondLst>
+                                            <p:cond delay="0"/>
+                                          </p:stCondLst>
+                                        </p:cTn>
+                                        <p:tgtEl>
+                                          <p:spTgt spid="8">
+                                            <p:txEl>
+                                              <p:pRg st="7" end="7"/>
+                                            </p:txEl>
+                                          </p:spTgt>
+                                        </p:tgtEl>
+                                        <p:attrNameLst>
+                                          <p:attrName>style.visibility</p:attrName>
+                                        </p:attrNameLst>
+                                      </p:cBhvr>
+                                      <p:to>
+                                        <p:strVal val="visible"/>
+                                      </p:to>
+                                    </p:set>
+                                  </p:childTnLst>
+                                </p:cTn>
+                              </p:par>
+                            </p:childTnLst>
+                          </p:cTn>
+                        </p:par>
+                      </p:childTnLst>
+                    </p:cTn>
+                  </p:par>
+                  <p:par>
+                    <p:cTn id="23" fill="hold">
+                      <p:stCondLst>
+                        <p:cond delay="indefinite"/>
+                      </p:stCondLst>
+                      <p:childTnLst>
+                        <p:par>
+                          <p:cTn id="24" fill="hold">
+                            <p:stCondLst>
+                              <p:cond delay="0"/>
+                            </p:stCondLst>
+                            <p:childTnLst>
+                              <p:par>
+                                <p:cTn id="25" presetID="1" presetClass="entr" presetSubtype="0" fill="hold" nodeType="clickEffect">
+                                  <p:stCondLst>
+                                    <p:cond delay="0"/>
+                                  </p:stCondLst>
+                                  <p:childTnLst>
+                                    <p:set>
+                                      <p:cBhvr>
+                                        <p:cTn id="26" dur="1" fill="hold">
+                                          <p:stCondLst>
+                                            <p:cond delay="0"/>
+                                          </p:stCondLst>
+                                        </p:cTn>
+                                        <p:tgtEl>
+                                          <p:spTgt spid="8">
+                                            <p:txEl>
+                                              <p:pRg st="9" end="9"/>
+                                            </p:txEl>
+                                          </p:spTgt>
+                                        </p:tgtEl>
+                                        <p:attrNameLst>
+                                          <p:attrName>style.visibility</p:attrName>
+                                        </p:attrNameLst>
+                                      </p:cBhvr>
+                                      <p:to>
+                                        <p:strVal val="visible"/>
+                                      </p:to>
+                                    </p:set>
+                                  </p:childTnLst>
+                                </p:cTn>
+                              </p:par>
+                            </p:childTnLst>
+                          </p:cTn>
+                        </p:par>
+                      </p:childTnLst>
+                    </p:cTn>
+                  </p:par>
+                </p:childTnLst>
+              </p:cTn>
+              <p:prevCondLst>
+                <p:cond evt="onPrev" delay="0">
+                  <p:tgtEl>
+                    <p:sldTgt/>
+                  </p:tgtEl>
+                </p:cond>
+              </p:prevCondLst>
+              <p:nextCondLst>
+                <p:cond evt="onNext" delay="0">
+                  <p:tgtEl>
+                    <p:sldTgt/>
+                  </p:tgtEl>
+                </p:cond>
+              </p:nextCondLst>
+            </p:seq>
+          </p:childTnLst>
+        </p:cTn>
+      </p:par>
+    </p:tnLst>
+  </p:timing>
 </p:sld>
 </file>
 
@@ -7167,266 +6751,6 @@
       </p:grpSpPr>
       <p:sp>
         <p:nvSpPr>
-          <p:cNvPr id="8" name="Content Placeholder 5"/>
-          <p:cNvSpPr>
-            <a:spLocks noGrp="1"/>
-          </p:cNvSpPr>
-          <p:nvPr>
-            <p:ph idx="1"/>
-          </p:nvPr>
-        </p:nvSpPr>
-        <p:spPr>
-          <a:xfrm>
-            <a:off x="587375" y="1187450"/>
-            <a:ext cx="8292856" cy="5521575"/>
-          </a:xfrm>
-        </p:spPr>
-        <p:txBody>
-          <a:bodyPr>
-            <a:normAutofit/>
-          </a:bodyPr>
-          <a:lstStyle/>
-          <a:p>
-            <a:pPr marL="347663" indent="-347663">
-              <a:spcBef>
-                <a:spcPts val="600"/>
-              </a:spcBef>
-              <a:buClr>
-                <a:schemeClr val="tx1">
-                  <a:lumMod val="90000"/>
-                  <a:lumOff val="10000"/>
-                </a:schemeClr>
-              </a:buClr>
-              <a:buSzPct val="100000"/>
-              <a:buFont typeface="Wingdings" panose="05000000000000000000" pitchFamily="2" charset="2"/>
-              <a:buChar char="§"/>
-              <a:defRPr/>
-            </a:pPr>
-            <a:r>
-              <a:rPr lang="en-US" dirty="0"/>
-              <a:t>Tic-Tac-Toe</a:t>
-            </a:r>
-          </a:p>
-          <a:p>
-            <a:pPr marL="621983" lvl="1" indent="-347663">
-              <a:spcBef>
-                <a:spcPts val="600"/>
-              </a:spcBef>
-              <a:buClr>
-                <a:schemeClr val="tx1">
-                  <a:lumMod val="90000"/>
-                  <a:lumOff val="10000"/>
-                </a:schemeClr>
-              </a:buClr>
-              <a:buSzPct val="100000"/>
-              <a:buFont typeface="Wingdings" panose="05000000000000000000" pitchFamily="2" charset="2"/>
-              <a:buChar char="§"/>
-              <a:defRPr/>
-            </a:pPr>
-            <a:r>
-              <a:rPr lang="en-US" dirty="0"/>
-              <a:t>0 </a:t>
-            </a:r>
-            <a:r>
-              <a:rPr lang="en-US" dirty="0">
-                <a:sym typeface="Wingdings" panose="05000000000000000000" pitchFamily="2" charset="2"/>
-              </a:rPr>
-              <a:t> empty, 1  taken by player 1, 2  taken by player 2</a:t>
-            </a:r>
-            <a:endParaRPr lang="en-US" dirty="0"/>
-          </a:p>
-          <a:p>
-            <a:pPr marL="347663" indent="-347663">
-              <a:spcBef>
-                <a:spcPts val="600"/>
-              </a:spcBef>
-              <a:buClr>
-                <a:schemeClr val="tx1">
-                  <a:lumMod val="90000"/>
-                  <a:lumOff val="10000"/>
-                </a:schemeClr>
-              </a:buClr>
-              <a:buSzPct val="100000"/>
-              <a:buFont typeface="Wingdings" panose="05000000000000000000" pitchFamily="2" charset="2"/>
-              <a:buChar char="§"/>
-              <a:defRPr/>
-            </a:pPr>
-            <a:endParaRPr lang="en-US" dirty="0"/>
-          </a:p>
-          <a:p>
-            <a:pPr marL="347663" indent="-347663">
-              <a:spcBef>
-                <a:spcPts val="600"/>
-              </a:spcBef>
-              <a:buClr>
-                <a:schemeClr val="tx1">
-                  <a:lumMod val="90000"/>
-                  <a:lumOff val="10000"/>
-                </a:schemeClr>
-              </a:buClr>
-              <a:buSzPct val="100000"/>
-              <a:buFont typeface="Wingdings" panose="05000000000000000000" pitchFamily="2" charset="2"/>
-              <a:buChar char="§"/>
-              <a:defRPr/>
-            </a:pPr>
-            <a:endParaRPr lang="en-US" dirty="0"/>
-          </a:p>
-          <a:p>
-            <a:pPr marL="347663" indent="-347663">
-              <a:spcBef>
-                <a:spcPts val="600"/>
-              </a:spcBef>
-              <a:buClr>
-                <a:schemeClr val="tx1">
-                  <a:lumMod val="90000"/>
-                  <a:lumOff val="10000"/>
-                </a:schemeClr>
-              </a:buClr>
-              <a:buSzPct val="100000"/>
-              <a:buFont typeface="Wingdings" panose="05000000000000000000" pitchFamily="2" charset="2"/>
-              <a:buChar char="§"/>
-              <a:defRPr/>
-            </a:pPr>
-            <a:endParaRPr lang="en-US" dirty="0"/>
-          </a:p>
-          <a:p>
-            <a:pPr marL="347663" indent="-347663">
-              <a:spcBef>
-                <a:spcPts val="600"/>
-              </a:spcBef>
-              <a:buClr>
-                <a:schemeClr val="tx1">
-                  <a:lumMod val="90000"/>
-                  <a:lumOff val="10000"/>
-                </a:schemeClr>
-              </a:buClr>
-              <a:buSzPct val="100000"/>
-              <a:buFont typeface="Wingdings" panose="05000000000000000000" pitchFamily="2" charset="2"/>
-              <a:buChar char="§"/>
-              <a:defRPr/>
-            </a:pPr>
-            <a:endParaRPr lang="en-US" dirty="0"/>
-          </a:p>
-          <a:p>
-            <a:pPr marL="347663" indent="-347663">
-              <a:spcBef>
-                <a:spcPts val="600"/>
-              </a:spcBef>
-              <a:buClr>
-                <a:schemeClr val="tx1">
-                  <a:lumMod val="90000"/>
-                  <a:lumOff val="10000"/>
-                </a:schemeClr>
-              </a:buClr>
-              <a:buSzPct val="100000"/>
-              <a:buFont typeface="Wingdings" panose="05000000000000000000" pitchFamily="2" charset="2"/>
-              <a:buChar char="§"/>
-              <a:defRPr/>
-            </a:pPr>
-            <a:r>
-              <a:rPr lang="en-US" dirty="0"/>
-              <a:t>Problem: Did player 1 win?</a:t>
-            </a:r>
-          </a:p>
-          <a:p>
-            <a:pPr marL="621983" lvl="1" indent="-347663">
-              <a:spcBef>
-                <a:spcPts val="600"/>
-              </a:spcBef>
-              <a:buClr>
-                <a:schemeClr val="tx1">
-                  <a:lumMod val="90000"/>
-                  <a:lumOff val="10000"/>
-                </a:schemeClr>
-              </a:buClr>
-              <a:buSzPct val="100000"/>
-              <a:buFont typeface="Wingdings" panose="05000000000000000000" pitchFamily="2" charset="2"/>
-              <a:buChar char="§"/>
-              <a:defRPr/>
-            </a:pPr>
-            <a:r>
-              <a:rPr lang="en-US" dirty="0"/>
-              <a:t>How many different logic can you think of?</a:t>
-            </a:r>
-          </a:p>
-          <a:p>
-            <a:pPr marL="621983" lvl="1" indent="-347663">
-              <a:spcBef>
-                <a:spcPts val="600"/>
-              </a:spcBef>
-              <a:buClr>
-                <a:schemeClr val="tx1">
-                  <a:lumMod val="90000"/>
-                  <a:lumOff val="10000"/>
-                </a:schemeClr>
-              </a:buClr>
-              <a:buSzPct val="100000"/>
-              <a:buFont typeface="Wingdings" panose="05000000000000000000" pitchFamily="2" charset="2"/>
-              <a:buChar char="§"/>
-              <a:defRPr/>
-            </a:pPr>
-            <a:r>
-              <a:rPr lang="en-US" dirty="0"/>
-              <a:t>What have you learnt from the programming exercises?</a:t>
-            </a:r>
-          </a:p>
-          <a:p>
-            <a:pPr marL="0" indent="0">
-              <a:spcBef>
-                <a:spcPts val="600"/>
-              </a:spcBef>
-              <a:buClr>
-                <a:schemeClr val="tx1">
-                  <a:lumMod val="90000"/>
-                  <a:lumOff val="10000"/>
-                </a:schemeClr>
-              </a:buClr>
-              <a:buSzPct val="100000"/>
-              <a:buNone/>
-              <a:defRPr/>
-            </a:pPr>
-            <a:endParaRPr lang="en-US" dirty="0"/>
-          </a:p>
-          <a:p>
-            <a:pPr marL="347663" indent="-347663">
-              <a:spcBef>
-                <a:spcPts val="600"/>
-              </a:spcBef>
-              <a:buClr>
-                <a:schemeClr val="tx1">
-                  <a:lumMod val="90000"/>
-                  <a:lumOff val="10000"/>
-                </a:schemeClr>
-              </a:buClr>
-              <a:buSzPct val="100000"/>
-              <a:buFont typeface="Wingdings" panose="05000000000000000000" pitchFamily="2" charset="2"/>
-              <a:buChar char="§"/>
-              <a:defRPr/>
-            </a:pPr>
-            <a:endParaRPr lang="en-US" sz="2400" dirty="0"/>
-          </a:p>
-          <a:p>
-            <a:pPr marL="347663" indent="-347663">
-              <a:spcBef>
-                <a:spcPts val="600"/>
-              </a:spcBef>
-              <a:buClr>
-                <a:schemeClr val="tx1">
-                  <a:lumMod val="90000"/>
-                  <a:lumOff val="10000"/>
-                </a:schemeClr>
-              </a:buClr>
-              <a:buSzPct val="100000"/>
-              <a:buFont typeface="Wingdings" panose="05000000000000000000" pitchFamily="2" charset="2"/>
-              <a:buChar char="§"/>
-              <a:defRPr/>
-            </a:pPr>
-            <a:endParaRPr lang="en-US" sz="2800" dirty="0"/>
-          </a:p>
-        </p:txBody>
-      </p:sp>
-      <p:sp>
-        <p:nvSpPr>
           <p:cNvPr id="14338" name="Rectangle 2"/>
           <p:cNvSpPr>
             <a:spLocks noGrp="1" noChangeArrowheads="1"/>
@@ -7449,736 +6773,18 @@
           <a:p>
             <a:pPr eaLnBrk="1" hangingPunct="1"/>
             <a:r>
-              <a:rPr lang="en-GB" sz="3600" dirty="0">
+              <a:rPr lang="en-US" sz="3600">
                 <a:solidFill>
                   <a:srgbClr val="0000FF"/>
                 </a:solidFill>
               </a:rPr>
-              <a:t>Problem Solving with 2D arrays</a:t>
-            </a:r>
-          </a:p>
-        </p:txBody>
-      </p:sp>
-      <p:sp>
-        <p:nvSpPr>
-          <p:cNvPr id="7" name="Slide Number Placeholder 6"/>
-          <p:cNvSpPr>
-            <a:spLocks noGrp="1"/>
-          </p:cNvSpPr>
-          <p:nvPr>
-            <p:ph type="sldNum" sz="quarter" idx="12"/>
-          </p:nvPr>
-        </p:nvSpPr>
-        <p:spPr/>
-        <p:txBody>
-          <a:bodyPr>
-            <a:normAutofit/>
-          </a:bodyPr>
-          <a:lstStyle/>
-          <a:p>
-            <a:pPr>
-              <a:defRPr/>
-            </a:pPr>
-            <a:r>
-              <a:rPr lang="en-US" dirty="0"/>
-              <a:t>Week9R - </a:t>
-            </a:r>
-            <a:fld id="{2E4790E1-2590-4AEE-892D-AB46A7688113}" type="slidenum">
-              <a:rPr lang="en-US" smtClean="0"/>
-              <a:pPr>
-                <a:defRPr/>
-              </a:pPr>
-              <a:t>3</a:t>
-            </a:fld>
-            <a:endParaRPr lang="en-US" dirty="0"/>
-          </a:p>
-        </p:txBody>
-      </p:sp>
-      <p:sp>
-        <p:nvSpPr>
-          <p:cNvPr id="2" name="Footer Placeholder 1">
-            <a:extLst>
-              <a:ext uri="{FF2B5EF4-FFF2-40B4-BE49-F238E27FC236}">
-                <a16:creationId xmlns:a16="http://schemas.microsoft.com/office/drawing/2014/main" id="{C4EEF3D5-AA88-6E57-0C54-37D27719AC0E}"/>
-              </a:ext>
-            </a:extLst>
-          </p:cNvPr>
-          <p:cNvSpPr>
-            <a:spLocks noGrp="1"/>
-          </p:cNvSpPr>
-          <p:nvPr>
-            <p:ph type="ftr" sz="quarter" idx="11"/>
-          </p:nvPr>
-        </p:nvSpPr>
-        <p:spPr/>
-        <p:txBody>
-          <a:bodyPr/>
-          <a:lstStyle/>
-          <a:p>
-            <a:pPr algn="l">
-              <a:defRPr/>
-            </a:pPr>
-            <a:r>
-              <a:rPr lang="en-US"/>
-              <a:t>CS1010: Programming Methodology</a:t>
-            </a:r>
-            <a:endParaRPr lang="en-US" dirty="0"/>
-          </a:p>
-        </p:txBody>
-      </p:sp>
-      <p:sp>
-        <p:nvSpPr>
-          <p:cNvPr id="3" name="Rectangle 2">
-            <a:extLst>
-              <a:ext uri="{FF2B5EF4-FFF2-40B4-BE49-F238E27FC236}">
-                <a16:creationId xmlns:a16="http://schemas.microsoft.com/office/drawing/2014/main" id="{68B17616-6AD3-512B-A578-A8549B4ED836}"/>
-              </a:ext>
-            </a:extLst>
-          </p:cNvPr>
-          <p:cNvSpPr/>
-          <p:nvPr/>
-        </p:nvSpPr>
-        <p:spPr>
-          <a:xfrm>
-            <a:off x="1081812" y="2062170"/>
-            <a:ext cx="462337" cy="452063"/>
-          </a:xfrm>
-          <a:prstGeom prst="rect">
-            <a:avLst/>
-          </a:prstGeom>
-          <a:noFill/>
-        </p:spPr>
-        <p:style>
-          <a:lnRef idx="2">
-            <a:schemeClr val="accent1">
-              <a:shade val="50000"/>
-            </a:schemeClr>
-          </a:lnRef>
-          <a:fillRef idx="1">
-            <a:schemeClr val="accent1"/>
-          </a:fillRef>
-          <a:effectRef idx="0">
-            <a:schemeClr val="accent1"/>
-          </a:effectRef>
-          <a:fontRef idx="minor">
-            <a:schemeClr val="lt1"/>
-          </a:fontRef>
-        </p:style>
-        <p:txBody>
-          <a:bodyPr rtlCol="0" anchor="ctr"/>
-          <a:lstStyle/>
-          <a:p>
-            <a:pPr algn="ctr"/>
-            <a:r>
-              <a:rPr lang="en-US" dirty="0">
-                <a:ln w="0"/>
-                <a:solidFill>
-                  <a:schemeClr val="tx1"/>
-                </a:solidFill>
-                <a:effectLst>
-                  <a:outerShdw blurRad="38100" dist="19050" dir="2700000" algn="tl" rotWithShape="0">
-                    <a:schemeClr val="dk1">
-                      <a:alpha val="40000"/>
-                    </a:schemeClr>
-                  </a:outerShdw>
-                </a:effectLst>
-              </a:rPr>
-              <a:t>1</a:t>
-            </a:r>
-          </a:p>
-        </p:txBody>
-      </p:sp>
-      <p:sp>
-        <p:nvSpPr>
-          <p:cNvPr id="4" name="Rectangle 3">
-            <a:extLst>
-              <a:ext uri="{FF2B5EF4-FFF2-40B4-BE49-F238E27FC236}">
-                <a16:creationId xmlns:a16="http://schemas.microsoft.com/office/drawing/2014/main" id="{6F771720-4760-BCAA-F602-7D17575D9495}"/>
-              </a:ext>
-            </a:extLst>
-          </p:cNvPr>
-          <p:cNvSpPr/>
-          <p:nvPr/>
-        </p:nvSpPr>
-        <p:spPr>
-          <a:xfrm>
-            <a:off x="1081811" y="2514233"/>
-            <a:ext cx="462337" cy="452063"/>
-          </a:xfrm>
-          <a:prstGeom prst="rect">
-            <a:avLst/>
-          </a:prstGeom>
-          <a:noFill/>
-        </p:spPr>
-        <p:style>
-          <a:lnRef idx="2">
-            <a:schemeClr val="accent1">
-              <a:shade val="50000"/>
-            </a:schemeClr>
-          </a:lnRef>
-          <a:fillRef idx="1">
-            <a:schemeClr val="accent1"/>
-          </a:fillRef>
-          <a:effectRef idx="0">
-            <a:schemeClr val="accent1"/>
-          </a:effectRef>
-          <a:fontRef idx="minor">
-            <a:schemeClr val="lt1"/>
-          </a:fontRef>
-        </p:style>
-        <p:txBody>
-          <a:bodyPr rtlCol="0" anchor="ctr"/>
-          <a:lstStyle/>
-          <a:p>
-            <a:pPr algn="ctr"/>
-            <a:r>
-              <a:rPr lang="en-US" dirty="0">
-                <a:ln w="0"/>
-                <a:solidFill>
-                  <a:schemeClr val="tx1"/>
-                </a:solidFill>
-                <a:effectLst>
-                  <a:outerShdw blurRad="38100" dist="19050" dir="2700000" algn="tl" rotWithShape="0">
-                    <a:schemeClr val="dk1">
-                      <a:alpha val="40000"/>
-                    </a:schemeClr>
-                  </a:outerShdw>
-                </a:effectLst>
-              </a:rPr>
-              <a:t>0</a:t>
-            </a:r>
-          </a:p>
-        </p:txBody>
-      </p:sp>
-      <p:sp>
-        <p:nvSpPr>
-          <p:cNvPr id="5" name="Rectangle 4">
-            <a:extLst>
-              <a:ext uri="{FF2B5EF4-FFF2-40B4-BE49-F238E27FC236}">
-                <a16:creationId xmlns:a16="http://schemas.microsoft.com/office/drawing/2014/main" id="{5F355CDB-7E0B-C5C0-7C75-145ADDB08325}"/>
-              </a:ext>
-            </a:extLst>
-          </p:cNvPr>
-          <p:cNvSpPr/>
-          <p:nvPr/>
-        </p:nvSpPr>
-        <p:spPr>
-          <a:xfrm>
-            <a:off x="1544148" y="2514233"/>
-            <a:ext cx="462337" cy="452063"/>
-          </a:xfrm>
-          <a:prstGeom prst="rect">
-            <a:avLst/>
-          </a:prstGeom>
-          <a:noFill/>
-        </p:spPr>
-        <p:style>
-          <a:lnRef idx="2">
-            <a:schemeClr val="accent1">
-              <a:shade val="50000"/>
-            </a:schemeClr>
-          </a:lnRef>
-          <a:fillRef idx="1">
-            <a:schemeClr val="accent1"/>
-          </a:fillRef>
-          <a:effectRef idx="0">
-            <a:schemeClr val="accent1"/>
-          </a:effectRef>
-          <a:fontRef idx="minor">
-            <a:schemeClr val="lt1"/>
-          </a:fontRef>
-        </p:style>
-        <p:txBody>
-          <a:bodyPr rtlCol="0" anchor="ctr"/>
-          <a:lstStyle/>
-          <a:p>
-            <a:pPr algn="ctr"/>
-            <a:r>
-              <a:rPr lang="en-US" dirty="0">
-                <a:ln w="0"/>
-                <a:solidFill>
-                  <a:schemeClr val="tx1"/>
-                </a:solidFill>
-                <a:effectLst>
-                  <a:outerShdw blurRad="38100" dist="19050" dir="2700000" algn="tl" rotWithShape="0">
-                    <a:schemeClr val="dk1">
-                      <a:alpha val="40000"/>
-                    </a:schemeClr>
-                  </a:outerShdw>
-                </a:effectLst>
-              </a:rPr>
-              <a:t>1</a:t>
-            </a:r>
-          </a:p>
-        </p:txBody>
-      </p:sp>
-      <p:sp>
-        <p:nvSpPr>
-          <p:cNvPr id="6" name="Rectangle 5">
-            <a:extLst>
-              <a:ext uri="{FF2B5EF4-FFF2-40B4-BE49-F238E27FC236}">
-                <a16:creationId xmlns:a16="http://schemas.microsoft.com/office/drawing/2014/main" id="{BAAF8AA1-931E-E0EE-1C4C-0C341FD3902E}"/>
-              </a:ext>
-            </a:extLst>
-          </p:cNvPr>
-          <p:cNvSpPr/>
-          <p:nvPr/>
-        </p:nvSpPr>
-        <p:spPr>
-          <a:xfrm>
-            <a:off x="1081811" y="2966296"/>
-            <a:ext cx="462337" cy="452063"/>
-          </a:xfrm>
-          <a:prstGeom prst="rect">
-            <a:avLst/>
-          </a:prstGeom>
-          <a:noFill/>
-        </p:spPr>
-        <p:style>
-          <a:lnRef idx="2">
-            <a:schemeClr val="accent1">
-              <a:shade val="50000"/>
-            </a:schemeClr>
-          </a:lnRef>
-          <a:fillRef idx="1">
-            <a:schemeClr val="accent1"/>
-          </a:fillRef>
-          <a:effectRef idx="0">
-            <a:schemeClr val="accent1"/>
-          </a:effectRef>
-          <a:fontRef idx="minor">
-            <a:schemeClr val="lt1"/>
-          </a:fontRef>
-        </p:style>
-        <p:txBody>
-          <a:bodyPr rtlCol="0" anchor="ctr"/>
-          <a:lstStyle/>
-          <a:p>
-            <a:pPr algn="ctr"/>
-            <a:r>
-              <a:rPr lang="en-US" dirty="0">
-                <a:ln w="0"/>
-                <a:solidFill>
-                  <a:schemeClr val="tx1"/>
-                </a:solidFill>
-                <a:effectLst>
-                  <a:outerShdw blurRad="38100" dist="19050" dir="2700000" algn="tl" rotWithShape="0">
-                    <a:schemeClr val="dk1">
-                      <a:alpha val="40000"/>
-                    </a:schemeClr>
-                  </a:outerShdw>
-                </a:effectLst>
-              </a:rPr>
-              <a:t>2</a:t>
-            </a:r>
-          </a:p>
-        </p:txBody>
-      </p:sp>
-      <p:sp>
-        <p:nvSpPr>
-          <p:cNvPr id="9" name="Rectangle 8">
-            <a:extLst>
-              <a:ext uri="{FF2B5EF4-FFF2-40B4-BE49-F238E27FC236}">
-                <a16:creationId xmlns:a16="http://schemas.microsoft.com/office/drawing/2014/main" id="{06C3558C-F82E-A66B-3009-66EDD32523CE}"/>
-              </a:ext>
-            </a:extLst>
-          </p:cNvPr>
-          <p:cNvSpPr/>
-          <p:nvPr/>
-        </p:nvSpPr>
-        <p:spPr>
-          <a:xfrm>
-            <a:off x="1544147" y="2966296"/>
-            <a:ext cx="462337" cy="452063"/>
-          </a:xfrm>
-          <a:prstGeom prst="rect">
-            <a:avLst/>
-          </a:prstGeom>
-          <a:noFill/>
-        </p:spPr>
-        <p:style>
-          <a:lnRef idx="2">
-            <a:schemeClr val="accent1">
-              <a:shade val="50000"/>
-            </a:schemeClr>
-          </a:lnRef>
-          <a:fillRef idx="1">
-            <a:schemeClr val="accent1"/>
-          </a:fillRef>
-          <a:effectRef idx="0">
-            <a:schemeClr val="accent1"/>
-          </a:effectRef>
-          <a:fontRef idx="minor">
-            <a:schemeClr val="lt1"/>
-          </a:fontRef>
-        </p:style>
-        <p:txBody>
-          <a:bodyPr rtlCol="0" anchor="ctr"/>
-          <a:lstStyle/>
-          <a:p>
-            <a:pPr algn="ctr"/>
-            <a:r>
-              <a:rPr lang="en-US" dirty="0">
-                <a:ln w="0"/>
-                <a:solidFill>
-                  <a:schemeClr val="tx1"/>
-                </a:solidFill>
-                <a:effectLst>
-                  <a:outerShdw blurRad="38100" dist="19050" dir="2700000" algn="tl" rotWithShape="0">
-                    <a:schemeClr val="dk1">
-                      <a:alpha val="40000"/>
-                    </a:schemeClr>
-                  </a:outerShdw>
-                </a:effectLst>
-              </a:rPr>
-              <a:t>2</a:t>
-            </a:r>
-          </a:p>
-        </p:txBody>
-      </p:sp>
-      <p:sp>
-        <p:nvSpPr>
-          <p:cNvPr id="10" name="Rectangle 9">
-            <a:extLst>
-              <a:ext uri="{FF2B5EF4-FFF2-40B4-BE49-F238E27FC236}">
-                <a16:creationId xmlns:a16="http://schemas.microsoft.com/office/drawing/2014/main" id="{D9C57781-4336-573D-C913-933EB0DD2169}"/>
-              </a:ext>
-            </a:extLst>
-          </p:cNvPr>
-          <p:cNvSpPr/>
-          <p:nvPr/>
-        </p:nvSpPr>
-        <p:spPr>
-          <a:xfrm>
-            <a:off x="2006484" y="2966296"/>
-            <a:ext cx="462337" cy="452063"/>
-          </a:xfrm>
-          <a:prstGeom prst="rect">
-            <a:avLst/>
-          </a:prstGeom>
-          <a:noFill/>
-        </p:spPr>
-        <p:style>
-          <a:lnRef idx="2">
-            <a:schemeClr val="accent1">
-              <a:shade val="50000"/>
-            </a:schemeClr>
-          </a:lnRef>
-          <a:fillRef idx="1">
-            <a:schemeClr val="accent1"/>
-          </a:fillRef>
-          <a:effectRef idx="0">
-            <a:schemeClr val="accent1"/>
-          </a:effectRef>
-          <a:fontRef idx="minor">
-            <a:schemeClr val="lt1"/>
-          </a:fontRef>
-        </p:style>
-        <p:txBody>
-          <a:bodyPr rtlCol="0" anchor="ctr"/>
-          <a:lstStyle/>
-          <a:p>
-            <a:pPr algn="ctr"/>
-            <a:r>
-              <a:rPr lang="en-US" dirty="0">
-                <a:ln w="0"/>
-                <a:solidFill>
-                  <a:schemeClr val="tx1"/>
-                </a:solidFill>
-                <a:effectLst>
-                  <a:outerShdw blurRad="38100" dist="19050" dir="2700000" algn="tl" rotWithShape="0">
-                    <a:schemeClr val="dk1">
-                      <a:alpha val="40000"/>
-                    </a:schemeClr>
-                  </a:outerShdw>
-                </a:effectLst>
-              </a:rPr>
-              <a:t>2</a:t>
-            </a:r>
-          </a:p>
-        </p:txBody>
-      </p:sp>
-      <p:sp>
-        <p:nvSpPr>
-          <p:cNvPr id="11" name="Rectangle 10">
-            <a:extLst>
-              <a:ext uri="{FF2B5EF4-FFF2-40B4-BE49-F238E27FC236}">
-                <a16:creationId xmlns:a16="http://schemas.microsoft.com/office/drawing/2014/main" id="{FA8C9829-A2CA-C391-1D93-301EAD4AD4CD}"/>
-              </a:ext>
-            </a:extLst>
-          </p:cNvPr>
-          <p:cNvSpPr/>
-          <p:nvPr/>
-        </p:nvSpPr>
-        <p:spPr>
-          <a:xfrm>
-            <a:off x="1542017" y="2062169"/>
-            <a:ext cx="462337" cy="452063"/>
-          </a:xfrm>
-          <a:prstGeom prst="rect">
-            <a:avLst/>
-          </a:prstGeom>
-          <a:noFill/>
-        </p:spPr>
-        <p:style>
-          <a:lnRef idx="2">
-            <a:schemeClr val="accent1">
-              <a:shade val="50000"/>
-            </a:schemeClr>
-          </a:lnRef>
-          <a:fillRef idx="1">
-            <a:schemeClr val="accent1"/>
-          </a:fillRef>
-          <a:effectRef idx="0">
-            <a:schemeClr val="accent1"/>
-          </a:effectRef>
-          <a:fontRef idx="minor">
-            <a:schemeClr val="lt1"/>
-          </a:fontRef>
-        </p:style>
-        <p:txBody>
-          <a:bodyPr rtlCol="0" anchor="ctr"/>
-          <a:lstStyle/>
-          <a:p>
-            <a:pPr algn="ctr"/>
-            <a:r>
-              <a:rPr lang="en-US" dirty="0">
-                <a:ln w="0"/>
-                <a:solidFill>
-                  <a:schemeClr val="tx1"/>
-                </a:solidFill>
-                <a:effectLst>
-                  <a:outerShdw blurRad="38100" dist="19050" dir="2700000" algn="tl" rotWithShape="0">
-                    <a:schemeClr val="dk1">
-                      <a:alpha val="40000"/>
-                    </a:schemeClr>
-                  </a:outerShdw>
-                </a:effectLst>
-              </a:rPr>
-              <a:t>0</a:t>
-            </a:r>
-          </a:p>
-        </p:txBody>
-      </p:sp>
-      <p:sp>
-        <p:nvSpPr>
-          <p:cNvPr id="14" name="Rectangle 13">
-            <a:extLst>
-              <a:ext uri="{FF2B5EF4-FFF2-40B4-BE49-F238E27FC236}">
-                <a16:creationId xmlns:a16="http://schemas.microsoft.com/office/drawing/2014/main" id="{3B70FE07-2B01-893B-071C-862536951384}"/>
-              </a:ext>
-            </a:extLst>
-          </p:cNvPr>
-          <p:cNvSpPr/>
-          <p:nvPr/>
-        </p:nvSpPr>
-        <p:spPr>
-          <a:xfrm>
-            <a:off x="2002172" y="2062168"/>
-            <a:ext cx="462337" cy="452063"/>
-          </a:xfrm>
-          <a:prstGeom prst="rect">
-            <a:avLst/>
-          </a:prstGeom>
-          <a:noFill/>
-        </p:spPr>
-        <p:style>
-          <a:lnRef idx="2">
-            <a:schemeClr val="accent1">
-              <a:shade val="50000"/>
-            </a:schemeClr>
-          </a:lnRef>
-          <a:fillRef idx="1">
-            <a:schemeClr val="accent1"/>
-          </a:fillRef>
-          <a:effectRef idx="0">
-            <a:schemeClr val="accent1"/>
-          </a:effectRef>
-          <a:fontRef idx="minor">
-            <a:schemeClr val="lt1"/>
-          </a:fontRef>
-        </p:style>
-        <p:txBody>
-          <a:bodyPr rtlCol="0" anchor="ctr"/>
-          <a:lstStyle/>
-          <a:p>
-            <a:pPr algn="ctr"/>
-            <a:r>
-              <a:rPr lang="en-US" dirty="0">
-                <a:ln w="0"/>
-                <a:solidFill>
-                  <a:schemeClr val="tx1"/>
-                </a:solidFill>
-                <a:effectLst>
-                  <a:outerShdw blurRad="38100" dist="19050" dir="2700000" algn="tl" rotWithShape="0">
-                    <a:schemeClr val="dk1">
-                      <a:alpha val="40000"/>
-                    </a:schemeClr>
-                  </a:outerShdw>
-                </a:effectLst>
-              </a:rPr>
-              <a:t>2</a:t>
-            </a:r>
-          </a:p>
-        </p:txBody>
-      </p:sp>
-      <p:sp>
-        <p:nvSpPr>
-          <p:cNvPr id="15" name="Rectangle 14">
-            <a:extLst>
-              <a:ext uri="{FF2B5EF4-FFF2-40B4-BE49-F238E27FC236}">
-                <a16:creationId xmlns:a16="http://schemas.microsoft.com/office/drawing/2014/main" id="{F985CC01-2576-42B9-9D7B-79704E332D04}"/>
-              </a:ext>
-            </a:extLst>
-          </p:cNvPr>
-          <p:cNvSpPr/>
-          <p:nvPr/>
-        </p:nvSpPr>
-        <p:spPr>
-          <a:xfrm>
-            <a:off x="2002171" y="2519015"/>
-            <a:ext cx="462337" cy="452063"/>
-          </a:xfrm>
-          <a:prstGeom prst="rect">
-            <a:avLst/>
-          </a:prstGeom>
-          <a:noFill/>
-        </p:spPr>
-        <p:style>
-          <a:lnRef idx="2">
-            <a:schemeClr val="accent1">
-              <a:shade val="50000"/>
-            </a:schemeClr>
-          </a:lnRef>
-          <a:fillRef idx="1">
-            <a:schemeClr val="accent1"/>
-          </a:fillRef>
-          <a:effectRef idx="0">
-            <a:schemeClr val="accent1"/>
-          </a:effectRef>
-          <a:fontRef idx="minor">
-            <a:schemeClr val="lt1"/>
-          </a:fontRef>
-        </p:style>
-        <p:txBody>
-          <a:bodyPr rtlCol="0" anchor="ctr"/>
-          <a:lstStyle/>
-          <a:p>
-            <a:pPr algn="ctr"/>
-            <a:r>
-              <a:rPr lang="en-US" dirty="0">
-                <a:ln w="0"/>
-                <a:solidFill>
-                  <a:schemeClr val="tx1"/>
-                </a:solidFill>
-                <a:effectLst>
-                  <a:outerShdw blurRad="38100" dist="19050" dir="2700000" algn="tl" rotWithShape="0">
-                    <a:schemeClr val="dk1">
-                      <a:alpha val="40000"/>
-                    </a:schemeClr>
-                  </a:outerShdw>
-                </a:effectLst>
-              </a:rPr>
-              <a:t>1</a:t>
-            </a:r>
-          </a:p>
-        </p:txBody>
-      </p:sp>
-      <p:sp>
-        <p:nvSpPr>
-          <p:cNvPr id="12" name="Date Placeholder 11">
-            <a:extLst>
-              <a:ext uri="{FF2B5EF4-FFF2-40B4-BE49-F238E27FC236}">
-                <a16:creationId xmlns:a16="http://schemas.microsoft.com/office/drawing/2014/main" id="{CE04546B-8A4B-4C95-273C-54659DB70D83}"/>
-              </a:ext>
-            </a:extLst>
-          </p:cNvPr>
-          <p:cNvSpPr>
-            <a:spLocks noGrp="1"/>
-          </p:cNvSpPr>
-          <p:nvPr>
-            <p:ph type="dt" sz="half" idx="10"/>
-          </p:nvPr>
-        </p:nvSpPr>
-        <p:spPr/>
-        <p:txBody>
-          <a:bodyPr/>
-          <a:lstStyle/>
-          <a:p>
-            <a:pPr>
-              <a:defRPr/>
-            </a:pPr>
-            <a:r>
-              <a:rPr lang="en-US"/>
-              <a:t>© NUS</a:t>
-            </a:r>
-          </a:p>
-        </p:txBody>
-      </p:sp>
-    </p:spTree>
-    <p:extLst>
-      <p:ext uri="{BB962C8B-B14F-4D97-AF65-F5344CB8AC3E}">
-        <p14:creationId xmlns:p14="http://schemas.microsoft.com/office/powerpoint/2010/main" val="2535690228"/>
-      </p:ext>
-    </p:extLst>
-  </p:cSld>
-  <p:clrMapOvr>
-    <a:masterClrMapping/>
-  </p:clrMapOvr>
-  <p:transition>
-    <p:fade/>
-  </p:transition>
-</p:sld>
-</file>
-
-<file path=ppt/slides/slide4.xml><?xml version="1.0" encoding="utf-8"?>
-<p:sld xmlns:a="http://schemas.openxmlformats.org/drawingml/2006/main" xmlns:r="http://schemas.openxmlformats.org/officeDocument/2006/relationships" xmlns:p="http://schemas.openxmlformats.org/presentationml/2006/main">
-  <p:cSld>
-    <p:spTree>
-      <p:nvGrpSpPr>
-        <p:cNvPr id="1" name=""/>
-        <p:cNvGrpSpPr/>
-        <p:nvPr/>
-      </p:nvGrpSpPr>
-      <p:grpSpPr>
-        <a:xfrm>
-          <a:off x="0" y="0"/>
-          <a:ext cx="0" cy="0"/>
-          <a:chOff x="0" y="0"/>
-          <a:chExt cx="0" cy="0"/>
-        </a:xfrm>
-      </p:grpSpPr>
-      <p:sp>
-        <p:nvSpPr>
-          <p:cNvPr id="14338" name="Rectangle 2"/>
-          <p:cNvSpPr>
-            <a:spLocks noGrp="1" noChangeArrowheads="1"/>
-          </p:cNvSpPr>
-          <p:nvPr>
-            <p:ph type="title"/>
-          </p:nvPr>
-        </p:nvSpPr>
-        <p:spPr>
-          <a:xfrm>
-            <a:off x="533400" y="381000"/>
-            <a:ext cx="8382000" cy="838200"/>
-          </a:xfrm>
-        </p:spPr>
-        <p:txBody>
-          <a:bodyPr>
-            <a:normAutofit/>
-          </a:bodyPr>
-          <a:lstStyle/>
-          <a:p>
-            <a:pPr eaLnBrk="1" hangingPunct="1"/>
-            <a:r>
-              <a:rPr lang="en-US" sz="3600" dirty="0">
-                <a:solidFill>
-                  <a:srgbClr val="0000FF"/>
-                </a:solidFill>
-              </a:rPr>
-              <a:t>Good Habits for Writing Efficient Code</a:t>
-            </a:r>
+              <a:t>Efficiency</a:t>
+            </a:r>
+            <a:endParaRPr lang="en-US" sz="3600" dirty="0">
+              <a:solidFill>
+                <a:srgbClr val="0000FF"/>
+              </a:solidFill>
+            </a:endParaRPr>
           </a:p>
         </p:txBody>
       </p:sp>
@@ -8395,6 +7001,37 @@
             </a:r>
           </a:p>
           <a:p>
+            <a:pPr marL="731520" lvl="1" indent="-457200" fontAlgn="auto">
+              <a:spcBef>
+                <a:spcPts val="1200"/>
+              </a:spcBef>
+              <a:spcAft>
+                <a:spcPts val="600"/>
+              </a:spcAft>
+              <a:buClr>
+                <a:schemeClr val="tx1">
+                  <a:lumMod val="90000"/>
+                  <a:lumOff val="10000"/>
+                </a:schemeClr>
+              </a:buClr>
+              <a:buSzPct val="100000"/>
+              <a:buFont typeface="Wingdings" pitchFamily="2" charset="2"/>
+              <a:buChar char="§"/>
+            </a:pPr>
+            <a:r>
+              <a:rPr lang="en-GB" dirty="0"/>
+              <a:t>E.g., Check for factors up to sqrt(n) instead of n in </a:t>
+            </a:r>
+            <a:r>
+              <a:rPr lang="en-GB" dirty="0" err="1"/>
+              <a:t>is_prime</a:t>
+            </a:r>
+            <a:r>
+              <a:rPr lang="en-GB" dirty="0"/>
+              <a:t>(n)</a:t>
+            </a:r>
+          </a:p>
+          <a:p>
             <a:pPr marL="457200" indent="-457200" fontAlgn="auto">
               <a:spcBef>
                 <a:spcPts val="1200"/>
@@ -8412,7 +7049,10 @@
               <a:buFont typeface="Wingdings" pitchFamily="2" charset="2"/>
               <a:buChar char="§"/>
             </a:pPr>
-            <a:endParaRPr lang="en-GB" sz="2800" dirty="0"/>
+            <a:r>
+              <a:rPr lang="en-GB" dirty="0"/>
+              <a:t>Use an efficient algorithm as quantified by time complexity (esp. in the worst-case scenario)</a:t>
+            </a:r>
           </a:p>
           <a:p>
             <a:pPr marL="457200" indent="-457200" fontAlgn="auto">
@@ -8432,10 +7072,7 @@
               <a:buFont typeface="Wingdings" pitchFamily="2" charset="2"/>
               <a:buChar char="§"/>
             </a:pPr>
-            <a:r>
-              <a:rPr lang="en-GB" dirty="0"/>
-              <a:t>Use an efficient algorithm as quantified by time complexity (esp. in the worst-case scenario)</a:t>
-            </a:r>
+            <a:endParaRPr lang="en-GB" sz="2800" dirty="0"/>
           </a:p>
           <a:p>
             <a:pPr marL="457200" indent="-457200" fontAlgn="auto">
@@ -8537,26 +7174,6 @@
             </a:pPr>
             <a:endParaRPr lang="en-GB" sz="2800" dirty="0"/>
           </a:p>
-          <a:p>
-            <a:pPr marL="457200" indent="-457200" fontAlgn="auto">
-              <a:spcBef>
-                <a:spcPts val="1200"/>
-              </a:spcBef>
-              <a:spcAft>
-                <a:spcPts val="0"/>
-              </a:spcAft>
-              <a:buClr>
-                <a:schemeClr val="tx1">
-                  <a:lumMod val="90000"/>
-                  <a:lumOff val="10000"/>
-                </a:schemeClr>
-              </a:buClr>
-              <a:buSzPct val="100000"/>
-              <a:buFont typeface="Wingdings" pitchFamily="2" charset="2"/>
-              <a:buChar char="§"/>
-            </a:pPr>
-            <a:endParaRPr lang="en-GB" sz="2800" dirty="0"/>
-          </a:p>
         </p:txBody>
       </p:sp>
       <p:sp>
@@ -8623,7 +7240,7 @@
               <a:pPr>
                 <a:defRPr/>
               </a:pPr>
-              <a:t>4</a:t>
+              <a:t>3</a:t>
             </a:fld>
             <a:endParaRPr lang="en-US" dirty="0"/>
           </a:p>
@@ -9823,10 +8440,344 @@
   <p:transition>
     <p:fade/>
   </p:transition>
+  <p:timing>
+    <p:tnLst>
+      <p:par>
+        <p:cTn id="1" dur="indefinite" restart="never" nodeType="tmRoot">
+          <p:childTnLst>
+            <p:seq concurrent="1" nextAc="seek">
+              <p:cTn id="2" dur="indefinite" nodeType="mainSeq">
+                <p:childTnLst>
+                  <p:par>
+                    <p:cTn id="3" fill="hold">
+                      <p:stCondLst>
+                        <p:cond delay="indefinite"/>
+                      </p:stCondLst>
+                      <p:childTnLst>
+                        <p:par>
+                          <p:cTn id="4" fill="hold">
+                            <p:stCondLst>
+                              <p:cond delay="0"/>
+                            </p:stCondLst>
+                            <p:childTnLst>
+                              <p:par>
+                                <p:cTn id="5" presetID="1" presetClass="entr" presetSubtype="0" fill="hold" nodeType="clickEffect">
+                                  <p:stCondLst>
+                                    <p:cond delay="0"/>
+                                  </p:stCondLst>
+                                  <p:childTnLst>
+                                    <p:set>
+                                      <p:cBhvr>
+                                        <p:cTn id="6" dur="1" fill="hold">
+                                          <p:stCondLst>
+                                            <p:cond delay="0"/>
+                                          </p:stCondLst>
+                                        </p:cTn>
+                                        <p:tgtEl>
+                                          <p:spTgt spid="13">
+                                            <p:txEl>
+                                              <p:pRg st="1" end="1"/>
+                                            </p:txEl>
+                                          </p:spTgt>
+                                        </p:tgtEl>
+                                        <p:attrNameLst>
+                                          <p:attrName>style.visibility</p:attrName>
+                                        </p:attrNameLst>
+                                      </p:cBhvr>
+                                      <p:to>
+                                        <p:strVal val="visible"/>
+                                      </p:to>
+                                    </p:set>
+                                  </p:childTnLst>
+                                </p:cTn>
+                              </p:par>
+                            </p:childTnLst>
+                          </p:cTn>
+                        </p:par>
+                      </p:childTnLst>
+                    </p:cTn>
+                  </p:par>
+                  <p:par>
+                    <p:cTn id="7" fill="hold">
+                      <p:stCondLst>
+                        <p:cond delay="indefinite"/>
+                      </p:stCondLst>
+                      <p:childTnLst>
+                        <p:par>
+                          <p:cTn id="8" fill="hold">
+                            <p:stCondLst>
+                              <p:cond delay="0"/>
+                            </p:stCondLst>
+                            <p:childTnLst>
+                              <p:par>
+                                <p:cTn id="9" presetID="1" presetClass="entr" presetSubtype="0" fill="hold" nodeType="clickEffect">
+                                  <p:stCondLst>
+                                    <p:cond delay="0"/>
+                                  </p:stCondLst>
+                                  <p:childTnLst>
+                                    <p:set>
+                                      <p:cBhvr>
+                                        <p:cTn id="10" dur="1" fill="hold">
+                                          <p:stCondLst>
+                                            <p:cond delay="0"/>
+                                          </p:stCondLst>
+                                        </p:cTn>
+                                        <p:tgtEl>
+                                          <p:spTgt spid="13">
+                                            <p:txEl>
+                                              <p:pRg st="2" end="2"/>
+                                            </p:txEl>
+                                          </p:spTgt>
+                                        </p:tgtEl>
+                                        <p:attrNameLst>
+                                          <p:attrName>style.visibility</p:attrName>
+                                        </p:attrNameLst>
+                                      </p:cBhvr>
+                                      <p:to>
+                                        <p:strVal val="visible"/>
+                                      </p:to>
+                                    </p:set>
+                                  </p:childTnLst>
+                                </p:cTn>
+                              </p:par>
+                            </p:childTnLst>
+                          </p:cTn>
+                        </p:par>
+                      </p:childTnLst>
+                    </p:cTn>
+                  </p:par>
+                  <p:par>
+                    <p:cTn id="11" fill="hold">
+                      <p:stCondLst>
+                        <p:cond delay="indefinite"/>
+                      </p:stCondLst>
+                      <p:childTnLst>
+                        <p:par>
+                          <p:cTn id="12" fill="hold">
+                            <p:stCondLst>
+                              <p:cond delay="0"/>
+                            </p:stCondLst>
+                            <p:childTnLst>
+                              <p:par>
+                                <p:cTn id="13" presetID="1" presetClass="entr" presetSubtype="0" fill="hold" grpId="0" nodeType="clickEffect">
+                                  <p:stCondLst>
+                                    <p:cond delay="0"/>
+                                  </p:stCondLst>
+                                  <p:childTnLst>
+                                    <p:set>
+                                      <p:cBhvr>
+                                        <p:cTn id="14" dur="1" fill="hold">
+                                          <p:stCondLst>
+                                            <p:cond delay="0"/>
+                                          </p:stCondLst>
+                                        </p:cTn>
+                                        <p:tgtEl>
+                                          <p:spTgt spid="220"/>
+                                        </p:tgtEl>
+                                        <p:attrNameLst>
+                                          <p:attrName>style.visibility</p:attrName>
+                                        </p:attrNameLst>
+                                      </p:cBhvr>
+                                      <p:to>
+                                        <p:strVal val="visible"/>
+                                      </p:to>
+                                    </p:set>
+                                  </p:childTnLst>
+                                </p:cTn>
+                              </p:par>
+                              <p:par>
+                                <p:cTn id="15" presetID="1" presetClass="entr" presetSubtype="0" fill="hold" grpId="0" nodeType="withEffect">
+                                  <p:stCondLst>
+                                    <p:cond delay="0"/>
+                                  </p:stCondLst>
+                                  <p:childTnLst>
+                                    <p:set>
+                                      <p:cBhvr>
+                                        <p:cTn id="16" dur="1" fill="hold">
+                                          <p:stCondLst>
+                                            <p:cond delay="0"/>
+                                          </p:stCondLst>
+                                        </p:cTn>
+                                        <p:tgtEl>
+                                          <p:spTgt spid="7"/>
+                                        </p:tgtEl>
+                                        <p:attrNameLst>
+                                          <p:attrName>style.visibility</p:attrName>
+                                        </p:attrNameLst>
+                                      </p:cBhvr>
+                                      <p:to>
+                                        <p:strVal val="visible"/>
+                                      </p:to>
+                                    </p:set>
+                                  </p:childTnLst>
+                                </p:cTn>
+                              </p:par>
+                              <p:par>
+                                <p:cTn id="17" presetID="1" presetClass="entr" presetSubtype="0" fill="hold" grpId="0" nodeType="withEffect">
+                                  <p:stCondLst>
+                                    <p:cond delay="0"/>
+                                  </p:stCondLst>
+                                  <p:childTnLst>
+                                    <p:set>
+                                      <p:cBhvr>
+                                        <p:cTn id="18" dur="1" fill="hold">
+                                          <p:stCondLst>
+                                            <p:cond delay="0"/>
+                                          </p:stCondLst>
+                                        </p:cTn>
+                                        <p:tgtEl>
+                                          <p:spTgt spid="8"/>
+                                        </p:tgtEl>
+                                        <p:attrNameLst>
+                                          <p:attrName>style.visibility</p:attrName>
+                                        </p:attrNameLst>
+                                      </p:cBhvr>
+                                      <p:to>
+                                        <p:strVal val="visible"/>
+                                      </p:to>
+                                    </p:set>
+                                  </p:childTnLst>
+                                </p:cTn>
+                              </p:par>
+                              <p:par>
+                                <p:cTn id="19" presetID="1" presetClass="entr" presetSubtype="0" fill="hold" grpId="0" nodeType="withEffect">
+                                  <p:stCondLst>
+                                    <p:cond delay="0"/>
+                                  </p:stCondLst>
+                                  <p:childTnLst>
+                                    <p:set>
+                                      <p:cBhvr>
+                                        <p:cTn id="20" dur="1" fill="hold">
+                                          <p:stCondLst>
+                                            <p:cond delay="0"/>
+                                          </p:stCondLst>
+                                        </p:cTn>
+                                        <p:tgtEl>
+                                          <p:spTgt spid="9"/>
+                                        </p:tgtEl>
+                                        <p:attrNameLst>
+                                          <p:attrName>style.visibility</p:attrName>
+                                        </p:attrNameLst>
+                                      </p:cBhvr>
+                                      <p:to>
+                                        <p:strVal val="visible"/>
+                                      </p:to>
+                                    </p:set>
+                                  </p:childTnLst>
+                                </p:cTn>
+                              </p:par>
+                              <p:par>
+                                <p:cTn id="21" presetID="1" presetClass="entr" presetSubtype="0" fill="hold" grpId="0" nodeType="withEffect">
+                                  <p:stCondLst>
+                                    <p:cond delay="0"/>
+                                  </p:stCondLst>
+                                  <p:childTnLst>
+                                    <p:set>
+                                      <p:cBhvr>
+                                        <p:cTn id="22" dur="1" fill="hold">
+                                          <p:stCondLst>
+                                            <p:cond delay="0"/>
+                                          </p:stCondLst>
+                                        </p:cTn>
+                                        <p:tgtEl>
+                                          <p:spTgt spid="10"/>
+                                        </p:tgtEl>
+                                        <p:attrNameLst>
+                                          <p:attrName>style.visibility</p:attrName>
+                                        </p:attrNameLst>
+                                      </p:cBhvr>
+                                      <p:to>
+                                        <p:strVal val="visible"/>
+                                      </p:to>
+                                    </p:set>
+                                  </p:childTnLst>
+                                </p:cTn>
+                              </p:par>
+                            </p:childTnLst>
+                          </p:cTn>
+                        </p:par>
+                      </p:childTnLst>
+                    </p:cTn>
+                  </p:par>
+                  <p:par>
+                    <p:cTn id="23" fill="hold">
+                      <p:stCondLst>
+                        <p:cond delay="indefinite"/>
+                      </p:stCondLst>
+                      <p:childTnLst>
+                        <p:par>
+                          <p:cTn id="24" fill="hold">
+                            <p:stCondLst>
+                              <p:cond delay="0"/>
+                            </p:stCondLst>
+                            <p:childTnLst>
+                              <p:par>
+                                <p:cTn id="25" presetID="1" presetClass="entr" presetSubtype="0" fill="hold" grpId="0" nodeType="clickEffect">
+                                  <p:stCondLst>
+                                    <p:cond delay="0"/>
+                                  </p:stCondLst>
+                                  <p:childTnLst>
+                                    <p:set>
+                                      <p:cBhvr>
+                                        <p:cTn id="26" dur="1" fill="hold">
+                                          <p:stCondLst>
+                                            <p:cond delay="0"/>
+                                          </p:stCondLst>
+                                        </p:cTn>
+                                        <p:tgtEl>
+                                          <p:spTgt spid="6"/>
+                                        </p:tgtEl>
+                                        <p:attrNameLst>
+                                          <p:attrName>style.visibility</p:attrName>
+                                        </p:attrNameLst>
+                                      </p:cBhvr>
+                                      <p:to>
+                                        <p:strVal val="visible"/>
+                                      </p:to>
+                                    </p:set>
+                                  </p:childTnLst>
+                                </p:cTn>
+                              </p:par>
+                            </p:childTnLst>
+                          </p:cTn>
+                        </p:par>
+                      </p:childTnLst>
+                    </p:cTn>
+                  </p:par>
+                </p:childTnLst>
+              </p:cTn>
+              <p:prevCondLst>
+                <p:cond evt="onPrev" delay="0">
+                  <p:tgtEl>
+                    <p:sldTgt/>
+                  </p:tgtEl>
+                </p:cond>
+              </p:prevCondLst>
+              <p:nextCondLst>
+                <p:cond evt="onNext" delay="0">
+                  <p:tgtEl>
+                    <p:sldTgt/>
+                  </p:tgtEl>
+                </p:cond>
+              </p:nextCondLst>
+            </p:seq>
+          </p:childTnLst>
+        </p:cTn>
+      </p:par>
+    </p:tnLst>
+    <p:bldLst>
+      <p:bldP spid="6" grpId="0" animBg="1"/>
+      <p:bldP spid="220" grpId="0" animBg="1"/>
+      <p:bldP spid="7" grpId="0" animBg="1"/>
+      <p:bldP spid="8" grpId="0" animBg="1"/>
+      <p:bldP spid="9" grpId="0" animBg="1"/>
+      <p:bldP spid="10" grpId="0" animBg="1"/>
+    </p:bldLst>
+  </p:timing>
 </p:sld>
 </file>
 
-<file path=ppt/slides/slide5.xml><?xml version="1.0" encoding="utf-8"?>
+<file path=ppt/slides/slide4.xml><?xml version="1.0" encoding="utf-8"?>
 <p:sld xmlns:a="http://schemas.openxmlformats.org/drawingml/2006/main" xmlns:r="http://schemas.openxmlformats.org/officeDocument/2006/relationships" xmlns:p="http://schemas.openxmlformats.org/presentationml/2006/main">
   <p:cSld>
     <p:spTree>
@@ -9845,6 +8796,3817 @@
       </p:grpSpPr>
       <p:sp>
         <p:nvSpPr>
+          <p:cNvPr id="8" name="Content Placeholder 5"/>
+          <p:cNvSpPr>
+            <a:spLocks noGrp="1"/>
+          </p:cNvSpPr>
+          <p:nvPr>
+            <p:ph idx="1"/>
+          </p:nvPr>
+        </p:nvSpPr>
+        <p:spPr>
+          <a:xfrm>
+            <a:off x="587375" y="1187450"/>
+            <a:ext cx="8292856" cy="5521575"/>
+          </a:xfrm>
+        </p:spPr>
+        <p:txBody>
+          <a:bodyPr>
+            <a:normAutofit/>
+          </a:bodyPr>
+          <a:lstStyle/>
+          <a:p>
+            <a:pPr marL="347663" indent="-347663">
+              <a:spcBef>
+                <a:spcPts val="600"/>
+              </a:spcBef>
+              <a:buClr>
+                <a:schemeClr val="tx1">
+                  <a:lumMod val="90000"/>
+                  <a:lumOff val="10000"/>
+                </a:schemeClr>
+              </a:buClr>
+              <a:buSzPct val="100000"/>
+              <a:buFont typeface="Wingdings" panose="05000000000000000000" pitchFamily="2" charset="2"/>
+              <a:buChar char="§"/>
+              <a:defRPr/>
+            </a:pPr>
+            <a:r>
+              <a:rPr lang="en-US" dirty="0"/>
+              <a:t>Tic-Tac-Toe (n x n grid)</a:t>
+            </a:r>
+          </a:p>
+          <a:p>
+            <a:pPr marL="621983" lvl="1" indent="-347663">
+              <a:spcBef>
+                <a:spcPts val="600"/>
+              </a:spcBef>
+              <a:buClr>
+                <a:schemeClr val="tx1">
+                  <a:lumMod val="90000"/>
+                  <a:lumOff val="10000"/>
+                </a:schemeClr>
+              </a:buClr>
+              <a:buSzPct val="100000"/>
+              <a:buFont typeface="Wingdings" panose="05000000000000000000" pitchFamily="2" charset="2"/>
+              <a:buChar char="§"/>
+              <a:defRPr/>
+            </a:pPr>
+            <a:r>
+              <a:rPr lang="en-GB" dirty="0"/>
+              <a:t>0 / 1 / 2 </a:t>
+            </a:r>
+            <a:r>
+              <a:rPr lang="en-GB" dirty="0">
+                <a:sym typeface="Wingdings" panose="05000000000000000000" pitchFamily="2" charset="2"/>
+              </a:rPr>
+              <a:t></a:t>
+            </a:r>
+            <a:r>
+              <a:rPr lang="en-GB" dirty="0"/>
+              <a:t> empty, player 1, player 2</a:t>
+            </a:r>
+          </a:p>
+          <a:p>
+            <a:pPr marL="621983" lvl="1" indent="-347663">
+              <a:spcBef>
+                <a:spcPts val="600"/>
+              </a:spcBef>
+              <a:buClr>
+                <a:schemeClr val="tx1">
+                  <a:lumMod val="90000"/>
+                  <a:lumOff val="10000"/>
+                </a:schemeClr>
+              </a:buClr>
+              <a:buSzPct val="100000"/>
+              <a:buFont typeface="Wingdings" panose="05000000000000000000" pitchFamily="2" charset="2"/>
+              <a:buChar char="§"/>
+              <a:defRPr/>
+            </a:pPr>
+            <a:endParaRPr lang="en-GB" dirty="0"/>
+          </a:p>
+          <a:p>
+            <a:pPr marL="347663" indent="-347663">
+              <a:spcBef>
+                <a:spcPts val="600"/>
+              </a:spcBef>
+              <a:buClr>
+                <a:schemeClr val="tx1">
+                  <a:lumMod val="90000"/>
+                  <a:lumOff val="10000"/>
+                </a:schemeClr>
+              </a:buClr>
+              <a:buSzPct val="100000"/>
+              <a:buFont typeface="Wingdings" panose="05000000000000000000" pitchFamily="2" charset="2"/>
+              <a:buChar char="§"/>
+              <a:defRPr/>
+            </a:pPr>
+            <a:r>
+              <a:rPr lang="en-GB" dirty="0"/>
+              <a:t>How to know whether player 1 has won?</a:t>
+            </a:r>
+            <a:endParaRPr lang="en-US" dirty="0"/>
+          </a:p>
+          <a:p>
+            <a:pPr marL="621983" lvl="1" indent="-347663">
+              <a:spcBef>
+                <a:spcPts val="600"/>
+              </a:spcBef>
+              <a:buClr>
+                <a:schemeClr val="tx1">
+                  <a:lumMod val="90000"/>
+                  <a:lumOff val="10000"/>
+                </a:schemeClr>
+              </a:buClr>
+              <a:buSzPct val="100000"/>
+              <a:buFont typeface="Wingdings" panose="05000000000000000000" pitchFamily="2" charset="2"/>
+              <a:buChar char="§"/>
+              <a:defRPr/>
+            </a:pPr>
+            <a:r>
+              <a:rPr lang="en-US" dirty="0"/>
+              <a:t>How many different algorithms can you think of?</a:t>
+            </a:r>
+          </a:p>
+          <a:p>
+            <a:pPr marL="621983" lvl="1" indent="-347663">
+              <a:spcBef>
+                <a:spcPts val="600"/>
+              </a:spcBef>
+              <a:buClr>
+                <a:schemeClr val="tx1">
+                  <a:lumMod val="90000"/>
+                  <a:lumOff val="10000"/>
+                </a:schemeClr>
+              </a:buClr>
+              <a:buSzPct val="100000"/>
+              <a:buFont typeface="Wingdings" panose="05000000000000000000" pitchFamily="2" charset="2"/>
+              <a:buChar char="§"/>
+              <a:defRPr/>
+            </a:pPr>
+            <a:r>
+              <a:rPr lang="en-US" dirty="0"/>
+              <a:t>What is the time complexity of each algorithm?</a:t>
+            </a:r>
+          </a:p>
+          <a:p>
+            <a:pPr marL="0" indent="0">
+              <a:spcBef>
+                <a:spcPts val="600"/>
+              </a:spcBef>
+              <a:buClr>
+                <a:schemeClr val="tx1">
+                  <a:lumMod val="90000"/>
+                  <a:lumOff val="10000"/>
+                </a:schemeClr>
+              </a:buClr>
+              <a:buSzPct val="100000"/>
+              <a:buNone/>
+              <a:defRPr/>
+            </a:pPr>
+            <a:endParaRPr lang="en-US" dirty="0"/>
+          </a:p>
+          <a:p>
+            <a:pPr marL="347663" indent="-347663">
+              <a:spcBef>
+                <a:spcPts val="600"/>
+              </a:spcBef>
+              <a:buClr>
+                <a:schemeClr val="tx1">
+                  <a:lumMod val="90000"/>
+                  <a:lumOff val="10000"/>
+                </a:schemeClr>
+              </a:buClr>
+              <a:buSzPct val="100000"/>
+              <a:buFont typeface="Wingdings" panose="05000000000000000000" pitchFamily="2" charset="2"/>
+              <a:buChar char="§"/>
+              <a:defRPr/>
+            </a:pPr>
+            <a:endParaRPr lang="en-US" sz="2400" dirty="0"/>
+          </a:p>
+          <a:p>
+            <a:pPr marL="347663" indent="-347663">
+              <a:spcBef>
+                <a:spcPts val="600"/>
+              </a:spcBef>
+              <a:buClr>
+                <a:schemeClr val="tx1">
+                  <a:lumMod val="90000"/>
+                  <a:lumOff val="10000"/>
+                </a:schemeClr>
+              </a:buClr>
+              <a:buSzPct val="100000"/>
+              <a:buFont typeface="Wingdings" panose="05000000000000000000" pitchFamily="2" charset="2"/>
+              <a:buChar char="§"/>
+              <a:defRPr/>
+            </a:pPr>
+            <a:endParaRPr lang="en-US" sz="2800" dirty="0"/>
+          </a:p>
+        </p:txBody>
+      </p:sp>
+      <p:sp>
+        <p:nvSpPr>
+          <p:cNvPr id="14338" name="Rectangle 2"/>
+          <p:cNvSpPr>
+            <a:spLocks noGrp="1" noChangeArrowheads="1"/>
+          </p:cNvSpPr>
+          <p:nvPr>
+            <p:ph type="title"/>
+          </p:nvPr>
+        </p:nvSpPr>
+        <p:spPr>
+          <a:xfrm>
+            <a:off x="533400" y="381000"/>
+            <a:ext cx="8382000" cy="838200"/>
+          </a:xfrm>
+        </p:spPr>
+        <p:txBody>
+          <a:bodyPr>
+            <a:normAutofit/>
+          </a:bodyPr>
+          <a:lstStyle/>
+          <a:p>
+            <a:pPr eaLnBrk="1" hangingPunct="1"/>
+            <a:r>
+              <a:rPr lang="en-GB" sz="3600" dirty="0">
+                <a:solidFill>
+                  <a:srgbClr val="0000FF"/>
+                </a:solidFill>
+              </a:rPr>
+              <a:t>Problem Solving with 2D arrays</a:t>
+            </a:r>
+          </a:p>
+        </p:txBody>
+      </p:sp>
+      <p:sp>
+        <p:nvSpPr>
+          <p:cNvPr id="7" name="Slide Number Placeholder 6"/>
+          <p:cNvSpPr>
+            <a:spLocks noGrp="1"/>
+          </p:cNvSpPr>
+          <p:nvPr>
+            <p:ph type="sldNum" sz="quarter" idx="12"/>
+          </p:nvPr>
+        </p:nvSpPr>
+        <p:spPr/>
+        <p:txBody>
+          <a:bodyPr>
+            <a:normAutofit/>
+          </a:bodyPr>
+          <a:lstStyle/>
+          <a:p>
+            <a:pPr>
+              <a:defRPr/>
+            </a:pPr>
+            <a:r>
+              <a:rPr lang="en-US" dirty="0"/>
+              <a:t>Week9R - </a:t>
+            </a:r>
+            <a:fld id="{2E4790E1-2590-4AEE-892D-AB46A7688113}" type="slidenum">
+              <a:rPr lang="en-US" smtClean="0"/>
+              <a:pPr>
+                <a:defRPr/>
+              </a:pPr>
+              <a:t>4</a:t>
+            </a:fld>
+            <a:endParaRPr lang="en-US" dirty="0"/>
+          </a:p>
+        </p:txBody>
+      </p:sp>
+      <p:sp>
+        <p:nvSpPr>
+          <p:cNvPr id="2" name="Footer Placeholder 1">
+            <a:extLst>
+              <a:ext uri="{FF2B5EF4-FFF2-40B4-BE49-F238E27FC236}">
+                <a16:creationId xmlns:a16="http://schemas.microsoft.com/office/drawing/2014/main" id="{C4EEF3D5-AA88-6E57-0C54-37D27719AC0E}"/>
+              </a:ext>
+            </a:extLst>
+          </p:cNvPr>
+          <p:cNvSpPr>
+            <a:spLocks noGrp="1"/>
+          </p:cNvSpPr>
+          <p:nvPr>
+            <p:ph type="ftr" sz="quarter" idx="11"/>
+          </p:nvPr>
+        </p:nvSpPr>
+        <p:spPr/>
+        <p:txBody>
+          <a:bodyPr/>
+          <a:lstStyle/>
+          <a:p>
+            <a:pPr algn="l">
+              <a:defRPr/>
+            </a:pPr>
+            <a:r>
+              <a:rPr lang="en-US"/>
+              <a:t>CS1010: Programming Methodology</a:t>
+            </a:r>
+            <a:endParaRPr lang="en-US" dirty="0"/>
+          </a:p>
+        </p:txBody>
+      </p:sp>
+      <p:sp>
+        <p:nvSpPr>
+          <p:cNvPr id="3" name="Rectangle 2">
+            <a:extLst>
+              <a:ext uri="{FF2B5EF4-FFF2-40B4-BE49-F238E27FC236}">
+                <a16:creationId xmlns:a16="http://schemas.microsoft.com/office/drawing/2014/main" id="{68B17616-6AD3-512B-A578-A8549B4ED836}"/>
+              </a:ext>
+            </a:extLst>
+          </p:cNvPr>
+          <p:cNvSpPr/>
+          <p:nvPr/>
+        </p:nvSpPr>
+        <p:spPr>
+          <a:xfrm>
+            <a:off x="7109495" y="1342211"/>
+            <a:ext cx="462337" cy="452063"/>
+          </a:xfrm>
+          <a:prstGeom prst="rect">
+            <a:avLst/>
+          </a:prstGeom>
+          <a:noFill/>
+        </p:spPr>
+        <p:style>
+          <a:lnRef idx="2">
+            <a:schemeClr val="accent1">
+              <a:shade val="50000"/>
+            </a:schemeClr>
+          </a:lnRef>
+          <a:fillRef idx="1">
+            <a:schemeClr val="accent1"/>
+          </a:fillRef>
+          <a:effectRef idx="0">
+            <a:schemeClr val="accent1"/>
+          </a:effectRef>
+          <a:fontRef idx="minor">
+            <a:schemeClr val="lt1"/>
+          </a:fontRef>
+        </p:style>
+        <p:txBody>
+          <a:bodyPr rtlCol="0" anchor="ctr"/>
+          <a:lstStyle/>
+          <a:p>
+            <a:pPr algn="ctr"/>
+            <a:r>
+              <a:rPr lang="en-US" dirty="0">
+                <a:ln w="0"/>
+                <a:solidFill>
+                  <a:schemeClr val="tx1"/>
+                </a:solidFill>
+                <a:effectLst>
+                  <a:outerShdw blurRad="38100" dist="19050" dir="2700000" algn="tl" rotWithShape="0">
+                    <a:schemeClr val="dk1">
+                      <a:alpha val="40000"/>
+                    </a:schemeClr>
+                  </a:outerShdw>
+                </a:effectLst>
+              </a:rPr>
+              <a:t>1</a:t>
+            </a:r>
+          </a:p>
+        </p:txBody>
+      </p:sp>
+      <p:sp>
+        <p:nvSpPr>
+          <p:cNvPr id="4" name="Rectangle 3">
+            <a:extLst>
+              <a:ext uri="{FF2B5EF4-FFF2-40B4-BE49-F238E27FC236}">
+                <a16:creationId xmlns:a16="http://schemas.microsoft.com/office/drawing/2014/main" id="{6F771720-4760-BCAA-F602-7D17575D9495}"/>
+              </a:ext>
+            </a:extLst>
+          </p:cNvPr>
+          <p:cNvSpPr/>
+          <p:nvPr/>
+        </p:nvSpPr>
+        <p:spPr>
+          <a:xfrm>
+            <a:off x="7109494" y="1794274"/>
+            <a:ext cx="462337" cy="452063"/>
+          </a:xfrm>
+          <a:prstGeom prst="rect">
+            <a:avLst/>
+          </a:prstGeom>
+          <a:noFill/>
+        </p:spPr>
+        <p:style>
+          <a:lnRef idx="2">
+            <a:schemeClr val="accent1">
+              <a:shade val="50000"/>
+            </a:schemeClr>
+          </a:lnRef>
+          <a:fillRef idx="1">
+            <a:schemeClr val="accent1"/>
+          </a:fillRef>
+          <a:effectRef idx="0">
+            <a:schemeClr val="accent1"/>
+          </a:effectRef>
+          <a:fontRef idx="minor">
+            <a:schemeClr val="lt1"/>
+          </a:fontRef>
+        </p:style>
+        <p:txBody>
+          <a:bodyPr rtlCol="0" anchor="ctr"/>
+          <a:lstStyle/>
+          <a:p>
+            <a:pPr algn="ctr"/>
+            <a:r>
+              <a:rPr lang="en-US" dirty="0">
+                <a:ln w="0"/>
+                <a:solidFill>
+                  <a:schemeClr val="tx1"/>
+                </a:solidFill>
+                <a:effectLst>
+                  <a:outerShdw blurRad="38100" dist="19050" dir="2700000" algn="tl" rotWithShape="0">
+                    <a:schemeClr val="dk1">
+                      <a:alpha val="40000"/>
+                    </a:schemeClr>
+                  </a:outerShdw>
+                </a:effectLst>
+              </a:rPr>
+              <a:t>0</a:t>
+            </a:r>
+          </a:p>
+        </p:txBody>
+      </p:sp>
+      <p:sp>
+        <p:nvSpPr>
+          <p:cNvPr id="5" name="Rectangle 4">
+            <a:extLst>
+              <a:ext uri="{FF2B5EF4-FFF2-40B4-BE49-F238E27FC236}">
+                <a16:creationId xmlns:a16="http://schemas.microsoft.com/office/drawing/2014/main" id="{5F355CDB-7E0B-C5C0-7C75-145ADDB08325}"/>
+              </a:ext>
+            </a:extLst>
+          </p:cNvPr>
+          <p:cNvSpPr/>
+          <p:nvPr/>
+        </p:nvSpPr>
+        <p:spPr>
+          <a:xfrm>
+            <a:off x="7571831" y="1794274"/>
+            <a:ext cx="462337" cy="452063"/>
+          </a:xfrm>
+          <a:prstGeom prst="rect">
+            <a:avLst/>
+          </a:prstGeom>
+          <a:noFill/>
+        </p:spPr>
+        <p:style>
+          <a:lnRef idx="2">
+            <a:schemeClr val="accent1">
+              <a:shade val="50000"/>
+            </a:schemeClr>
+          </a:lnRef>
+          <a:fillRef idx="1">
+            <a:schemeClr val="accent1"/>
+          </a:fillRef>
+          <a:effectRef idx="0">
+            <a:schemeClr val="accent1"/>
+          </a:effectRef>
+          <a:fontRef idx="minor">
+            <a:schemeClr val="lt1"/>
+          </a:fontRef>
+        </p:style>
+        <p:txBody>
+          <a:bodyPr rtlCol="0" anchor="ctr"/>
+          <a:lstStyle/>
+          <a:p>
+            <a:pPr algn="ctr"/>
+            <a:r>
+              <a:rPr lang="en-US" dirty="0">
+                <a:ln w="0"/>
+                <a:solidFill>
+                  <a:schemeClr val="tx1"/>
+                </a:solidFill>
+                <a:effectLst>
+                  <a:outerShdw blurRad="38100" dist="19050" dir="2700000" algn="tl" rotWithShape="0">
+                    <a:schemeClr val="dk1">
+                      <a:alpha val="40000"/>
+                    </a:schemeClr>
+                  </a:outerShdw>
+                </a:effectLst>
+              </a:rPr>
+              <a:t>1</a:t>
+            </a:r>
+          </a:p>
+        </p:txBody>
+      </p:sp>
+      <p:sp>
+        <p:nvSpPr>
+          <p:cNvPr id="6" name="Rectangle 5">
+            <a:extLst>
+              <a:ext uri="{FF2B5EF4-FFF2-40B4-BE49-F238E27FC236}">
+                <a16:creationId xmlns:a16="http://schemas.microsoft.com/office/drawing/2014/main" id="{BAAF8AA1-931E-E0EE-1C4C-0C341FD3902E}"/>
+              </a:ext>
+            </a:extLst>
+          </p:cNvPr>
+          <p:cNvSpPr/>
+          <p:nvPr/>
+        </p:nvSpPr>
+        <p:spPr>
+          <a:xfrm>
+            <a:off x="7109494" y="2246337"/>
+            <a:ext cx="462337" cy="452063"/>
+          </a:xfrm>
+          <a:prstGeom prst="rect">
+            <a:avLst/>
+          </a:prstGeom>
+          <a:noFill/>
+        </p:spPr>
+        <p:style>
+          <a:lnRef idx="2">
+            <a:schemeClr val="accent1">
+              <a:shade val="50000"/>
+            </a:schemeClr>
+          </a:lnRef>
+          <a:fillRef idx="1">
+            <a:schemeClr val="accent1"/>
+          </a:fillRef>
+          <a:effectRef idx="0">
+            <a:schemeClr val="accent1"/>
+          </a:effectRef>
+          <a:fontRef idx="minor">
+            <a:schemeClr val="lt1"/>
+          </a:fontRef>
+        </p:style>
+        <p:txBody>
+          <a:bodyPr rtlCol="0" anchor="ctr"/>
+          <a:lstStyle/>
+          <a:p>
+            <a:pPr algn="ctr"/>
+            <a:r>
+              <a:rPr lang="en-US" dirty="0">
+                <a:ln w="0"/>
+                <a:solidFill>
+                  <a:schemeClr val="tx1"/>
+                </a:solidFill>
+                <a:effectLst>
+                  <a:outerShdw blurRad="38100" dist="19050" dir="2700000" algn="tl" rotWithShape="0">
+                    <a:schemeClr val="dk1">
+                      <a:alpha val="40000"/>
+                    </a:schemeClr>
+                  </a:outerShdw>
+                </a:effectLst>
+              </a:rPr>
+              <a:t>2</a:t>
+            </a:r>
+          </a:p>
+        </p:txBody>
+      </p:sp>
+      <p:sp>
+        <p:nvSpPr>
+          <p:cNvPr id="9" name="Rectangle 8">
+            <a:extLst>
+              <a:ext uri="{FF2B5EF4-FFF2-40B4-BE49-F238E27FC236}">
+                <a16:creationId xmlns:a16="http://schemas.microsoft.com/office/drawing/2014/main" id="{06C3558C-F82E-A66B-3009-66EDD32523CE}"/>
+              </a:ext>
+            </a:extLst>
+          </p:cNvPr>
+          <p:cNvSpPr/>
+          <p:nvPr/>
+        </p:nvSpPr>
+        <p:spPr>
+          <a:xfrm>
+            <a:off x="7571830" y="2246337"/>
+            <a:ext cx="462337" cy="452063"/>
+          </a:xfrm>
+          <a:prstGeom prst="rect">
+            <a:avLst/>
+          </a:prstGeom>
+          <a:noFill/>
+        </p:spPr>
+        <p:style>
+          <a:lnRef idx="2">
+            <a:schemeClr val="accent1">
+              <a:shade val="50000"/>
+            </a:schemeClr>
+          </a:lnRef>
+          <a:fillRef idx="1">
+            <a:schemeClr val="accent1"/>
+          </a:fillRef>
+          <a:effectRef idx="0">
+            <a:schemeClr val="accent1"/>
+          </a:effectRef>
+          <a:fontRef idx="minor">
+            <a:schemeClr val="lt1"/>
+          </a:fontRef>
+        </p:style>
+        <p:txBody>
+          <a:bodyPr rtlCol="0" anchor="ctr"/>
+          <a:lstStyle/>
+          <a:p>
+            <a:pPr algn="ctr"/>
+            <a:r>
+              <a:rPr lang="en-US" dirty="0">
+                <a:ln w="0"/>
+                <a:solidFill>
+                  <a:schemeClr val="tx1"/>
+                </a:solidFill>
+                <a:effectLst>
+                  <a:outerShdw blurRad="38100" dist="19050" dir="2700000" algn="tl" rotWithShape="0">
+                    <a:schemeClr val="dk1">
+                      <a:alpha val="40000"/>
+                    </a:schemeClr>
+                  </a:outerShdw>
+                </a:effectLst>
+              </a:rPr>
+              <a:t>2</a:t>
+            </a:r>
+          </a:p>
+        </p:txBody>
+      </p:sp>
+      <p:sp>
+        <p:nvSpPr>
+          <p:cNvPr id="10" name="Rectangle 9">
+            <a:extLst>
+              <a:ext uri="{FF2B5EF4-FFF2-40B4-BE49-F238E27FC236}">
+                <a16:creationId xmlns:a16="http://schemas.microsoft.com/office/drawing/2014/main" id="{D9C57781-4336-573D-C913-933EB0DD2169}"/>
+              </a:ext>
+            </a:extLst>
+          </p:cNvPr>
+          <p:cNvSpPr/>
+          <p:nvPr/>
+        </p:nvSpPr>
+        <p:spPr>
+          <a:xfrm>
+            <a:off x="8034167" y="2246337"/>
+            <a:ext cx="462337" cy="452063"/>
+          </a:xfrm>
+          <a:prstGeom prst="rect">
+            <a:avLst/>
+          </a:prstGeom>
+          <a:noFill/>
+        </p:spPr>
+        <p:style>
+          <a:lnRef idx="2">
+            <a:schemeClr val="accent1">
+              <a:shade val="50000"/>
+            </a:schemeClr>
+          </a:lnRef>
+          <a:fillRef idx="1">
+            <a:schemeClr val="accent1"/>
+          </a:fillRef>
+          <a:effectRef idx="0">
+            <a:schemeClr val="accent1"/>
+          </a:effectRef>
+          <a:fontRef idx="minor">
+            <a:schemeClr val="lt1"/>
+          </a:fontRef>
+        </p:style>
+        <p:txBody>
+          <a:bodyPr rtlCol="0" anchor="ctr"/>
+          <a:lstStyle/>
+          <a:p>
+            <a:pPr algn="ctr"/>
+            <a:r>
+              <a:rPr lang="en-US" dirty="0">
+                <a:ln w="0"/>
+                <a:solidFill>
+                  <a:schemeClr val="tx1"/>
+                </a:solidFill>
+                <a:effectLst>
+                  <a:outerShdw blurRad="38100" dist="19050" dir="2700000" algn="tl" rotWithShape="0">
+                    <a:schemeClr val="dk1">
+                      <a:alpha val="40000"/>
+                    </a:schemeClr>
+                  </a:outerShdw>
+                </a:effectLst>
+              </a:rPr>
+              <a:t>2</a:t>
+            </a:r>
+          </a:p>
+        </p:txBody>
+      </p:sp>
+      <p:sp>
+        <p:nvSpPr>
+          <p:cNvPr id="11" name="Rectangle 10">
+            <a:extLst>
+              <a:ext uri="{FF2B5EF4-FFF2-40B4-BE49-F238E27FC236}">
+                <a16:creationId xmlns:a16="http://schemas.microsoft.com/office/drawing/2014/main" id="{FA8C9829-A2CA-C391-1D93-301EAD4AD4CD}"/>
+              </a:ext>
+            </a:extLst>
+          </p:cNvPr>
+          <p:cNvSpPr/>
+          <p:nvPr/>
+        </p:nvSpPr>
+        <p:spPr>
+          <a:xfrm>
+            <a:off x="7569700" y="1342210"/>
+            <a:ext cx="462337" cy="452063"/>
+          </a:xfrm>
+          <a:prstGeom prst="rect">
+            <a:avLst/>
+          </a:prstGeom>
+          <a:noFill/>
+        </p:spPr>
+        <p:style>
+          <a:lnRef idx="2">
+            <a:schemeClr val="accent1">
+              <a:shade val="50000"/>
+            </a:schemeClr>
+          </a:lnRef>
+          <a:fillRef idx="1">
+            <a:schemeClr val="accent1"/>
+          </a:fillRef>
+          <a:effectRef idx="0">
+            <a:schemeClr val="accent1"/>
+          </a:effectRef>
+          <a:fontRef idx="minor">
+            <a:schemeClr val="lt1"/>
+          </a:fontRef>
+        </p:style>
+        <p:txBody>
+          <a:bodyPr rtlCol="0" anchor="ctr"/>
+          <a:lstStyle/>
+          <a:p>
+            <a:pPr algn="ctr"/>
+            <a:r>
+              <a:rPr lang="en-US" dirty="0">
+                <a:ln w="0"/>
+                <a:solidFill>
+                  <a:schemeClr val="tx1"/>
+                </a:solidFill>
+                <a:effectLst>
+                  <a:outerShdw blurRad="38100" dist="19050" dir="2700000" algn="tl" rotWithShape="0">
+                    <a:schemeClr val="dk1">
+                      <a:alpha val="40000"/>
+                    </a:schemeClr>
+                  </a:outerShdw>
+                </a:effectLst>
+              </a:rPr>
+              <a:t>0</a:t>
+            </a:r>
+          </a:p>
+        </p:txBody>
+      </p:sp>
+      <p:sp>
+        <p:nvSpPr>
+          <p:cNvPr id="14" name="Rectangle 13">
+            <a:extLst>
+              <a:ext uri="{FF2B5EF4-FFF2-40B4-BE49-F238E27FC236}">
+                <a16:creationId xmlns:a16="http://schemas.microsoft.com/office/drawing/2014/main" id="{3B70FE07-2B01-893B-071C-862536951384}"/>
+              </a:ext>
+            </a:extLst>
+          </p:cNvPr>
+          <p:cNvSpPr/>
+          <p:nvPr/>
+        </p:nvSpPr>
+        <p:spPr>
+          <a:xfrm>
+            <a:off x="8029855" y="1342209"/>
+            <a:ext cx="462337" cy="452063"/>
+          </a:xfrm>
+          <a:prstGeom prst="rect">
+            <a:avLst/>
+          </a:prstGeom>
+          <a:noFill/>
+        </p:spPr>
+        <p:style>
+          <a:lnRef idx="2">
+            <a:schemeClr val="accent1">
+              <a:shade val="50000"/>
+            </a:schemeClr>
+          </a:lnRef>
+          <a:fillRef idx="1">
+            <a:schemeClr val="accent1"/>
+          </a:fillRef>
+          <a:effectRef idx="0">
+            <a:schemeClr val="accent1"/>
+          </a:effectRef>
+          <a:fontRef idx="minor">
+            <a:schemeClr val="lt1"/>
+          </a:fontRef>
+        </p:style>
+        <p:txBody>
+          <a:bodyPr rtlCol="0" anchor="ctr"/>
+          <a:lstStyle/>
+          <a:p>
+            <a:pPr algn="ctr"/>
+            <a:r>
+              <a:rPr lang="en-US" dirty="0">
+                <a:ln w="0"/>
+                <a:solidFill>
+                  <a:schemeClr val="tx1"/>
+                </a:solidFill>
+                <a:effectLst>
+                  <a:outerShdw blurRad="38100" dist="19050" dir="2700000" algn="tl" rotWithShape="0">
+                    <a:schemeClr val="dk1">
+                      <a:alpha val="40000"/>
+                    </a:schemeClr>
+                  </a:outerShdw>
+                </a:effectLst>
+              </a:rPr>
+              <a:t>2</a:t>
+            </a:r>
+          </a:p>
+        </p:txBody>
+      </p:sp>
+      <p:sp>
+        <p:nvSpPr>
+          <p:cNvPr id="15" name="Rectangle 14">
+            <a:extLst>
+              <a:ext uri="{FF2B5EF4-FFF2-40B4-BE49-F238E27FC236}">
+                <a16:creationId xmlns:a16="http://schemas.microsoft.com/office/drawing/2014/main" id="{F985CC01-2576-42B9-9D7B-79704E332D04}"/>
+              </a:ext>
+            </a:extLst>
+          </p:cNvPr>
+          <p:cNvSpPr/>
+          <p:nvPr/>
+        </p:nvSpPr>
+        <p:spPr>
+          <a:xfrm>
+            <a:off x="8029854" y="1799056"/>
+            <a:ext cx="462337" cy="452063"/>
+          </a:xfrm>
+          <a:prstGeom prst="rect">
+            <a:avLst/>
+          </a:prstGeom>
+          <a:noFill/>
+        </p:spPr>
+        <p:style>
+          <a:lnRef idx="2">
+            <a:schemeClr val="accent1">
+              <a:shade val="50000"/>
+            </a:schemeClr>
+          </a:lnRef>
+          <a:fillRef idx="1">
+            <a:schemeClr val="accent1"/>
+          </a:fillRef>
+          <a:effectRef idx="0">
+            <a:schemeClr val="accent1"/>
+          </a:effectRef>
+          <a:fontRef idx="minor">
+            <a:schemeClr val="lt1"/>
+          </a:fontRef>
+        </p:style>
+        <p:txBody>
+          <a:bodyPr rtlCol="0" anchor="ctr"/>
+          <a:lstStyle/>
+          <a:p>
+            <a:pPr algn="ctr"/>
+            <a:r>
+              <a:rPr lang="en-US" dirty="0">
+                <a:ln w="0"/>
+                <a:solidFill>
+                  <a:schemeClr val="tx1"/>
+                </a:solidFill>
+                <a:effectLst>
+                  <a:outerShdw blurRad="38100" dist="19050" dir="2700000" algn="tl" rotWithShape="0">
+                    <a:schemeClr val="dk1">
+                      <a:alpha val="40000"/>
+                    </a:schemeClr>
+                  </a:outerShdw>
+                </a:effectLst>
+              </a:rPr>
+              <a:t>1</a:t>
+            </a:r>
+          </a:p>
+        </p:txBody>
+      </p:sp>
+      <p:sp>
+        <p:nvSpPr>
+          <p:cNvPr id="12" name="Date Placeholder 11">
+            <a:extLst>
+              <a:ext uri="{FF2B5EF4-FFF2-40B4-BE49-F238E27FC236}">
+                <a16:creationId xmlns:a16="http://schemas.microsoft.com/office/drawing/2014/main" id="{CE04546B-8A4B-4C95-273C-54659DB70D83}"/>
+              </a:ext>
+            </a:extLst>
+          </p:cNvPr>
+          <p:cNvSpPr>
+            <a:spLocks noGrp="1"/>
+          </p:cNvSpPr>
+          <p:nvPr>
+            <p:ph type="dt" sz="half" idx="10"/>
+          </p:nvPr>
+        </p:nvSpPr>
+        <p:spPr/>
+        <p:txBody>
+          <a:bodyPr/>
+          <a:lstStyle/>
+          <a:p>
+            <a:pPr>
+              <a:defRPr/>
+            </a:pPr>
+            <a:r>
+              <a:rPr lang="en-US"/>
+              <a:t>© NUS</a:t>
+            </a:r>
+          </a:p>
+        </p:txBody>
+      </p:sp>
+    </p:spTree>
+    <p:extLst>
+      <p:ext uri="{BB962C8B-B14F-4D97-AF65-F5344CB8AC3E}">
+        <p14:creationId xmlns:p14="http://schemas.microsoft.com/office/powerpoint/2010/main" val="2535690228"/>
+      </p:ext>
+    </p:extLst>
+  </p:cSld>
+  <p:clrMapOvr>
+    <a:masterClrMapping/>
+  </p:clrMapOvr>
+  <p:transition>
+    <p:fade/>
+  </p:transition>
+</p:sld>
+</file>
+
+<file path=ppt/slides/slide5.xml><?xml version="1.0" encoding="utf-8"?>
+<p:sld xmlns:a="http://schemas.openxmlformats.org/drawingml/2006/main" xmlns:r="http://schemas.openxmlformats.org/officeDocument/2006/relationships" xmlns:p="http://schemas.openxmlformats.org/presentationml/2006/main">
+  <p:cSld>
+    <p:spTree>
+      <p:nvGrpSpPr>
+        <p:cNvPr id="1" name="">
+          <a:extLst>
+            <a:ext uri="{FF2B5EF4-FFF2-40B4-BE49-F238E27FC236}">
+              <a16:creationId xmlns:a16="http://schemas.microsoft.com/office/drawing/2014/main" id="{E5B228E8-CA0D-D13B-E53F-6E1443A0AF2F}"/>
+            </a:ext>
+          </a:extLst>
+        </p:cNvPr>
+        <p:cNvGrpSpPr/>
+        <p:nvPr/>
+      </p:nvGrpSpPr>
+      <p:grpSpPr>
+        <a:xfrm>
+          <a:off x="0" y="0"/>
+          <a:ext cx="0" cy="0"/>
+          <a:chOff x="0" y="0"/>
+          <a:chExt cx="0" cy="0"/>
+        </a:xfrm>
+      </p:grpSpPr>
+      <p:sp>
+        <p:nvSpPr>
+          <p:cNvPr id="8" name="Content Placeholder 5">
+            <a:extLst>
+              <a:ext uri="{FF2B5EF4-FFF2-40B4-BE49-F238E27FC236}">
+                <a16:creationId xmlns:a16="http://schemas.microsoft.com/office/drawing/2014/main" id="{3DCB1477-F6B2-BF27-D5A1-2B29CED6D18A}"/>
+              </a:ext>
+            </a:extLst>
+          </p:cNvPr>
+          <p:cNvSpPr>
+            <a:spLocks noGrp="1"/>
+          </p:cNvSpPr>
+          <p:nvPr>
+            <p:ph idx="1"/>
+          </p:nvPr>
+        </p:nvSpPr>
+        <p:spPr>
+          <a:xfrm>
+            <a:off x="587375" y="1187450"/>
+            <a:ext cx="8292856" cy="5521575"/>
+          </a:xfrm>
+        </p:spPr>
+        <p:txBody>
+          <a:bodyPr>
+            <a:normAutofit/>
+          </a:bodyPr>
+          <a:lstStyle/>
+          <a:p>
+            <a:pPr marL="347663" indent="-347663">
+              <a:spcBef>
+                <a:spcPts val="600"/>
+              </a:spcBef>
+              <a:buClr>
+                <a:schemeClr val="tx1">
+                  <a:lumMod val="90000"/>
+                  <a:lumOff val="10000"/>
+                </a:schemeClr>
+              </a:buClr>
+              <a:buSzPct val="100000"/>
+              <a:buFont typeface="Wingdings" panose="05000000000000000000" pitchFamily="2" charset="2"/>
+              <a:buChar char="§"/>
+              <a:defRPr/>
+            </a:pPr>
+            <a:r>
+              <a:rPr lang="en-US" dirty="0"/>
+              <a:t>Tic-Tac-Toe (n x n grid)</a:t>
+            </a:r>
+          </a:p>
+          <a:p>
+            <a:pPr marL="621983" lvl="1" indent="-347663">
+              <a:spcBef>
+                <a:spcPts val="600"/>
+              </a:spcBef>
+              <a:buClr>
+                <a:schemeClr val="tx1">
+                  <a:lumMod val="90000"/>
+                  <a:lumOff val="10000"/>
+                </a:schemeClr>
+              </a:buClr>
+              <a:buSzPct val="100000"/>
+              <a:buFont typeface="Wingdings" panose="05000000000000000000" pitchFamily="2" charset="2"/>
+              <a:buChar char="§"/>
+              <a:defRPr/>
+            </a:pPr>
+            <a:r>
+              <a:rPr lang="en-GB" dirty="0"/>
+              <a:t>0 / 1 / 2 </a:t>
+            </a:r>
+            <a:r>
+              <a:rPr lang="en-GB" dirty="0">
+                <a:sym typeface="Wingdings" panose="05000000000000000000" pitchFamily="2" charset="2"/>
+              </a:rPr>
+              <a:t></a:t>
+            </a:r>
+            <a:r>
+              <a:rPr lang="en-GB" dirty="0"/>
+              <a:t> empty, player 1, player 2</a:t>
+            </a:r>
+          </a:p>
+          <a:p>
+            <a:pPr marL="621983" lvl="1" indent="-347663">
+              <a:spcBef>
+                <a:spcPts val="600"/>
+              </a:spcBef>
+              <a:buClr>
+                <a:schemeClr val="tx1">
+                  <a:lumMod val="90000"/>
+                  <a:lumOff val="10000"/>
+                </a:schemeClr>
+              </a:buClr>
+              <a:buSzPct val="100000"/>
+              <a:buFont typeface="Wingdings" panose="05000000000000000000" pitchFamily="2" charset="2"/>
+              <a:buChar char="§"/>
+              <a:defRPr/>
+            </a:pPr>
+            <a:endParaRPr lang="en-GB" dirty="0"/>
+          </a:p>
+          <a:p>
+            <a:pPr marL="347663" indent="-347663">
+              <a:spcBef>
+                <a:spcPts val="600"/>
+              </a:spcBef>
+              <a:buClr>
+                <a:schemeClr val="tx1">
+                  <a:lumMod val="90000"/>
+                  <a:lumOff val="10000"/>
+                </a:schemeClr>
+              </a:buClr>
+              <a:buSzPct val="100000"/>
+              <a:buFont typeface="Wingdings" panose="05000000000000000000" pitchFamily="2" charset="2"/>
+              <a:buChar char="§"/>
+              <a:defRPr/>
+            </a:pPr>
+            <a:r>
+              <a:rPr lang="en-GB" dirty="0"/>
+              <a:t>How to know whether player 1 has won?</a:t>
+            </a:r>
+            <a:endParaRPr lang="en-US" dirty="0"/>
+          </a:p>
+          <a:p>
+            <a:pPr marL="621983" lvl="1" indent="-347663">
+              <a:spcBef>
+                <a:spcPts val="600"/>
+              </a:spcBef>
+              <a:buClr>
+                <a:schemeClr val="tx1">
+                  <a:lumMod val="90000"/>
+                  <a:lumOff val="10000"/>
+                </a:schemeClr>
+              </a:buClr>
+              <a:buSzPct val="100000"/>
+              <a:buFont typeface="Wingdings" panose="05000000000000000000" pitchFamily="2" charset="2"/>
+              <a:buChar char="§"/>
+              <a:defRPr/>
+            </a:pPr>
+            <a:r>
+              <a:rPr lang="en-US" dirty="0"/>
+              <a:t>Example: Count the number of 1s in each row + column + diagonal, and then check whether the count equals n.</a:t>
+            </a:r>
+          </a:p>
+          <a:p>
+            <a:pPr marL="274320" lvl="1" indent="0">
+              <a:spcBef>
+                <a:spcPts val="600"/>
+              </a:spcBef>
+              <a:buClr>
+                <a:schemeClr val="tx1">
+                  <a:lumMod val="90000"/>
+                  <a:lumOff val="10000"/>
+                </a:schemeClr>
+              </a:buClr>
+              <a:buSzPct val="100000"/>
+              <a:buNone/>
+              <a:defRPr/>
+            </a:pPr>
+            <a:r>
+              <a:rPr lang="en-US" dirty="0"/>
+              <a:t> </a:t>
+            </a:r>
+          </a:p>
+          <a:p>
+            <a:pPr marL="274320" lvl="1" indent="0">
+              <a:spcBef>
+                <a:spcPts val="600"/>
+              </a:spcBef>
+              <a:buClr>
+                <a:schemeClr val="tx1">
+                  <a:lumMod val="90000"/>
+                  <a:lumOff val="10000"/>
+                </a:schemeClr>
+              </a:buClr>
+              <a:buSzPct val="100000"/>
+              <a:buNone/>
+              <a:defRPr/>
+            </a:pPr>
+            <a:r>
+              <a:rPr lang="en-US" dirty="0"/>
+              <a:t>For each line (row/column/diagonal)</a:t>
+            </a:r>
+          </a:p>
+          <a:p>
+            <a:pPr marL="621983" lvl="1" indent="-347663">
+              <a:spcBef>
+                <a:spcPts val="600"/>
+              </a:spcBef>
+              <a:buClr>
+                <a:schemeClr val="tx1">
+                  <a:lumMod val="90000"/>
+                  <a:lumOff val="10000"/>
+                </a:schemeClr>
+              </a:buClr>
+              <a:buSzPct val="100000"/>
+              <a:buFont typeface="Wingdings" panose="05000000000000000000" pitchFamily="2" charset="2"/>
+              <a:buChar char="§"/>
+              <a:defRPr/>
+            </a:pPr>
+            <a:r>
+              <a:rPr lang="en-US" dirty="0"/>
+              <a:t>n operations to check whether the value in the cell is 1</a:t>
+            </a:r>
+          </a:p>
+          <a:p>
+            <a:pPr marL="621983" lvl="1" indent="-347663">
+              <a:spcBef>
+                <a:spcPts val="600"/>
+              </a:spcBef>
+              <a:buClr>
+                <a:schemeClr val="tx1">
+                  <a:lumMod val="90000"/>
+                  <a:lumOff val="10000"/>
+                </a:schemeClr>
+              </a:buClr>
+              <a:buSzPct val="100000"/>
+              <a:buFont typeface="Wingdings" panose="05000000000000000000" pitchFamily="2" charset="2"/>
+              <a:buChar char="§"/>
+              <a:defRPr/>
+            </a:pPr>
+            <a:r>
+              <a:rPr lang="en-US" dirty="0"/>
+              <a:t>Up to n operations to increase the count</a:t>
+            </a:r>
+          </a:p>
+          <a:p>
+            <a:pPr marL="621983" lvl="1" indent="-347663">
+              <a:spcBef>
+                <a:spcPts val="600"/>
+              </a:spcBef>
+              <a:buClr>
+                <a:schemeClr val="tx1">
+                  <a:lumMod val="90000"/>
+                  <a:lumOff val="10000"/>
+                </a:schemeClr>
+              </a:buClr>
+              <a:buSzPct val="100000"/>
+              <a:buFont typeface="Wingdings" panose="05000000000000000000" pitchFamily="2" charset="2"/>
+              <a:buChar char="§"/>
+              <a:defRPr/>
+            </a:pPr>
+            <a:r>
+              <a:rPr lang="en-US" dirty="0"/>
+              <a:t>1 operation to check whether the count is 1</a:t>
+            </a:r>
+          </a:p>
+          <a:p>
+            <a:pPr marL="274320" lvl="1" indent="0">
+              <a:spcBef>
+                <a:spcPts val="600"/>
+              </a:spcBef>
+              <a:buClr>
+                <a:schemeClr val="tx1">
+                  <a:lumMod val="90000"/>
+                  <a:lumOff val="10000"/>
+                </a:schemeClr>
+              </a:buClr>
+              <a:buSzPct val="100000"/>
+              <a:buNone/>
+              <a:defRPr/>
+            </a:pPr>
+            <a:br>
+              <a:rPr lang="en-US" dirty="0"/>
+            </a:br>
+            <a:r>
+              <a:rPr lang="en-US" dirty="0"/>
+              <a:t>Total:</a:t>
+            </a:r>
+          </a:p>
+          <a:p>
+            <a:pPr marL="621983" lvl="1" indent="-347663">
+              <a:spcBef>
+                <a:spcPts val="600"/>
+              </a:spcBef>
+              <a:buClr>
+                <a:schemeClr val="tx1">
+                  <a:lumMod val="90000"/>
+                  <a:lumOff val="10000"/>
+                </a:schemeClr>
+              </a:buClr>
+              <a:buSzPct val="100000"/>
+              <a:buFont typeface="Wingdings" panose="05000000000000000000" pitchFamily="2" charset="2"/>
+              <a:buChar char="§"/>
+              <a:defRPr/>
+            </a:pPr>
+            <a:r>
+              <a:rPr lang="en-US" dirty="0"/>
+              <a:t>(n+n+2) lines of (n+n+1) operations = 4n</a:t>
+            </a:r>
+            <a:r>
+              <a:rPr lang="en-US" baseline="30000" dirty="0"/>
+              <a:t>2</a:t>
+            </a:r>
+            <a:r>
+              <a:rPr lang="en-US" dirty="0"/>
+              <a:t>+6n+2 = ~= O(n</a:t>
+            </a:r>
+            <a:r>
+              <a:rPr lang="en-US" baseline="30000" dirty="0"/>
+              <a:t>2</a:t>
+            </a:r>
+            <a:r>
+              <a:rPr lang="en-US" dirty="0"/>
+              <a:t>)</a:t>
+            </a:r>
+          </a:p>
+          <a:p>
+            <a:pPr marL="621983" lvl="1" indent="-347663">
+              <a:spcBef>
+                <a:spcPts val="600"/>
+              </a:spcBef>
+              <a:buClr>
+                <a:schemeClr val="tx1">
+                  <a:lumMod val="90000"/>
+                  <a:lumOff val="10000"/>
+                </a:schemeClr>
+              </a:buClr>
+              <a:buSzPct val="100000"/>
+              <a:buFont typeface="Wingdings" panose="05000000000000000000" pitchFamily="2" charset="2"/>
+              <a:buChar char="§"/>
+              <a:defRPr/>
+            </a:pPr>
+            <a:endParaRPr lang="en-US" dirty="0"/>
+          </a:p>
+          <a:p>
+            <a:pPr marL="274320" lvl="1" indent="0">
+              <a:spcBef>
+                <a:spcPts val="600"/>
+              </a:spcBef>
+              <a:buClr>
+                <a:schemeClr val="tx1">
+                  <a:lumMod val="90000"/>
+                  <a:lumOff val="10000"/>
+                </a:schemeClr>
+              </a:buClr>
+              <a:buSzPct val="100000"/>
+              <a:buNone/>
+              <a:defRPr/>
+            </a:pPr>
+            <a:endParaRPr lang="en-US" dirty="0"/>
+          </a:p>
+          <a:p>
+            <a:pPr marL="621983" lvl="1" indent="-347663">
+              <a:spcBef>
+                <a:spcPts val="600"/>
+              </a:spcBef>
+              <a:buClr>
+                <a:schemeClr val="tx1">
+                  <a:lumMod val="90000"/>
+                  <a:lumOff val="10000"/>
+                </a:schemeClr>
+              </a:buClr>
+              <a:buSzPct val="100000"/>
+              <a:buFont typeface="Wingdings" panose="05000000000000000000" pitchFamily="2" charset="2"/>
+              <a:buChar char="§"/>
+              <a:defRPr/>
+            </a:pPr>
+            <a:endParaRPr lang="en-US" dirty="0"/>
+          </a:p>
+          <a:p>
+            <a:pPr marL="0" indent="0">
+              <a:spcBef>
+                <a:spcPts val="600"/>
+              </a:spcBef>
+              <a:buClr>
+                <a:schemeClr val="tx1">
+                  <a:lumMod val="90000"/>
+                  <a:lumOff val="10000"/>
+                </a:schemeClr>
+              </a:buClr>
+              <a:buSzPct val="100000"/>
+              <a:buNone/>
+              <a:defRPr/>
+            </a:pPr>
+            <a:endParaRPr lang="en-US" dirty="0"/>
+          </a:p>
+          <a:p>
+            <a:pPr marL="347663" indent="-347663">
+              <a:spcBef>
+                <a:spcPts val="600"/>
+              </a:spcBef>
+              <a:buClr>
+                <a:schemeClr val="tx1">
+                  <a:lumMod val="90000"/>
+                  <a:lumOff val="10000"/>
+                </a:schemeClr>
+              </a:buClr>
+              <a:buSzPct val="100000"/>
+              <a:buFont typeface="Wingdings" panose="05000000000000000000" pitchFamily="2" charset="2"/>
+              <a:buChar char="§"/>
+              <a:defRPr/>
+            </a:pPr>
+            <a:endParaRPr lang="en-US" sz="2400" dirty="0"/>
+          </a:p>
+          <a:p>
+            <a:pPr marL="347663" indent="-347663">
+              <a:spcBef>
+                <a:spcPts val="600"/>
+              </a:spcBef>
+              <a:buClr>
+                <a:schemeClr val="tx1">
+                  <a:lumMod val="90000"/>
+                  <a:lumOff val="10000"/>
+                </a:schemeClr>
+              </a:buClr>
+              <a:buSzPct val="100000"/>
+              <a:buFont typeface="Wingdings" panose="05000000000000000000" pitchFamily="2" charset="2"/>
+              <a:buChar char="§"/>
+              <a:defRPr/>
+            </a:pPr>
+            <a:endParaRPr lang="en-US" sz="2800" dirty="0"/>
+          </a:p>
+        </p:txBody>
+      </p:sp>
+      <p:sp>
+        <p:nvSpPr>
+          <p:cNvPr id="14338" name="Rectangle 2">
+            <a:extLst>
+              <a:ext uri="{FF2B5EF4-FFF2-40B4-BE49-F238E27FC236}">
+                <a16:creationId xmlns:a16="http://schemas.microsoft.com/office/drawing/2014/main" id="{BBD80C34-2A07-2E4D-5390-B594ECC710DA}"/>
+              </a:ext>
+            </a:extLst>
+          </p:cNvPr>
+          <p:cNvSpPr>
+            <a:spLocks noGrp="1" noChangeArrowheads="1"/>
+          </p:cNvSpPr>
+          <p:nvPr>
+            <p:ph type="title"/>
+          </p:nvPr>
+        </p:nvSpPr>
+        <p:spPr>
+          <a:xfrm>
+            <a:off x="533400" y="381000"/>
+            <a:ext cx="8382000" cy="838200"/>
+          </a:xfrm>
+        </p:spPr>
+        <p:txBody>
+          <a:bodyPr>
+            <a:normAutofit/>
+          </a:bodyPr>
+          <a:lstStyle/>
+          <a:p>
+            <a:pPr eaLnBrk="1" hangingPunct="1"/>
+            <a:r>
+              <a:rPr lang="en-GB" sz="3600" dirty="0">
+                <a:solidFill>
+                  <a:srgbClr val="0000FF"/>
+                </a:solidFill>
+              </a:rPr>
+              <a:t>Problem Solving with 2D arrays</a:t>
+            </a:r>
+          </a:p>
+        </p:txBody>
+      </p:sp>
+      <p:sp>
+        <p:nvSpPr>
+          <p:cNvPr id="7" name="Slide Number Placeholder 6">
+            <a:extLst>
+              <a:ext uri="{FF2B5EF4-FFF2-40B4-BE49-F238E27FC236}">
+                <a16:creationId xmlns:a16="http://schemas.microsoft.com/office/drawing/2014/main" id="{6E8724F1-B139-0825-26A6-D70DA93CBE30}"/>
+              </a:ext>
+            </a:extLst>
+          </p:cNvPr>
+          <p:cNvSpPr>
+            <a:spLocks noGrp="1"/>
+          </p:cNvSpPr>
+          <p:nvPr>
+            <p:ph type="sldNum" sz="quarter" idx="12"/>
+          </p:nvPr>
+        </p:nvSpPr>
+        <p:spPr/>
+        <p:txBody>
+          <a:bodyPr>
+            <a:normAutofit/>
+          </a:bodyPr>
+          <a:lstStyle/>
+          <a:p>
+            <a:pPr>
+              <a:defRPr/>
+            </a:pPr>
+            <a:r>
+              <a:rPr lang="en-US" dirty="0"/>
+              <a:t>Week9R - </a:t>
+            </a:r>
+            <a:fld id="{2E4790E1-2590-4AEE-892D-AB46A7688113}" type="slidenum">
+              <a:rPr lang="en-US" smtClean="0"/>
+              <a:pPr>
+                <a:defRPr/>
+              </a:pPr>
+              <a:t>5</a:t>
+            </a:fld>
+            <a:endParaRPr lang="en-US" dirty="0"/>
+          </a:p>
+        </p:txBody>
+      </p:sp>
+      <p:sp>
+        <p:nvSpPr>
+          <p:cNvPr id="2" name="Footer Placeholder 1">
+            <a:extLst>
+              <a:ext uri="{FF2B5EF4-FFF2-40B4-BE49-F238E27FC236}">
+                <a16:creationId xmlns:a16="http://schemas.microsoft.com/office/drawing/2014/main" id="{815A19B7-75F7-3391-BC43-901F9D461EB3}"/>
+              </a:ext>
+            </a:extLst>
+          </p:cNvPr>
+          <p:cNvSpPr>
+            <a:spLocks noGrp="1"/>
+          </p:cNvSpPr>
+          <p:nvPr>
+            <p:ph type="ftr" sz="quarter" idx="11"/>
+          </p:nvPr>
+        </p:nvSpPr>
+        <p:spPr/>
+        <p:txBody>
+          <a:bodyPr/>
+          <a:lstStyle/>
+          <a:p>
+            <a:pPr algn="l">
+              <a:defRPr/>
+            </a:pPr>
+            <a:r>
+              <a:rPr lang="en-US"/>
+              <a:t>CS1010: Programming Methodology</a:t>
+            </a:r>
+            <a:endParaRPr lang="en-US" dirty="0"/>
+          </a:p>
+        </p:txBody>
+      </p:sp>
+      <p:sp>
+        <p:nvSpPr>
+          <p:cNvPr id="3" name="Rectangle 2">
+            <a:extLst>
+              <a:ext uri="{FF2B5EF4-FFF2-40B4-BE49-F238E27FC236}">
+                <a16:creationId xmlns:a16="http://schemas.microsoft.com/office/drawing/2014/main" id="{3BD3AF16-033F-90AA-665B-399A2BAB2DC6}"/>
+              </a:ext>
+            </a:extLst>
+          </p:cNvPr>
+          <p:cNvSpPr/>
+          <p:nvPr/>
+        </p:nvSpPr>
+        <p:spPr>
+          <a:xfrm>
+            <a:off x="7109495" y="1342211"/>
+            <a:ext cx="462337" cy="452063"/>
+          </a:xfrm>
+          <a:prstGeom prst="rect">
+            <a:avLst/>
+          </a:prstGeom>
+          <a:noFill/>
+        </p:spPr>
+        <p:style>
+          <a:lnRef idx="2">
+            <a:schemeClr val="accent1">
+              <a:shade val="50000"/>
+            </a:schemeClr>
+          </a:lnRef>
+          <a:fillRef idx="1">
+            <a:schemeClr val="accent1"/>
+          </a:fillRef>
+          <a:effectRef idx="0">
+            <a:schemeClr val="accent1"/>
+          </a:effectRef>
+          <a:fontRef idx="minor">
+            <a:schemeClr val="lt1"/>
+          </a:fontRef>
+        </p:style>
+        <p:txBody>
+          <a:bodyPr rtlCol="0" anchor="ctr"/>
+          <a:lstStyle/>
+          <a:p>
+            <a:pPr algn="ctr"/>
+            <a:r>
+              <a:rPr lang="en-US" dirty="0">
+                <a:ln w="0"/>
+                <a:solidFill>
+                  <a:schemeClr val="tx1"/>
+                </a:solidFill>
+                <a:effectLst>
+                  <a:outerShdw blurRad="38100" dist="19050" dir="2700000" algn="tl" rotWithShape="0">
+                    <a:schemeClr val="dk1">
+                      <a:alpha val="40000"/>
+                    </a:schemeClr>
+                  </a:outerShdw>
+                </a:effectLst>
+              </a:rPr>
+              <a:t>1</a:t>
+            </a:r>
+          </a:p>
+        </p:txBody>
+      </p:sp>
+      <p:sp>
+        <p:nvSpPr>
+          <p:cNvPr id="4" name="Rectangle 3">
+            <a:extLst>
+              <a:ext uri="{FF2B5EF4-FFF2-40B4-BE49-F238E27FC236}">
+                <a16:creationId xmlns:a16="http://schemas.microsoft.com/office/drawing/2014/main" id="{2CB63E41-6C7E-A993-8A3E-4B8BE18C14DD}"/>
+              </a:ext>
+            </a:extLst>
+          </p:cNvPr>
+          <p:cNvSpPr/>
+          <p:nvPr/>
+        </p:nvSpPr>
+        <p:spPr>
+          <a:xfrm>
+            <a:off x="7109494" y="1794274"/>
+            <a:ext cx="462337" cy="452063"/>
+          </a:xfrm>
+          <a:prstGeom prst="rect">
+            <a:avLst/>
+          </a:prstGeom>
+          <a:noFill/>
+        </p:spPr>
+        <p:style>
+          <a:lnRef idx="2">
+            <a:schemeClr val="accent1">
+              <a:shade val="50000"/>
+            </a:schemeClr>
+          </a:lnRef>
+          <a:fillRef idx="1">
+            <a:schemeClr val="accent1"/>
+          </a:fillRef>
+          <a:effectRef idx="0">
+            <a:schemeClr val="accent1"/>
+          </a:effectRef>
+          <a:fontRef idx="minor">
+            <a:schemeClr val="lt1"/>
+          </a:fontRef>
+        </p:style>
+        <p:txBody>
+          <a:bodyPr rtlCol="0" anchor="ctr"/>
+          <a:lstStyle/>
+          <a:p>
+            <a:pPr algn="ctr"/>
+            <a:r>
+              <a:rPr lang="en-US" dirty="0">
+                <a:ln w="0"/>
+                <a:solidFill>
+                  <a:schemeClr val="tx1"/>
+                </a:solidFill>
+                <a:effectLst>
+                  <a:outerShdw blurRad="38100" dist="19050" dir="2700000" algn="tl" rotWithShape="0">
+                    <a:schemeClr val="dk1">
+                      <a:alpha val="40000"/>
+                    </a:schemeClr>
+                  </a:outerShdw>
+                </a:effectLst>
+              </a:rPr>
+              <a:t>0</a:t>
+            </a:r>
+          </a:p>
+        </p:txBody>
+      </p:sp>
+      <p:sp>
+        <p:nvSpPr>
+          <p:cNvPr id="5" name="Rectangle 4">
+            <a:extLst>
+              <a:ext uri="{FF2B5EF4-FFF2-40B4-BE49-F238E27FC236}">
+                <a16:creationId xmlns:a16="http://schemas.microsoft.com/office/drawing/2014/main" id="{96511336-732E-80D9-B52F-958553DA8C08}"/>
+              </a:ext>
+            </a:extLst>
+          </p:cNvPr>
+          <p:cNvSpPr/>
+          <p:nvPr/>
+        </p:nvSpPr>
+        <p:spPr>
+          <a:xfrm>
+            <a:off x="7571831" y="1794274"/>
+            <a:ext cx="462337" cy="452063"/>
+          </a:xfrm>
+          <a:prstGeom prst="rect">
+            <a:avLst/>
+          </a:prstGeom>
+          <a:noFill/>
+        </p:spPr>
+        <p:style>
+          <a:lnRef idx="2">
+            <a:schemeClr val="accent1">
+              <a:shade val="50000"/>
+            </a:schemeClr>
+          </a:lnRef>
+          <a:fillRef idx="1">
+            <a:schemeClr val="accent1"/>
+          </a:fillRef>
+          <a:effectRef idx="0">
+            <a:schemeClr val="accent1"/>
+          </a:effectRef>
+          <a:fontRef idx="minor">
+            <a:schemeClr val="lt1"/>
+          </a:fontRef>
+        </p:style>
+        <p:txBody>
+          <a:bodyPr rtlCol="0" anchor="ctr"/>
+          <a:lstStyle/>
+          <a:p>
+            <a:pPr algn="ctr"/>
+            <a:r>
+              <a:rPr lang="en-US" dirty="0">
+                <a:ln w="0"/>
+                <a:solidFill>
+                  <a:schemeClr val="tx1"/>
+                </a:solidFill>
+                <a:effectLst>
+                  <a:outerShdw blurRad="38100" dist="19050" dir="2700000" algn="tl" rotWithShape="0">
+                    <a:schemeClr val="dk1">
+                      <a:alpha val="40000"/>
+                    </a:schemeClr>
+                  </a:outerShdw>
+                </a:effectLst>
+              </a:rPr>
+              <a:t>1</a:t>
+            </a:r>
+          </a:p>
+        </p:txBody>
+      </p:sp>
+      <p:sp>
+        <p:nvSpPr>
+          <p:cNvPr id="6" name="Rectangle 5">
+            <a:extLst>
+              <a:ext uri="{FF2B5EF4-FFF2-40B4-BE49-F238E27FC236}">
+                <a16:creationId xmlns:a16="http://schemas.microsoft.com/office/drawing/2014/main" id="{94BCA8A5-6A94-32CA-1E59-A57787E83F0E}"/>
+              </a:ext>
+            </a:extLst>
+          </p:cNvPr>
+          <p:cNvSpPr/>
+          <p:nvPr/>
+        </p:nvSpPr>
+        <p:spPr>
+          <a:xfrm>
+            <a:off x="7109494" y="2246337"/>
+            <a:ext cx="462337" cy="452063"/>
+          </a:xfrm>
+          <a:prstGeom prst="rect">
+            <a:avLst/>
+          </a:prstGeom>
+          <a:noFill/>
+        </p:spPr>
+        <p:style>
+          <a:lnRef idx="2">
+            <a:schemeClr val="accent1">
+              <a:shade val="50000"/>
+            </a:schemeClr>
+          </a:lnRef>
+          <a:fillRef idx="1">
+            <a:schemeClr val="accent1"/>
+          </a:fillRef>
+          <a:effectRef idx="0">
+            <a:schemeClr val="accent1"/>
+          </a:effectRef>
+          <a:fontRef idx="minor">
+            <a:schemeClr val="lt1"/>
+          </a:fontRef>
+        </p:style>
+        <p:txBody>
+          <a:bodyPr rtlCol="0" anchor="ctr"/>
+          <a:lstStyle/>
+          <a:p>
+            <a:pPr algn="ctr"/>
+            <a:r>
+              <a:rPr lang="en-US" dirty="0">
+                <a:ln w="0"/>
+                <a:solidFill>
+                  <a:schemeClr val="tx1"/>
+                </a:solidFill>
+                <a:effectLst>
+                  <a:outerShdw blurRad="38100" dist="19050" dir="2700000" algn="tl" rotWithShape="0">
+                    <a:schemeClr val="dk1">
+                      <a:alpha val="40000"/>
+                    </a:schemeClr>
+                  </a:outerShdw>
+                </a:effectLst>
+              </a:rPr>
+              <a:t>2</a:t>
+            </a:r>
+          </a:p>
+        </p:txBody>
+      </p:sp>
+      <p:sp>
+        <p:nvSpPr>
+          <p:cNvPr id="9" name="Rectangle 8">
+            <a:extLst>
+              <a:ext uri="{FF2B5EF4-FFF2-40B4-BE49-F238E27FC236}">
+                <a16:creationId xmlns:a16="http://schemas.microsoft.com/office/drawing/2014/main" id="{40D058AD-7A2E-2C4E-3036-DB660297B4C3}"/>
+              </a:ext>
+            </a:extLst>
+          </p:cNvPr>
+          <p:cNvSpPr/>
+          <p:nvPr/>
+        </p:nvSpPr>
+        <p:spPr>
+          <a:xfrm>
+            <a:off x="7571830" y="2246337"/>
+            <a:ext cx="462337" cy="452063"/>
+          </a:xfrm>
+          <a:prstGeom prst="rect">
+            <a:avLst/>
+          </a:prstGeom>
+          <a:noFill/>
+        </p:spPr>
+        <p:style>
+          <a:lnRef idx="2">
+            <a:schemeClr val="accent1">
+              <a:shade val="50000"/>
+            </a:schemeClr>
+          </a:lnRef>
+          <a:fillRef idx="1">
+            <a:schemeClr val="accent1"/>
+          </a:fillRef>
+          <a:effectRef idx="0">
+            <a:schemeClr val="accent1"/>
+          </a:effectRef>
+          <a:fontRef idx="minor">
+            <a:schemeClr val="lt1"/>
+          </a:fontRef>
+        </p:style>
+        <p:txBody>
+          <a:bodyPr rtlCol="0" anchor="ctr"/>
+          <a:lstStyle/>
+          <a:p>
+            <a:pPr algn="ctr"/>
+            <a:r>
+              <a:rPr lang="en-US" dirty="0">
+                <a:ln w="0"/>
+                <a:solidFill>
+                  <a:schemeClr val="tx1"/>
+                </a:solidFill>
+                <a:effectLst>
+                  <a:outerShdw blurRad="38100" dist="19050" dir="2700000" algn="tl" rotWithShape="0">
+                    <a:schemeClr val="dk1">
+                      <a:alpha val="40000"/>
+                    </a:schemeClr>
+                  </a:outerShdw>
+                </a:effectLst>
+              </a:rPr>
+              <a:t>2</a:t>
+            </a:r>
+          </a:p>
+        </p:txBody>
+      </p:sp>
+      <p:sp>
+        <p:nvSpPr>
+          <p:cNvPr id="10" name="Rectangle 9">
+            <a:extLst>
+              <a:ext uri="{FF2B5EF4-FFF2-40B4-BE49-F238E27FC236}">
+                <a16:creationId xmlns:a16="http://schemas.microsoft.com/office/drawing/2014/main" id="{C3802635-A38E-D313-C964-7DD7E771F913}"/>
+              </a:ext>
+            </a:extLst>
+          </p:cNvPr>
+          <p:cNvSpPr/>
+          <p:nvPr/>
+        </p:nvSpPr>
+        <p:spPr>
+          <a:xfrm>
+            <a:off x="8034167" y="2246337"/>
+            <a:ext cx="462337" cy="452063"/>
+          </a:xfrm>
+          <a:prstGeom prst="rect">
+            <a:avLst/>
+          </a:prstGeom>
+          <a:noFill/>
+        </p:spPr>
+        <p:style>
+          <a:lnRef idx="2">
+            <a:schemeClr val="accent1">
+              <a:shade val="50000"/>
+            </a:schemeClr>
+          </a:lnRef>
+          <a:fillRef idx="1">
+            <a:schemeClr val="accent1"/>
+          </a:fillRef>
+          <a:effectRef idx="0">
+            <a:schemeClr val="accent1"/>
+          </a:effectRef>
+          <a:fontRef idx="minor">
+            <a:schemeClr val="lt1"/>
+          </a:fontRef>
+        </p:style>
+        <p:txBody>
+          <a:bodyPr rtlCol="0" anchor="ctr"/>
+          <a:lstStyle/>
+          <a:p>
+            <a:pPr algn="ctr"/>
+            <a:r>
+              <a:rPr lang="en-US" dirty="0">
+                <a:ln w="0"/>
+                <a:solidFill>
+                  <a:schemeClr val="tx1"/>
+                </a:solidFill>
+                <a:effectLst>
+                  <a:outerShdw blurRad="38100" dist="19050" dir="2700000" algn="tl" rotWithShape="0">
+                    <a:schemeClr val="dk1">
+                      <a:alpha val="40000"/>
+                    </a:schemeClr>
+                  </a:outerShdw>
+                </a:effectLst>
+              </a:rPr>
+              <a:t>2</a:t>
+            </a:r>
+          </a:p>
+        </p:txBody>
+      </p:sp>
+      <p:sp>
+        <p:nvSpPr>
+          <p:cNvPr id="11" name="Rectangle 10">
+            <a:extLst>
+              <a:ext uri="{FF2B5EF4-FFF2-40B4-BE49-F238E27FC236}">
+                <a16:creationId xmlns:a16="http://schemas.microsoft.com/office/drawing/2014/main" id="{28ECC194-21A9-A62B-1E84-B3D46BFC624D}"/>
+              </a:ext>
+            </a:extLst>
+          </p:cNvPr>
+          <p:cNvSpPr/>
+          <p:nvPr/>
+        </p:nvSpPr>
+        <p:spPr>
+          <a:xfrm>
+            <a:off x="7569700" y="1342210"/>
+            <a:ext cx="462337" cy="452063"/>
+          </a:xfrm>
+          <a:prstGeom prst="rect">
+            <a:avLst/>
+          </a:prstGeom>
+          <a:noFill/>
+        </p:spPr>
+        <p:style>
+          <a:lnRef idx="2">
+            <a:schemeClr val="accent1">
+              <a:shade val="50000"/>
+            </a:schemeClr>
+          </a:lnRef>
+          <a:fillRef idx="1">
+            <a:schemeClr val="accent1"/>
+          </a:fillRef>
+          <a:effectRef idx="0">
+            <a:schemeClr val="accent1"/>
+          </a:effectRef>
+          <a:fontRef idx="minor">
+            <a:schemeClr val="lt1"/>
+          </a:fontRef>
+        </p:style>
+        <p:txBody>
+          <a:bodyPr rtlCol="0" anchor="ctr"/>
+          <a:lstStyle/>
+          <a:p>
+            <a:pPr algn="ctr"/>
+            <a:r>
+              <a:rPr lang="en-US" dirty="0">
+                <a:ln w="0"/>
+                <a:solidFill>
+                  <a:schemeClr val="tx1"/>
+                </a:solidFill>
+                <a:effectLst>
+                  <a:outerShdw blurRad="38100" dist="19050" dir="2700000" algn="tl" rotWithShape="0">
+                    <a:schemeClr val="dk1">
+                      <a:alpha val="40000"/>
+                    </a:schemeClr>
+                  </a:outerShdw>
+                </a:effectLst>
+              </a:rPr>
+              <a:t>0</a:t>
+            </a:r>
+          </a:p>
+        </p:txBody>
+      </p:sp>
+      <p:sp>
+        <p:nvSpPr>
+          <p:cNvPr id="14" name="Rectangle 13">
+            <a:extLst>
+              <a:ext uri="{FF2B5EF4-FFF2-40B4-BE49-F238E27FC236}">
+                <a16:creationId xmlns:a16="http://schemas.microsoft.com/office/drawing/2014/main" id="{0325C9DA-6AD4-51E6-B559-8CA68AFF2039}"/>
+              </a:ext>
+            </a:extLst>
+          </p:cNvPr>
+          <p:cNvSpPr/>
+          <p:nvPr/>
+        </p:nvSpPr>
+        <p:spPr>
+          <a:xfrm>
+            <a:off x="8029855" y="1342209"/>
+            <a:ext cx="462337" cy="452063"/>
+          </a:xfrm>
+          <a:prstGeom prst="rect">
+            <a:avLst/>
+          </a:prstGeom>
+          <a:noFill/>
+        </p:spPr>
+        <p:style>
+          <a:lnRef idx="2">
+            <a:schemeClr val="accent1">
+              <a:shade val="50000"/>
+            </a:schemeClr>
+          </a:lnRef>
+          <a:fillRef idx="1">
+            <a:schemeClr val="accent1"/>
+          </a:fillRef>
+          <a:effectRef idx="0">
+            <a:schemeClr val="accent1"/>
+          </a:effectRef>
+          <a:fontRef idx="minor">
+            <a:schemeClr val="lt1"/>
+          </a:fontRef>
+        </p:style>
+        <p:txBody>
+          <a:bodyPr rtlCol="0" anchor="ctr"/>
+          <a:lstStyle/>
+          <a:p>
+            <a:pPr algn="ctr"/>
+            <a:r>
+              <a:rPr lang="en-US" dirty="0">
+                <a:ln w="0"/>
+                <a:solidFill>
+                  <a:schemeClr val="tx1"/>
+                </a:solidFill>
+                <a:effectLst>
+                  <a:outerShdw blurRad="38100" dist="19050" dir="2700000" algn="tl" rotWithShape="0">
+                    <a:schemeClr val="dk1">
+                      <a:alpha val="40000"/>
+                    </a:schemeClr>
+                  </a:outerShdw>
+                </a:effectLst>
+              </a:rPr>
+              <a:t>2</a:t>
+            </a:r>
+          </a:p>
+        </p:txBody>
+      </p:sp>
+      <p:sp>
+        <p:nvSpPr>
+          <p:cNvPr id="15" name="Rectangle 14">
+            <a:extLst>
+              <a:ext uri="{FF2B5EF4-FFF2-40B4-BE49-F238E27FC236}">
+                <a16:creationId xmlns:a16="http://schemas.microsoft.com/office/drawing/2014/main" id="{B2A1F4C6-6CF9-26CC-89DC-CCDCD85AEA40}"/>
+              </a:ext>
+            </a:extLst>
+          </p:cNvPr>
+          <p:cNvSpPr/>
+          <p:nvPr/>
+        </p:nvSpPr>
+        <p:spPr>
+          <a:xfrm>
+            <a:off x="8029854" y="1799056"/>
+            <a:ext cx="462337" cy="452063"/>
+          </a:xfrm>
+          <a:prstGeom prst="rect">
+            <a:avLst/>
+          </a:prstGeom>
+          <a:noFill/>
+        </p:spPr>
+        <p:style>
+          <a:lnRef idx="2">
+            <a:schemeClr val="accent1">
+              <a:shade val="50000"/>
+            </a:schemeClr>
+          </a:lnRef>
+          <a:fillRef idx="1">
+            <a:schemeClr val="accent1"/>
+          </a:fillRef>
+          <a:effectRef idx="0">
+            <a:schemeClr val="accent1"/>
+          </a:effectRef>
+          <a:fontRef idx="minor">
+            <a:schemeClr val="lt1"/>
+          </a:fontRef>
+        </p:style>
+        <p:txBody>
+          <a:bodyPr rtlCol="0" anchor="ctr"/>
+          <a:lstStyle/>
+          <a:p>
+            <a:pPr algn="ctr"/>
+            <a:r>
+              <a:rPr lang="en-US" dirty="0">
+                <a:ln w="0"/>
+                <a:solidFill>
+                  <a:schemeClr val="tx1"/>
+                </a:solidFill>
+                <a:effectLst>
+                  <a:outerShdw blurRad="38100" dist="19050" dir="2700000" algn="tl" rotWithShape="0">
+                    <a:schemeClr val="dk1">
+                      <a:alpha val="40000"/>
+                    </a:schemeClr>
+                  </a:outerShdw>
+                </a:effectLst>
+              </a:rPr>
+              <a:t>1</a:t>
+            </a:r>
+          </a:p>
+        </p:txBody>
+      </p:sp>
+      <p:sp>
+        <p:nvSpPr>
+          <p:cNvPr id="12" name="Date Placeholder 11">
+            <a:extLst>
+              <a:ext uri="{FF2B5EF4-FFF2-40B4-BE49-F238E27FC236}">
+                <a16:creationId xmlns:a16="http://schemas.microsoft.com/office/drawing/2014/main" id="{17904F9C-3F72-1102-FF7C-BAF822ED2DDB}"/>
+              </a:ext>
+            </a:extLst>
+          </p:cNvPr>
+          <p:cNvSpPr>
+            <a:spLocks noGrp="1"/>
+          </p:cNvSpPr>
+          <p:nvPr>
+            <p:ph type="dt" sz="half" idx="10"/>
+          </p:nvPr>
+        </p:nvSpPr>
+        <p:spPr/>
+        <p:txBody>
+          <a:bodyPr/>
+          <a:lstStyle/>
+          <a:p>
+            <a:pPr>
+              <a:defRPr/>
+            </a:pPr>
+            <a:r>
+              <a:rPr lang="en-US"/>
+              <a:t>© NUS</a:t>
+            </a:r>
+          </a:p>
+        </p:txBody>
+      </p:sp>
+      <p:sp>
+        <p:nvSpPr>
+          <p:cNvPr id="13" name="TextBox 12">
+            <a:extLst>
+              <a:ext uri="{FF2B5EF4-FFF2-40B4-BE49-F238E27FC236}">
+                <a16:creationId xmlns:a16="http://schemas.microsoft.com/office/drawing/2014/main" id="{BCA93678-0C8C-46B6-70E0-11B092222AF1}"/>
+              </a:ext>
+            </a:extLst>
+          </p:cNvPr>
+          <p:cNvSpPr txBox="1"/>
+          <p:nvPr/>
+        </p:nvSpPr>
+        <p:spPr>
+          <a:xfrm>
+            <a:off x="6624556" y="5347384"/>
+            <a:ext cx="2290844" cy="646331"/>
+          </a:xfrm>
+          <a:prstGeom prst="rect">
+            <a:avLst/>
+          </a:prstGeom>
+          <a:solidFill>
+            <a:srgbClr val="FFFF99"/>
+          </a:solidFill>
+          <a:ln w="12700"/>
+        </p:spPr>
+        <p:style>
+          <a:lnRef idx="2">
+            <a:schemeClr val="accent4"/>
+          </a:lnRef>
+          <a:fillRef idx="1">
+            <a:schemeClr val="lt1"/>
+          </a:fillRef>
+          <a:effectRef idx="0">
+            <a:schemeClr val="accent4"/>
+          </a:effectRef>
+          <a:fontRef idx="minor">
+            <a:schemeClr val="dk1"/>
+          </a:fontRef>
+        </p:style>
+        <p:txBody>
+          <a:bodyPr wrap="square" rtlCol="0">
+            <a:spAutoFit/>
+          </a:bodyPr>
+          <a:lstStyle/>
+          <a:p>
+            <a:r>
+              <a:rPr lang="en-US" dirty="0"/>
+              <a:t>How about the best- case scenario?</a:t>
+            </a:r>
+          </a:p>
+        </p:txBody>
+      </p:sp>
+    </p:spTree>
+    <p:extLst>
+      <p:ext uri="{BB962C8B-B14F-4D97-AF65-F5344CB8AC3E}">
+        <p14:creationId xmlns:p14="http://schemas.microsoft.com/office/powerpoint/2010/main" val="2088874760"/>
+      </p:ext>
+    </p:extLst>
+  </p:cSld>
+  <p:clrMapOvr>
+    <a:masterClrMapping/>
+  </p:clrMapOvr>
+  <p:transition>
+    <p:fade/>
+  </p:transition>
+  <p:timing>
+    <p:tnLst>
+      <p:par>
+        <p:cTn id="1" dur="indefinite" restart="never" nodeType="tmRoot">
+          <p:childTnLst>
+            <p:seq concurrent="1" nextAc="seek">
+              <p:cTn id="2" dur="indefinite" nodeType="mainSeq">
+                <p:childTnLst>
+                  <p:par>
+                    <p:cTn id="3" fill="hold">
+                      <p:stCondLst>
+                        <p:cond delay="indefinite"/>
+                      </p:stCondLst>
+                      <p:childTnLst>
+                        <p:par>
+                          <p:cTn id="4" fill="hold">
+                            <p:stCondLst>
+                              <p:cond delay="0"/>
+                            </p:stCondLst>
+                            <p:childTnLst>
+                              <p:par>
+                                <p:cTn id="5" presetID="1" presetClass="entr" presetSubtype="0" fill="hold" nodeType="clickEffect">
+                                  <p:stCondLst>
+                                    <p:cond delay="0"/>
+                                  </p:stCondLst>
+                                  <p:childTnLst>
+                                    <p:set>
+                                      <p:cBhvr>
+                                        <p:cTn id="6" dur="1" fill="hold">
+                                          <p:stCondLst>
+                                            <p:cond delay="0"/>
+                                          </p:stCondLst>
+                                        </p:cTn>
+                                        <p:tgtEl>
+                                          <p:spTgt spid="8">
+                                            <p:txEl>
+                                              <p:pRg st="4" end="4"/>
+                                            </p:txEl>
+                                          </p:spTgt>
+                                        </p:tgtEl>
+                                        <p:attrNameLst>
+                                          <p:attrName>style.visibility</p:attrName>
+                                        </p:attrNameLst>
+                                      </p:cBhvr>
+                                      <p:to>
+                                        <p:strVal val="visible"/>
+                                      </p:to>
+                                    </p:set>
+                                  </p:childTnLst>
+                                </p:cTn>
+                              </p:par>
+                            </p:childTnLst>
+                          </p:cTn>
+                        </p:par>
+                      </p:childTnLst>
+                    </p:cTn>
+                  </p:par>
+                  <p:par>
+                    <p:cTn id="7" fill="hold">
+                      <p:stCondLst>
+                        <p:cond delay="indefinite"/>
+                      </p:stCondLst>
+                      <p:childTnLst>
+                        <p:par>
+                          <p:cTn id="8" fill="hold">
+                            <p:stCondLst>
+                              <p:cond delay="0"/>
+                            </p:stCondLst>
+                            <p:childTnLst>
+                              <p:par>
+                                <p:cTn id="9" presetID="1" presetClass="entr" presetSubtype="0" fill="hold" nodeType="clickEffect">
+                                  <p:stCondLst>
+                                    <p:cond delay="0"/>
+                                  </p:stCondLst>
+                                  <p:childTnLst>
+                                    <p:set>
+                                      <p:cBhvr>
+                                        <p:cTn id="10" dur="1" fill="hold">
+                                          <p:stCondLst>
+                                            <p:cond delay="0"/>
+                                          </p:stCondLst>
+                                        </p:cTn>
+                                        <p:tgtEl>
+                                          <p:spTgt spid="8">
+                                            <p:txEl>
+                                              <p:pRg st="6" end="6"/>
+                                            </p:txEl>
+                                          </p:spTgt>
+                                        </p:tgtEl>
+                                        <p:attrNameLst>
+                                          <p:attrName>style.visibility</p:attrName>
+                                        </p:attrNameLst>
+                                      </p:cBhvr>
+                                      <p:to>
+                                        <p:strVal val="visible"/>
+                                      </p:to>
+                                    </p:set>
+                                  </p:childTnLst>
+                                </p:cTn>
+                              </p:par>
+                              <p:par>
+                                <p:cTn id="11" presetID="1" presetClass="entr" presetSubtype="0" fill="hold" nodeType="withEffect">
+                                  <p:stCondLst>
+                                    <p:cond delay="0"/>
+                                  </p:stCondLst>
+                                  <p:childTnLst>
+                                    <p:set>
+                                      <p:cBhvr>
+                                        <p:cTn id="12" dur="1" fill="hold">
+                                          <p:stCondLst>
+                                            <p:cond delay="0"/>
+                                          </p:stCondLst>
+                                        </p:cTn>
+                                        <p:tgtEl>
+                                          <p:spTgt spid="8">
+                                            <p:txEl>
+                                              <p:pRg st="7" end="7"/>
+                                            </p:txEl>
+                                          </p:spTgt>
+                                        </p:tgtEl>
+                                        <p:attrNameLst>
+                                          <p:attrName>style.visibility</p:attrName>
+                                        </p:attrNameLst>
+                                      </p:cBhvr>
+                                      <p:to>
+                                        <p:strVal val="visible"/>
+                                      </p:to>
+                                    </p:set>
+                                  </p:childTnLst>
+                                </p:cTn>
+                              </p:par>
+                              <p:par>
+                                <p:cTn id="13" presetID="1" presetClass="entr" presetSubtype="0" fill="hold" nodeType="withEffect">
+                                  <p:stCondLst>
+                                    <p:cond delay="0"/>
+                                  </p:stCondLst>
+                                  <p:childTnLst>
+                                    <p:set>
+                                      <p:cBhvr>
+                                        <p:cTn id="14" dur="1" fill="hold">
+                                          <p:stCondLst>
+                                            <p:cond delay="0"/>
+                                          </p:stCondLst>
+                                        </p:cTn>
+                                        <p:tgtEl>
+                                          <p:spTgt spid="8">
+                                            <p:txEl>
+                                              <p:pRg st="8" end="8"/>
+                                            </p:txEl>
+                                          </p:spTgt>
+                                        </p:tgtEl>
+                                        <p:attrNameLst>
+                                          <p:attrName>style.visibility</p:attrName>
+                                        </p:attrNameLst>
+                                      </p:cBhvr>
+                                      <p:to>
+                                        <p:strVal val="visible"/>
+                                      </p:to>
+                                    </p:set>
+                                  </p:childTnLst>
+                                </p:cTn>
+                              </p:par>
+                              <p:par>
+                                <p:cTn id="15" presetID="1" presetClass="entr" presetSubtype="0" fill="hold" nodeType="withEffect">
+                                  <p:stCondLst>
+                                    <p:cond delay="0"/>
+                                  </p:stCondLst>
+                                  <p:childTnLst>
+                                    <p:set>
+                                      <p:cBhvr>
+                                        <p:cTn id="16" dur="1" fill="hold">
+                                          <p:stCondLst>
+                                            <p:cond delay="0"/>
+                                          </p:stCondLst>
+                                        </p:cTn>
+                                        <p:tgtEl>
+                                          <p:spTgt spid="8">
+                                            <p:txEl>
+                                              <p:pRg st="9" end="9"/>
+                                            </p:txEl>
+                                          </p:spTgt>
+                                        </p:tgtEl>
+                                        <p:attrNameLst>
+                                          <p:attrName>style.visibility</p:attrName>
+                                        </p:attrNameLst>
+                                      </p:cBhvr>
+                                      <p:to>
+                                        <p:strVal val="visible"/>
+                                      </p:to>
+                                    </p:set>
+                                  </p:childTnLst>
+                                </p:cTn>
+                              </p:par>
+                            </p:childTnLst>
+                          </p:cTn>
+                        </p:par>
+                      </p:childTnLst>
+                    </p:cTn>
+                  </p:par>
+                  <p:par>
+                    <p:cTn id="17" fill="hold">
+                      <p:stCondLst>
+                        <p:cond delay="indefinite"/>
+                      </p:stCondLst>
+                      <p:childTnLst>
+                        <p:par>
+                          <p:cTn id="18" fill="hold">
+                            <p:stCondLst>
+                              <p:cond delay="0"/>
+                            </p:stCondLst>
+                            <p:childTnLst>
+                              <p:par>
+                                <p:cTn id="19" presetID="1" presetClass="entr" presetSubtype="0" fill="hold" nodeType="clickEffect">
+                                  <p:stCondLst>
+                                    <p:cond delay="0"/>
+                                  </p:stCondLst>
+                                  <p:childTnLst>
+                                    <p:set>
+                                      <p:cBhvr>
+                                        <p:cTn id="20" dur="1" fill="hold">
+                                          <p:stCondLst>
+                                            <p:cond delay="0"/>
+                                          </p:stCondLst>
+                                        </p:cTn>
+                                        <p:tgtEl>
+                                          <p:spTgt spid="8">
+                                            <p:txEl>
+                                              <p:pRg st="10" end="10"/>
+                                            </p:txEl>
+                                          </p:spTgt>
+                                        </p:tgtEl>
+                                        <p:attrNameLst>
+                                          <p:attrName>style.visibility</p:attrName>
+                                        </p:attrNameLst>
+                                      </p:cBhvr>
+                                      <p:to>
+                                        <p:strVal val="visible"/>
+                                      </p:to>
+                                    </p:set>
+                                  </p:childTnLst>
+                                </p:cTn>
+                              </p:par>
+                              <p:par>
+                                <p:cTn id="21" presetID="1" presetClass="entr" presetSubtype="0" fill="hold" nodeType="withEffect">
+                                  <p:stCondLst>
+                                    <p:cond delay="0"/>
+                                  </p:stCondLst>
+                                  <p:childTnLst>
+                                    <p:set>
+                                      <p:cBhvr>
+                                        <p:cTn id="22" dur="1" fill="hold">
+                                          <p:stCondLst>
+                                            <p:cond delay="0"/>
+                                          </p:stCondLst>
+                                        </p:cTn>
+                                        <p:tgtEl>
+                                          <p:spTgt spid="8">
+                                            <p:txEl>
+                                              <p:pRg st="11" end="11"/>
+                                            </p:txEl>
+                                          </p:spTgt>
+                                        </p:tgtEl>
+                                        <p:attrNameLst>
+                                          <p:attrName>style.visibility</p:attrName>
+                                        </p:attrNameLst>
+                                      </p:cBhvr>
+                                      <p:to>
+                                        <p:strVal val="visible"/>
+                                      </p:to>
+                                    </p:set>
+                                  </p:childTnLst>
+                                </p:cTn>
+                              </p:par>
+                            </p:childTnLst>
+                          </p:cTn>
+                        </p:par>
+                      </p:childTnLst>
+                    </p:cTn>
+                  </p:par>
+                  <p:par>
+                    <p:cTn id="23" fill="hold">
+                      <p:stCondLst>
+                        <p:cond delay="indefinite"/>
+                      </p:stCondLst>
+                      <p:childTnLst>
+                        <p:par>
+                          <p:cTn id="24" fill="hold">
+                            <p:stCondLst>
+                              <p:cond delay="0"/>
+                            </p:stCondLst>
+                            <p:childTnLst>
+                              <p:par>
+                                <p:cTn id="25" presetID="1" presetClass="entr" presetSubtype="0" fill="hold" grpId="0" nodeType="clickEffect">
+                                  <p:stCondLst>
+                                    <p:cond delay="0"/>
+                                  </p:stCondLst>
+                                  <p:childTnLst>
+                                    <p:set>
+                                      <p:cBhvr>
+                                        <p:cTn id="26" dur="1" fill="hold">
+                                          <p:stCondLst>
+                                            <p:cond delay="0"/>
+                                          </p:stCondLst>
+                                        </p:cTn>
+                                        <p:tgtEl>
+                                          <p:spTgt spid="13"/>
+                                        </p:tgtEl>
+                                        <p:attrNameLst>
+                                          <p:attrName>style.visibility</p:attrName>
+                                        </p:attrNameLst>
+                                      </p:cBhvr>
+                                      <p:to>
+                                        <p:strVal val="visible"/>
+                                      </p:to>
+                                    </p:set>
+                                  </p:childTnLst>
+                                </p:cTn>
+                              </p:par>
+                            </p:childTnLst>
+                          </p:cTn>
+                        </p:par>
+                      </p:childTnLst>
+                    </p:cTn>
+                  </p:par>
+                </p:childTnLst>
+              </p:cTn>
+              <p:prevCondLst>
+                <p:cond evt="onPrev" delay="0">
+                  <p:tgtEl>
+                    <p:sldTgt/>
+                  </p:tgtEl>
+                </p:cond>
+              </p:prevCondLst>
+              <p:nextCondLst>
+                <p:cond evt="onNext" delay="0">
+                  <p:tgtEl>
+                    <p:sldTgt/>
+                  </p:tgtEl>
+                </p:cond>
+              </p:nextCondLst>
+            </p:seq>
+          </p:childTnLst>
+        </p:cTn>
+      </p:par>
+    </p:tnLst>
+    <p:bldLst>
+      <p:bldP spid="13" grpId="0" animBg="1"/>
+    </p:bldLst>
+  </p:timing>
+</p:sld>
+</file>
+
+<file path=ppt/slides/slide6.xml><?xml version="1.0" encoding="utf-8"?>
+<p:sld xmlns:a="http://schemas.openxmlformats.org/drawingml/2006/main" xmlns:r="http://schemas.openxmlformats.org/officeDocument/2006/relationships" xmlns:p="http://schemas.openxmlformats.org/presentationml/2006/main">
+  <p:cSld>
+    <p:spTree>
+      <p:nvGrpSpPr>
+        <p:cNvPr id="1" name="">
+          <a:extLst>
+            <a:ext uri="{FF2B5EF4-FFF2-40B4-BE49-F238E27FC236}">
+              <a16:creationId xmlns:a16="http://schemas.microsoft.com/office/drawing/2014/main" id="{EE2116F0-85D6-E6C7-AE52-F7150FB0A5B3}"/>
+            </a:ext>
+          </a:extLst>
+        </p:cNvPr>
+        <p:cNvGrpSpPr/>
+        <p:nvPr/>
+      </p:nvGrpSpPr>
+      <p:grpSpPr>
+        <a:xfrm>
+          <a:off x="0" y="0"/>
+          <a:ext cx="0" cy="0"/>
+          <a:chOff x="0" y="0"/>
+          <a:chExt cx="0" cy="0"/>
+        </a:xfrm>
+      </p:grpSpPr>
+      <p:sp>
+        <p:nvSpPr>
+          <p:cNvPr id="8" name="Content Placeholder 5">
+            <a:extLst>
+              <a:ext uri="{FF2B5EF4-FFF2-40B4-BE49-F238E27FC236}">
+                <a16:creationId xmlns:a16="http://schemas.microsoft.com/office/drawing/2014/main" id="{D28E8E80-E5E0-A73E-5905-E85A34A23CA1}"/>
+              </a:ext>
+            </a:extLst>
+          </p:cNvPr>
+          <p:cNvSpPr>
+            <a:spLocks noGrp="1"/>
+          </p:cNvSpPr>
+          <p:nvPr>
+            <p:ph idx="1"/>
+          </p:nvPr>
+        </p:nvSpPr>
+        <p:spPr>
+          <a:xfrm>
+            <a:off x="587375" y="1187450"/>
+            <a:ext cx="8292856" cy="5521575"/>
+          </a:xfrm>
+        </p:spPr>
+        <p:txBody>
+          <a:bodyPr>
+            <a:normAutofit/>
+          </a:bodyPr>
+          <a:lstStyle/>
+          <a:p>
+            <a:pPr marL="347663" indent="-347663">
+              <a:spcBef>
+                <a:spcPts val="600"/>
+              </a:spcBef>
+              <a:buClr>
+                <a:schemeClr val="tx1">
+                  <a:lumMod val="90000"/>
+                  <a:lumOff val="10000"/>
+                </a:schemeClr>
+              </a:buClr>
+              <a:buSzPct val="100000"/>
+              <a:buFont typeface="Wingdings" panose="05000000000000000000" pitchFamily="2" charset="2"/>
+              <a:buChar char="§"/>
+              <a:defRPr/>
+            </a:pPr>
+            <a:r>
+              <a:rPr lang="en-US" dirty="0"/>
+              <a:t>Tic-Tac-Toe (n x n grid)</a:t>
+            </a:r>
+          </a:p>
+          <a:p>
+            <a:pPr marL="621983" lvl="1" indent="-347663">
+              <a:spcBef>
+                <a:spcPts val="600"/>
+              </a:spcBef>
+              <a:buClr>
+                <a:schemeClr val="tx1">
+                  <a:lumMod val="90000"/>
+                  <a:lumOff val="10000"/>
+                </a:schemeClr>
+              </a:buClr>
+              <a:buSzPct val="100000"/>
+              <a:buFont typeface="Wingdings" panose="05000000000000000000" pitchFamily="2" charset="2"/>
+              <a:buChar char="§"/>
+              <a:defRPr/>
+            </a:pPr>
+            <a:r>
+              <a:rPr lang="en-GB" dirty="0"/>
+              <a:t>0 / 1 / 2 </a:t>
+            </a:r>
+            <a:r>
+              <a:rPr lang="en-GB" dirty="0">
+                <a:sym typeface="Wingdings" panose="05000000000000000000" pitchFamily="2" charset="2"/>
+              </a:rPr>
+              <a:t></a:t>
+            </a:r>
+            <a:r>
+              <a:rPr lang="en-GB" dirty="0"/>
+              <a:t> empty, player 1, player 2</a:t>
+            </a:r>
+          </a:p>
+          <a:p>
+            <a:pPr marL="621983" lvl="1" indent="-347663">
+              <a:spcBef>
+                <a:spcPts val="600"/>
+              </a:spcBef>
+              <a:buClr>
+                <a:schemeClr val="tx1">
+                  <a:lumMod val="90000"/>
+                  <a:lumOff val="10000"/>
+                </a:schemeClr>
+              </a:buClr>
+              <a:buSzPct val="100000"/>
+              <a:buFont typeface="Wingdings" panose="05000000000000000000" pitchFamily="2" charset="2"/>
+              <a:buChar char="§"/>
+              <a:defRPr/>
+            </a:pPr>
+            <a:endParaRPr lang="en-GB" dirty="0"/>
+          </a:p>
+          <a:p>
+            <a:pPr marL="347663" indent="-347663">
+              <a:spcBef>
+                <a:spcPts val="600"/>
+              </a:spcBef>
+              <a:buClr>
+                <a:schemeClr val="tx1">
+                  <a:lumMod val="90000"/>
+                  <a:lumOff val="10000"/>
+                </a:schemeClr>
+              </a:buClr>
+              <a:buSzPct val="100000"/>
+              <a:buFont typeface="Wingdings" panose="05000000000000000000" pitchFamily="2" charset="2"/>
+              <a:buChar char="§"/>
+              <a:defRPr/>
+            </a:pPr>
+            <a:r>
+              <a:rPr lang="en-GB" dirty="0"/>
+              <a:t>How to know whether ANY player has won?</a:t>
+            </a:r>
+          </a:p>
+          <a:p>
+            <a:pPr marL="621983" lvl="1" indent="-347663">
+              <a:spcBef>
+                <a:spcPts val="600"/>
+              </a:spcBef>
+              <a:buClr>
+                <a:schemeClr val="tx1">
+                  <a:lumMod val="90000"/>
+                  <a:lumOff val="10000"/>
+                </a:schemeClr>
+              </a:buClr>
+              <a:buSzPct val="100000"/>
+              <a:buFont typeface="Wingdings" panose="05000000000000000000" pitchFamily="2" charset="2"/>
+              <a:buChar char="§"/>
+              <a:defRPr/>
+            </a:pPr>
+            <a:r>
+              <a:rPr lang="en-GB" dirty="0"/>
+              <a:t>Check whether player 1 has won and then check whether player 2 has won…, or</a:t>
+            </a:r>
+          </a:p>
+          <a:p>
+            <a:pPr marL="621983" lvl="1" indent="-347663">
+              <a:spcBef>
+                <a:spcPts val="600"/>
+              </a:spcBef>
+              <a:buClr>
+                <a:schemeClr val="tx1">
+                  <a:lumMod val="90000"/>
+                  <a:lumOff val="10000"/>
+                </a:schemeClr>
+              </a:buClr>
+              <a:buSzPct val="100000"/>
+              <a:buFont typeface="Wingdings" panose="05000000000000000000" pitchFamily="2" charset="2"/>
+              <a:buChar char="§"/>
+              <a:defRPr/>
+            </a:pPr>
+            <a:r>
+              <a:rPr lang="en-GB" dirty="0"/>
+              <a:t>Check whether player 1 and player 2 has won at the same time…</a:t>
+            </a:r>
+            <a:endParaRPr lang="en-US" dirty="0"/>
+          </a:p>
+          <a:p>
+            <a:pPr marL="347663" indent="-347663">
+              <a:spcBef>
+                <a:spcPts val="600"/>
+              </a:spcBef>
+              <a:buClr>
+                <a:schemeClr val="tx1">
+                  <a:lumMod val="90000"/>
+                  <a:lumOff val="10000"/>
+                </a:schemeClr>
+              </a:buClr>
+              <a:buSzPct val="100000"/>
+              <a:buFont typeface="Wingdings" panose="05000000000000000000" pitchFamily="2" charset="2"/>
+              <a:buChar char="§"/>
+              <a:defRPr/>
+            </a:pPr>
+            <a:endParaRPr lang="en-US" dirty="0"/>
+          </a:p>
+          <a:p>
+            <a:pPr marL="347663" indent="-347663">
+              <a:spcBef>
+                <a:spcPts val="600"/>
+              </a:spcBef>
+              <a:buClr>
+                <a:schemeClr val="tx1">
+                  <a:lumMod val="90000"/>
+                  <a:lumOff val="10000"/>
+                </a:schemeClr>
+              </a:buClr>
+              <a:buSzPct val="100000"/>
+              <a:buFont typeface="Wingdings" panose="05000000000000000000" pitchFamily="2" charset="2"/>
+              <a:buChar char="§"/>
+              <a:defRPr/>
+            </a:pPr>
+            <a:r>
+              <a:rPr lang="en-US" dirty="0"/>
+              <a:t>Does these two approaches differ in terms of time complexity?</a:t>
+            </a:r>
+          </a:p>
+          <a:p>
+            <a:pPr marL="621983" lvl="1" indent="-347663">
+              <a:spcBef>
+                <a:spcPts val="600"/>
+              </a:spcBef>
+              <a:buClr>
+                <a:schemeClr val="tx1">
+                  <a:lumMod val="90000"/>
+                  <a:lumOff val="10000"/>
+                </a:schemeClr>
+              </a:buClr>
+              <a:buSzPct val="100000"/>
+              <a:buFont typeface="Wingdings" panose="05000000000000000000" pitchFamily="2" charset="2"/>
+              <a:buChar char="§"/>
+              <a:defRPr/>
+            </a:pPr>
+            <a:r>
+              <a:rPr lang="en-US" dirty="0"/>
+              <a:t>Not really… </a:t>
+            </a:r>
+          </a:p>
+          <a:p>
+            <a:pPr marL="621983" lvl="1" indent="-347663">
+              <a:spcBef>
+                <a:spcPts val="600"/>
+              </a:spcBef>
+              <a:buClr>
+                <a:schemeClr val="tx1">
+                  <a:lumMod val="90000"/>
+                  <a:lumOff val="10000"/>
+                </a:schemeClr>
+              </a:buClr>
+              <a:buSzPct val="100000"/>
+              <a:buFont typeface="Wingdings" panose="05000000000000000000" pitchFamily="2" charset="2"/>
+              <a:buChar char="§"/>
+              <a:defRPr/>
+            </a:pPr>
+            <a:r>
+              <a:rPr lang="en-US" dirty="0"/>
+              <a:t>It </a:t>
+            </a:r>
+            <a:r>
+              <a:rPr lang="en-US"/>
+              <a:t>is often better </a:t>
+            </a:r>
+            <a:r>
+              <a:rPr lang="en-US" dirty="0"/>
+              <a:t>to focus on modularity / reusability</a:t>
+            </a:r>
+          </a:p>
+          <a:p>
+            <a:pPr marL="621983" lvl="1" indent="-347663">
+              <a:spcBef>
+                <a:spcPts val="600"/>
+              </a:spcBef>
+              <a:buClr>
+                <a:schemeClr val="tx1">
+                  <a:lumMod val="90000"/>
+                  <a:lumOff val="10000"/>
+                </a:schemeClr>
+              </a:buClr>
+              <a:buSzPct val="100000"/>
+              <a:buFont typeface="Wingdings" panose="05000000000000000000" pitchFamily="2" charset="2"/>
+              <a:buChar char="§"/>
+              <a:defRPr/>
+            </a:pPr>
+            <a:endParaRPr lang="en-US" dirty="0"/>
+          </a:p>
+          <a:p>
+            <a:pPr marL="274320" lvl="1" indent="0">
+              <a:spcBef>
+                <a:spcPts val="600"/>
+              </a:spcBef>
+              <a:buClr>
+                <a:schemeClr val="tx1">
+                  <a:lumMod val="90000"/>
+                  <a:lumOff val="10000"/>
+                </a:schemeClr>
+              </a:buClr>
+              <a:buSzPct val="100000"/>
+              <a:buNone/>
+              <a:defRPr/>
+            </a:pPr>
+            <a:endParaRPr lang="en-US" dirty="0"/>
+          </a:p>
+          <a:p>
+            <a:pPr marL="621983" lvl="1" indent="-347663">
+              <a:spcBef>
+                <a:spcPts val="600"/>
+              </a:spcBef>
+              <a:buClr>
+                <a:schemeClr val="tx1">
+                  <a:lumMod val="90000"/>
+                  <a:lumOff val="10000"/>
+                </a:schemeClr>
+              </a:buClr>
+              <a:buSzPct val="100000"/>
+              <a:buFont typeface="Wingdings" panose="05000000000000000000" pitchFamily="2" charset="2"/>
+              <a:buChar char="§"/>
+              <a:defRPr/>
+            </a:pPr>
+            <a:endParaRPr lang="en-US" dirty="0"/>
+          </a:p>
+          <a:p>
+            <a:pPr marL="0" indent="0">
+              <a:spcBef>
+                <a:spcPts val="600"/>
+              </a:spcBef>
+              <a:buClr>
+                <a:schemeClr val="tx1">
+                  <a:lumMod val="90000"/>
+                  <a:lumOff val="10000"/>
+                </a:schemeClr>
+              </a:buClr>
+              <a:buSzPct val="100000"/>
+              <a:buNone/>
+              <a:defRPr/>
+            </a:pPr>
+            <a:endParaRPr lang="en-US" dirty="0"/>
+          </a:p>
+          <a:p>
+            <a:pPr marL="347663" indent="-347663">
+              <a:spcBef>
+                <a:spcPts val="600"/>
+              </a:spcBef>
+              <a:buClr>
+                <a:schemeClr val="tx1">
+                  <a:lumMod val="90000"/>
+                  <a:lumOff val="10000"/>
+                </a:schemeClr>
+              </a:buClr>
+              <a:buSzPct val="100000"/>
+              <a:buFont typeface="Wingdings" panose="05000000000000000000" pitchFamily="2" charset="2"/>
+              <a:buChar char="§"/>
+              <a:defRPr/>
+            </a:pPr>
+            <a:endParaRPr lang="en-US" sz="2400" dirty="0"/>
+          </a:p>
+          <a:p>
+            <a:pPr marL="347663" indent="-347663">
+              <a:spcBef>
+                <a:spcPts val="600"/>
+              </a:spcBef>
+              <a:buClr>
+                <a:schemeClr val="tx1">
+                  <a:lumMod val="90000"/>
+                  <a:lumOff val="10000"/>
+                </a:schemeClr>
+              </a:buClr>
+              <a:buSzPct val="100000"/>
+              <a:buFont typeface="Wingdings" panose="05000000000000000000" pitchFamily="2" charset="2"/>
+              <a:buChar char="§"/>
+              <a:defRPr/>
+            </a:pPr>
+            <a:endParaRPr lang="en-US" sz="2800" dirty="0"/>
+          </a:p>
+        </p:txBody>
+      </p:sp>
+      <p:sp>
+        <p:nvSpPr>
+          <p:cNvPr id="14338" name="Rectangle 2">
+            <a:extLst>
+              <a:ext uri="{FF2B5EF4-FFF2-40B4-BE49-F238E27FC236}">
+                <a16:creationId xmlns:a16="http://schemas.microsoft.com/office/drawing/2014/main" id="{F4CC78EB-6189-1B7B-21D8-B2F5EC76C427}"/>
+              </a:ext>
+            </a:extLst>
+          </p:cNvPr>
+          <p:cNvSpPr>
+            <a:spLocks noGrp="1" noChangeArrowheads="1"/>
+          </p:cNvSpPr>
+          <p:nvPr>
+            <p:ph type="title"/>
+          </p:nvPr>
+        </p:nvSpPr>
+        <p:spPr>
+          <a:xfrm>
+            <a:off x="533400" y="381000"/>
+            <a:ext cx="8382000" cy="838200"/>
+          </a:xfrm>
+        </p:spPr>
+        <p:txBody>
+          <a:bodyPr>
+            <a:normAutofit/>
+          </a:bodyPr>
+          <a:lstStyle/>
+          <a:p>
+            <a:pPr eaLnBrk="1" hangingPunct="1"/>
+            <a:r>
+              <a:rPr lang="en-GB" sz="3600" dirty="0">
+                <a:solidFill>
+                  <a:srgbClr val="0000FF"/>
+                </a:solidFill>
+              </a:rPr>
+              <a:t>Problem Solving with 2D arrays</a:t>
+            </a:r>
+          </a:p>
+        </p:txBody>
+      </p:sp>
+      <p:sp>
+        <p:nvSpPr>
+          <p:cNvPr id="7" name="Slide Number Placeholder 6">
+            <a:extLst>
+              <a:ext uri="{FF2B5EF4-FFF2-40B4-BE49-F238E27FC236}">
+                <a16:creationId xmlns:a16="http://schemas.microsoft.com/office/drawing/2014/main" id="{58D2B955-0D60-39E6-1EFC-E8A33B3CD391}"/>
+              </a:ext>
+            </a:extLst>
+          </p:cNvPr>
+          <p:cNvSpPr>
+            <a:spLocks noGrp="1"/>
+          </p:cNvSpPr>
+          <p:nvPr>
+            <p:ph type="sldNum" sz="quarter" idx="12"/>
+          </p:nvPr>
+        </p:nvSpPr>
+        <p:spPr/>
+        <p:txBody>
+          <a:bodyPr>
+            <a:normAutofit/>
+          </a:bodyPr>
+          <a:lstStyle/>
+          <a:p>
+            <a:pPr>
+              <a:defRPr/>
+            </a:pPr>
+            <a:r>
+              <a:rPr lang="en-US" dirty="0"/>
+              <a:t>Week9R - </a:t>
+            </a:r>
+            <a:fld id="{2E4790E1-2590-4AEE-892D-AB46A7688113}" type="slidenum">
+              <a:rPr lang="en-US" smtClean="0"/>
+              <a:pPr>
+                <a:defRPr/>
+              </a:pPr>
+              <a:t>6</a:t>
+            </a:fld>
+            <a:endParaRPr lang="en-US" dirty="0"/>
+          </a:p>
+        </p:txBody>
+      </p:sp>
+      <p:sp>
+        <p:nvSpPr>
+          <p:cNvPr id="2" name="Footer Placeholder 1">
+            <a:extLst>
+              <a:ext uri="{FF2B5EF4-FFF2-40B4-BE49-F238E27FC236}">
+                <a16:creationId xmlns:a16="http://schemas.microsoft.com/office/drawing/2014/main" id="{A4565254-60A9-2022-AFBD-1217E23ABEFF}"/>
+              </a:ext>
+            </a:extLst>
+          </p:cNvPr>
+          <p:cNvSpPr>
+            <a:spLocks noGrp="1"/>
+          </p:cNvSpPr>
+          <p:nvPr>
+            <p:ph type="ftr" sz="quarter" idx="11"/>
+          </p:nvPr>
+        </p:nvSpPr>
+        <p:spPr/>
+        <p:txBody>
+          <a:bodyPr/>
+          <a:lstStyle/>
+          <a:p>
+            <a:pPr algn="l">
+              <a:defRPr/>
+            </a:pPr>
+            <a:r>
+              <a:rPr lang="en-US"/>
+              <a:t>CS1010: Programming Methodology</a:t>
+            </a:r>
+            <a:endParaRPr lang="en-US" dirty="0"/>
+          </a:p>
+        </p:txBody>
+      </p:sp>
+      <p:sp>
+        <p:nvSpPr>
+          <p:cNvPr id="3" name="Rectangle 2">
+            <a:extLst>
+              <a:ext uri="{FF2B5EF4-FFF2-40B4-BE49-F238E27FC236}">
+                <a16:creationId xmlns:a16="http://schemas.microsoft.com/office/drawing/2014/main" id="{5EF3CD50-4674-9E26-8E13-3A24E2D2C2C4}"/>
+              </a:ext>
+            </a:extLst>
+          </p:cNvPr>
+          <p:cNvSpPr/>
+          <p:nvPr/>
+        </p:nvSpPr>
+        <p:spPr>
+          <a:xfrm>
+            <a:off x="7109495" y="1342211"/>
+            <a:ext cx="462337" cy="452063"/>
+          </a:xfrm>
+          <a:prstGeom prst="rect">
+            <a:avLst/>
+          </a:prstGeom>
+          <a:noFill/>
+        </p:spPr>
+        <p:style>
+          <a:lnRef idx="2">
+            <a:schemeClr val="accent1">
+              <a:shade val="50000"/>
+            </a:schemeClr>
+          </a:lnRef>
+          <a:fillRef idx="1">
+            <a:schemeClr val="accent1"/>
+          </a:fillRef>
+          <a:effectRef idx="0">
+            <a:schemeClr val="accent1"/>
+          </a:effectRef>
+          <a:fontRef idx="minor">
+            <a:schemeClr val="lt1"/>
+          </a:fontRef>
+        </p:style>
+        <p:txBody>
+          <a:bodyPr rtlCol="0" anchor="ctr"/>
+          <a:lstStyle/>
+          <a:p>
+            <a:pPr algn="ctr"/>
+            <a:r>
+              <a:rPr lang="en-US" dirty="0">
+                <a:ln w="0"/>
+                <a:solidFill>
+                  <a:schemeClr val="tx1"/>
+                </a:solidFill>
+                <a:effectLst>
+                  <a:outerShdw blurRad="38100" dist="19050" dir="2700000" algn="tl" rotWithShape="0">
+                    <a:schemeClr val="dk1">
+                      <a:alpha val="40000"/>
+                    </a:schemeClr>
+                  </a:outerShdw>
+                </a:effectLst>
+              </a:rPr>
+              <a:t>1</a:t>
+            </a:r>
+          </a:p>
+        </p:txBody>
+      </p:sp>
+      <p:sp>
+        <p:nvSpPr>
+          <p:cNvPr id="4" name="Rectangle 3">
+            <a:extLst>
+              <a:ext uri="{FF2B5EF4-FFF2-40B4-BE49-F238E27FC236}">
+                <a16:creationId xmlns:a16="http://schemas.microsoft.com/office/drawing/2014/main" id="{22DB351D-D07C-14D7-1289-E180A12120E0}"/>
+              </a:ext>
+            </a:extLst>
+          </p:cNvPr>
+          <p:cNvSpPr/>
+          <p:nvPr/>
+        </p:nvSpPr>
+        <p:spPr>
+          <a:xfrm>
+            <a:off x="7109494" y="1794274"/>
+            <a:ext cx="462337" cy="452063"/>
+          </a:xfrm>
+          <a:prstGeom prst="rect">
+            <a:avLst/>
+          </a:prstGeom>
+          <a:noFill/>
+        </p:spPr>
+        <p:style>
+          <a:lnRef idx="2">
+            <a:schemeClr val="accent1">
+              <a:shade val="50000"/>
+            </a:schemeClr>
+          </a:lnRef>
+          <a:fillRef idx="1">
+            <a:schemeClr val="accent1"/>
+          </a:fillRef>
+          <a:effectRef idx="0">
+            <a:schemeClr val="accent1"/>
+          </a:effectRef>
+          <a:fontRef idx="minor">
+            <a:schemeClr val="lt1"/>
+          </a:fontRef>
+        </p:style>
+        <p:txBody>
+          <a:bodyPr rtlCol="0" anchor="ctr"/>
+          <a:lstStyle/>
+          <a:p>
+            <a:pPr algn="ctr"/>
+            <a:r>
+              <a:rPr lang="en-US" dirty="0">
+                <a:ln w="0"/>
+                <a:solidFill>
+                  <a:schemeClr val="tx1"/>
+                </a:solidFill>
+                <a:effectLst>
+                  <a:outerShdw blurRad="38100" dist="19050" dir="2700000" algn="tl" rotWithShape="0">
+                    <a:schemeClr val="dk1">
+                      <a:alpha val="40000"/>
+                    </a:schemeClr>
+                  </a:outerShdw>
+                </a:effectLst>
+              </a:rPr>
+              <a:t>0</a:t>
+            </a:r>
+          </a:p>
+        </p:txBody>
+      </p:sp>
+      <p:sp>
+        <p:nvSpPr>
+          <p:cNvPr id="5" name="Rectangle 4">
+            <a:extLst>
+              <a:ext uri="{FF2B5EF4-FFF2-40B4-BE49-F238E27FC236}">
+                <a16:creationId xmlns:a16="http://schemas.microsoft.com/office/drawing/2014/main" id="{DFA9EC8E-C724-ED5F-1F0A-F223E5454889}"/>
+              </a:ext>
+            </a:extLst>
+          </p:cNvPr>
+          <p:cNvSpPr/>
+          <p:nvPr/>
+        </p:nvSpPr>
+        <p:spPr>
+          <a:xfrm>
+            <a:off x="7571831" y="1794274"/>
+            <a:ext cx="462337" cy="452063"/>
+          </a:xfrm>
+          <a:prstGeom prst="rect">
+            <a:avLst/>
+          </a:prstGeom>
+          <a:noFill/>
+        </p:spPr>
+        <p:style>
+          <a:lnRef idx="2">
+            <a:schemeClr val="accent1">
+              <a:shade val="50000"/>
+            </a:schemeClr>
+          </a:lnRef>
+          <a:fillRef idx="1">
+            <a:schemeClr val="accent1"/>
+          </a:fillRef>
+          <a:effectRef idx="0">
+            <a:schemeClr val="accent1"/>
+          </a:effectRef>
+          <a:fontRef idx="minor">
+            <a:schemeClr val="lt1"/>
+          </a:fontRef>
+        </p:style>
+        <p:txBody>
+          <a:bodyPr rtlCol="0" anchor="ctr"/>
+          <a:lstStyle/>
+          <a:p>
+            <a:pPr algn="ctr"/>
+            <a:r>
+              <a:rPr lang="en-US" dirty="0">
+                <a:ln w="0"/>
+                <a:solidFill>
+                  <a:schemeClr val="tx1"/>
+                </a:solidFill>
+                <a:effectLst>
+                  <a:outerShdw blurRad="38100" dist="19050" dir="2700000" algn="tl" rotWithShape="0">
+                    <a:schemeClr val="dk1">
+                      <a:alpha val="40000"/>
+                    </a:schemeClr>
+                  </a:outerShdw>
+                </a:effectLst>
+              </a:rPr>
+              <a:t>1</a:t>
+            </a:r>
+          </a:p>
+        </p:txBody>
+      </p:sp>
+      <p:sp>
+        <p:nvSpPr>
+          <p:cNvPr id="6" name="Rectangle 5">
+            <a:extLst>
+              <a:ext uri="{FF2B5EF4-FFF2-40B4-BE49-F238E27FC236}">
+                <a16:creationId xmlns:a16="http://schemas.microsoft.com/office/drawing/2014/main" id="{20DC4CB9-D37C-74FA-BB07-39BB10C12542}"/>
+              </a:ext>
+            </a:extLst>
+          </p:cNvPr>
+          <p:cNvSpPr/>
+          <p:nvPr/>
+        </p:nvSpPr>
+        <p:spPr>
+          <a:xfrm>
+            <a:off x="7109494" y="2246337"/>
+            <a:ext cx="462337" cy="452063"/>
+          </a:xfrm>
+          <a:prstGeom prst="rect">
+            <a:avLst/>
+          </a:prstGeom>
+          <a:noFill/>
+        </p:spPr>
+        <p:style>
+          <a:lnRef idx="2">
+            <a:schemeClr val="accent1">
+              <a:shade val="50000"/>
+            </a:schemeClr>
+          </a:lnRef>
+          <a:fillRef idx="1">
+            <a:schemeClr val="accent1"/>
+          </a:fillRef>
+          <a:effectRef idx="0">
+            <a:schemeClr val="accent1"/>
+          </a:effectRef>
+          <a:fontRef idx="minor">
+            <a:schemeClr val="lt1"/>
+          </a:fontRef>
+        </p:style>
+        <p:txBody>
+          <a:bodyPr rtlCol="0" anchor="ctr"/>
+          <a:lstStyle/>
+          <a:p>
+            <a:pPr algn="ctr"/>
+            <a:r>
+              <a:rPr lang="en-US" dirty="0">
+                <a:ln w="0"/>
+                <a:solidFill>
+                  <a:schemeClr val="tx1"/>
+                </a:solidFill>
+                <a:effectLst>
+                  <a:outerShdw blurRad="38100" dist="19050" dir="2700000" algn="tl" rotWithShape="0">
+                    <a:schemeClr val="dk1">
+                      <a:alpha val="40000"/>
+                    </a:schemeClr>
+                  </a:outerShdw>
+                </a:effectLst>
+              </a:rPr>
+              <a:t>2</a:t>
+            </a:r>
+          </a:p>
+        </p:txBody>
+      </p:sp>
+      <p:sp>
+        <p:nvSpPr>
+          <p:cNvPr id="9" name="Rectangle 8">
+            <a:extLst>
+              <a:ext uri="{FF2B5EF4-FFF2-40B4-BE49-F238E27FC236}">
+                <a16:creationId xmlns:a16="http://schemas.microsoft.com/office/drawing/2014/main" id="{6E81FAFB-B2DD-FF6C-8950-995850455E68}"/>
+              </a:ext>
+            </a:extLst>
+          </p:cNvPr>
+          <p:cNvSpPr/>
+          <p:nvPr/>
+        </p:nvSpPr>
+        <p:spPr>
+          <a:xfrm>
+            <a:off x="7571830" y="2246337"/>
+            <a:ext cx="462337" cy="452063"/>
+          </a:xfrm>
+          <a:prstGeom prst="rect">
+            <a:avLst/>
+          </a:prstGeom>
+          <a:noFill/>
+        </p:spPr>
+        <p:style>
+          <a:lnRef idx="2">
+            <a:schemeClr val="accent1">
+              <a:shade val="50000"/>
+            </a:schemeClr>
+          </a:lnRef>
+          <a:fillRef idx="1">
+            <a:schemeClr val="accent1"/>
+          </a:fillRef>
+          <a:effectRef idx="0">
+            <a:schemeClr val="accent1"/>
+          </a:effectRef>
+          <a:fontRef idx="minor">
+            <a:schemeClr val="lt1"/>
+          </a:fontRef>
+        </p:style>
+        <p:txBody>
+          <a:bodyPr rtlCol="0" anchor="ctr"/>
+          <a:lstStyle/>
+          <a:p>
+            <a:pPr algn="ctr"/>
+            <a:r>
+              <a:rPr lang="en-US" dirty="0">
+                <a:ln w="0"/>
+                <a:solidFill>
+                  <a:schemeClr val="tx1"/>
+                </a:solidFill>
+                <a:effectLst>
+                  <a:outerShdw blurRad="38100" dist="19050" dir="2700000" algn="tl" rotWithShape="0">
+                    <a:schemeClr val="dk1">
+                      <a:alpha val="40000"/>
+                    </a:schemeClr>
+                  </a:outerShdw>
+                </a:effectLst>
+              </a:rPr>
+              <a:t>2</a:t>
+            </a:r>
+          </a:p>
+        </p:txBody>
+      </p:sp>
+      <p:sp>
+        <p:nvSpPr>
+          <p:cNvPr id="10" name="Rectangle 9">
+            <a:extLst>
+              <a:ext uri="{FF2B5EF4-FFF2-40B4-BE49-F238E27FC236}">
+                <a16:creationId xmlns:a16="http://schemas.microsoft.com/office/drawing/2014/main" id="{AE6DB3E2-E770-09B3-E9FF-6D609CF1F2E5}"/>
+              </a:ext>
+            </a:extLst>
+          </p:cNvPr>
+          <p:cNvSpPr/>
+          <p:nvPr/>
+        </p:nvSpPr>
+        <p:spPr>
+          <a:xfrm>
+            <a:off x="8034167" y="2246337"/>
+            <a:ext cx="462337" cy="452063"/>
+          </a:xfrm>
+          <a:prstGeom prst="rect">
+            <a:avLst/>
+          </a:prstGeom>
+          <a:noFill/>
+        </p:spPr>
+        <p:style>
+          <a:lnRef idx="2">
+            <a:schemeClr val="accent1">
+              <a:shade val="50000"/>
+            </a:schemeClr>
+          </a:lnRef>
+          <a:fillRef idx="1">
+            <a:schemeClr val="accent1"/>
+          </a:fillRef>
+          <a:effectRef idx="0">
+            <a:schemeClr val="accent1"/>
+          </a:effectRef>
+          <a:fontRef idx="minor">
+            <a:schemeClr val="lt1"/>
+          </a:fontRef>
+        </p:style>
+        <p:txBody>
+          <a:bodyPr rtlCol="0" anchor="ctr"/>
+          <a:lstStyle/>
+          <a:p>
+            <a:pPr algn="ctr"/>
+            <a:r>
+              <a:rPr lang="en-US" dirty="0">
+                <a:ln w="0"/>
+                <a:solidFill>
+                  <a:schemeClr val="tx1"/>
+                </a:solidFill>
+                <a:effectLst>
+                  <a:outerShdw blurRad="38100" dist="19050" dir="2700000" algn="tl" rotWithShape="0">
+                    <a:schemeClr val="dk1">
+                      <a:alpha val="40000"/>
+                    </a:schemeClr>
+                  </a:outerShdw>
+                </a:effectLst>
+              </a:rPr>
+              <a:t>2</a:t>
+            </a:r>
+          </a:p>
+        </p:txBody>
+      </p:sp>
+      <p:sp>
+        <p:nvSpPr>
+          <p:cNvPr id="11" name="Rectangle 10">
+            <a:extLst>
+              <a:ext uri="{FF2B5EF4-FFF2-40B4-BE49-F238E27FC236}">
+                <a16:creationId xmlns:a16="http://schemas.microsoft.com/office/drawing/2014/main" id="{034098CE-D45C-A82E-EB17-F44BDCFFFE0D}"/>
+              </a:ext>
+            </a:extLst>
+          </p:cNvPr>
+          <p:cNvSpPr/>
+          <p:nvPr/>
+        </p:nvSpPr>
+        <p:spPr>
+          <a:xfrm>
+            <a:off x="7569700" y="1342210"/>
+            <a:ext cx="462337" cy="452063"/>
+          </a:xfrm>
+          <a:prstGeom prst="rect">
+            <a:avLst/>
+          </a:prstGeom>
+          <a:noFill/>
+        </p:spPr>
+        <p:style>
+          <a:lnRef idx="2">
+            <a:schemeClr val="accent1">
+              <a:shade val="50000"/>
+            </a:schemeClr>
+          </a:lnRef>
+          <a:fillRef idx="1">
+            <a:schemeClr val="accent1"/>
+          </a:fillRef>
+          <a:effectRef idx="0">
+            <a:schemeClr val="accent1"/>
+          </a:effectRef>
+          <a:fontRef idx="minor">
+            <a:schemeClr val="lt1"/>
+          </a:fontRef>
+        </p:style>
+        <p:txBody>
+          <a:bodyPr rtlCol="0" anchor="ctr"/>
+          <a:lstStyle/>
+          <a:p>
+            <a:pPr algn="ctr"/>
+            <a:r>
+              <a:rPr lang="en-US" dirty="0">
+                <a:ln w="0"/>
+                <a:solidFill>
+                  <a:schemeClr val="tx1"/>
+                </a:solidFill>
+                <a:effectLst>
+                  <a:outerShdw blurRad="38100" dist="19050" dir="2700000" algn="tl" rotWithShape="0">
+                    <a:schemeClr val="dk1">
+                      <a:alpha val="40000"/>
+                    </a:schemeClr>
+                  </a:outerShdw>
+                </a:effectLst>
+              </a:rPr>
+              <a:t>0</a:t>
+            </a:r>
+          </a:p>
+        </p:txBody>
+      </p:sp>
+      <p:sp>
+        <p:nvSpPr>
+          <p:cNvPr id="14" name="Rectangle 13">
+            <a:extLst>
+              <a:ext uri="{FF2B5EF4-FFF2-40B4-BE49-F238E27FC236}">
+                <a16:creationId xmlns:a16="http://schemas.microsoft.com/office/drawing/2014/main" id="{6D05636F-4668-2FDB-504C-007AA263E29A}"/>
+              </a:ext>
+            </a:extLst>
+          </p:cNvPr>
+          <p:cNvSpPr/>
+          <p:nvPr/>
+        </p:nvSpPr>
+        <p:spPr>
+          <a:xfrm>
+            <a:off x="8029855" y="1342209"/>
+            <a:ext cx="462337" cy="452063"/>
+          </a:xfrm>
+          <a:prstGeom prst="rect">
+            <a:avLst/>
+          </a:prstGeom>
+          <a:noFill/>
+        </p:spPr>
+        <p:style>
+          <a:lnRef idx="2">
+            <a:schemeClr val="accent1">
+              <a:shade val="50000"/>
+            </a:schemeClr>
+          </a:lnRef>
+          <a:fillRef idx="1">
+            <a:schemeClr val="accent1"/>
+          </a:fillRef>
+          <a:effectRef idx="0">
+            <a:schemeClr val="accent1"/>
+          </a:effectRef>
+          <a:fontRef idx="minor">
+            <a:schemeClr val="lt1"/>
+          </a:fontRef>
+        </p:style>
+        <p:txBody>
+          <a:bodyPr rtlCol="0" anchor="ctr"/>
+          <a:lstStyle/>
+          <a:p>
+            <a:pPr algn="ctr"/>
+            <a:r>
+              <a:rPr lang="en-US" dirty="0">
+                <a:ln w="0"/>
+                <a:solidFill>
+                  <a:schemeClr val="tx1"/>
+                </a:solidFill>
+                <a:effectLst>
+                  <a:outerShdw blurRad="38100" dist="19050" dir="2700000" algn="tl" rotWithShape="0">
+                    <a:schemeClr val="dk1">
+                      <a:alpha val="40000"/>
+                    </a:schemeClr>
+                  </a:outerShdw>
+                </a:effectLst>
+              </a:rPr>
+              <a:t>2</a:t>
+            </a:r>
+          </a:p>
+        </p:txBody>
+      </p:sp>
+      <p:sp>
+        <p:nvSpPr>
+          <p:cNvPr id="15" name="Rectangle 14">
+            <a:extLst>
+              <a:ext uri="{FF2B5EF4-FFF2-40B4-BE49-F238E27FC236}">
+                <a16:creationId xmlns:a16="http://schemas.microsoft.com/office/drawing/2014/main" id="{4B7F66B2-7DD3-EC62-8CC7-E08983213D27}"/>
+              </a:ext>
+            </a:extLst>
+          </p:cNvPr>
+          <p:cNvSpPr/>
+          <p:nvPr/>
+        </p:nvSpPr>
+        <p:spPr>
+          <a:xfrm>
+            <a:off x="8029854" y="1799056"/>
+            <a:ext cx="462337" cy="452063"/>
+          </a:xfrm>
+          <a:prstGeom prst="rect">
+            <a:avLst/>
+          </a:prstGeom>
+          <a:noFill/>
+        </p:spPr>
+        <p:style>
+          <a:lnRef idx="2">
+            <a:schemeClr val="accent1">
+              <a:shade val="50000"/>
+            </a:schemeClr>
+          </a:lnRef>
+          <a:fillRef idx="1">
+            <a:schemeClr val="accent1"/>
+          </a:fillRef>
+          <a:effectRef idx="0">
+            <a:schemeClr val="accent1"/>
+          </a:effectRef>
+          <a:fontRef idx="minor">
+            <a:schemeClr val="lt1"/>
+          </a:fontRef>
+        </p:style>
+        <p:txBody>
+          <a:bodyPr rtlCol="0" anchor="ctr"/>
+          <a:lstStyle/>
+          <a:p>
+            <a:pPr algn="ctr"/>
+            <a:r>
+              <a:rPr lang="en-US" dirty="0">
+                <a:ln w="0"/>
+                <a:solidFill>
+                  <a:schemeClr val="tx1"/>
+                </a:solidFill>
+                <a:effectLst>
+                  <a:outerShdw blurRad="38100" dist="19050" dir="2700000" algn="tl" rotWithShape="0">
+                    <a:schemeClr val="dk1">
+                      <a:alpha val="40000"/>
+                    </a:schemeClr>
+                  </a:outerShdw>
+                </a:effectLst>
+              </a:rPr>
+              <a:t>1</a:t>
+            </a:r>
+          </a:p>
+        </p:txBody>
+      </p:sp>
+      <p:sp>
+        <p:nvSpPr>
+          <p:cNvPr id="12" name="Date Placeholder 11">
+            <a:extLst>
+              <a:ext uri="{FF2B5EF4-FFF2-40B4-BE49-F238E27FC236}">
+                <a16:creationId xmlns:a16="http://schemas.microsoft.com/office/drawing/2014/main" id="{52037EA7-25AA-E60D-22AB-24DB3B19B589}"/>
+              </a:ext>
+            </a:extLst>
+          </p:cNvPr>
+          <p:cNvSpPr>
+            <a:spLocks noGrp="1"/>
+          </p:cNvSpPr>
+          <p:nvPr>
+            <p:ph type="dt" sz="half" idx="10"/>
+          </p:nvPr>
+        </p:nvSpPr>
+        <p:spPr/>
+        <p:txBody>
+          <a:bodyPr/>
+          <a:lstStyle/>
+          <a:p>
+            <a:pPr>
+              <a:defRPr/>
+            </a:pPr>
+            <a:r>
+              <a:rPr lang="en-US"/>
+              <a:t>© NUS</a:t>
+            </a:r>
+          </a:p>
+        </p:txBody>
+      </p:sp>
+    </p:spTree>
+    <p:extLst>
+      <p:ext uri="{BB962C8B-B14F-4D97-AF65-F5344CB8AC3E}">
+        <p14:creationId xmlns:p14="http://schemas.microsoft.com/office/powerpoint/2010/main" val="281145632"/>
+      </p:ext>
+    </p:extLst>
+  </p:cSld>
+  <p:clrMapOvr>
+    <a:masterClrMapping/>
+  </p:clrMapOvr>
+  <p:transition>
+    <p:fade/>
+  </p:transition>
+  <p:timing>
+    <p:tnLst>
+      <p:par>
+        <p:cTn id="1" dur="indefinite" restart="never" nodeType="tmRoot">
+          <p:childTnLst>
+            <p:seq concurrent="1" nextAc="seek">
+              <p:cTn id="2" dur="indefinite" nodeType="mainSeq">
+                <p:childTnLst>
+                  <p:par>
+                    <p:cTn id="3" fill="hold">
+                      <p:stCondLst>
+                        <p:cond delay="indefinite"/>
+                      </p:stCondLst>
+                      <p:childTnLst>
+                        <p:par>
+                          <p:cTn id="4" fill="hold">
+                            <p:stCondLst>
+                              <p:cond delay="0"/>
+                            </p:stCondLst>
+                            <p:childTnLst>
+                              <p:par>
+                                <p:cTn id="5" presetID="1" presetClass="entr" presetSubtype="0" fill="hold" nodeType="clickEffect">
+                                  <p:stCondLst>
+                                    <p:cond delay="0"/>
+                                  </p:stCondLst>
+                                  <p:childTnLst>
+                                    <p:set>
+                                      <p:cBhvr>
+                                        <p:cTn id="6" dur="1" fill="hold">
+                                          <p:stCondLst>
+                                            <p:cond delay="0"/>
+                                          </p:stCondLst>
+                                        </p:cTn>
+                                        <p:tgtEl>
+                                          <p:spTgt spid="8">
+                                            <p:txEl>
+                                              <p:pRg st="4" end="4"/>
+                                            </p:txEl>
+                                          </p:spTgt>
+                                        </p:tgtEl>
+                                        <p:attrNameLst>
+                                          <p:attrName>style.visibility</p:attrName>
+                                        </p:attrNameLst>
+                                      </p:cBhvr>
+                                      <p:to>
+                                        <p:strVal val="visible"/>
+                                      </p:to>
+                                    </p:set>
+                                  </p:childTnLst>
+                                </p:cTn>
+                              </p:par>
+                            </p:childTnLst>
+                          </p:cTn>
+                        </p:par>
+                      </p:childTnLst>
+                    </p:cTn>
+                  </p:par>
+                  <p:par>
+                    <p:cTn id="7" fill="hold">
+                      <p:stCondLst>
+                        <p:cond delay="indefinite"/>
+                      </p:stCondLst>
+                      <p:childTnLst>
+                        <p:par>
+                          <p:cTn id="8" fill="hold">
+                            <p:stCondLst>
+                              <p:cond delay="0"/>
+                            </p:stCondLst>
+                            <p:childTnLst>
+                              <p:par>
+                                <p:cTn id="9" presetID="1" presetClass="entr" presetSubtype="0" fill="hold" nodeType="clickEffect">
+                                  <p:stCondLst>
+                                    <p:cond delay="0"/>
+                                  </p:stCondLst>
+                                  <p:childTnLst>
+                                    <p:set>
+                                      <p:cBhvr>
+                                        <p:cTn id="10" dur="1" fill="hold">
+                                          <p:stCondLst>
+                                            <p:cond delay="0"/>
+                                          </p:stCondLst>
+                                        </p:cTn>
+                                        <p:tgtEl>
+                                          <p:spTgt spid="8">
+                                            <p:txEl>
+                                              <p:pRg st="5" end="5"/>
+                                            </p:txEl>
+                                          </p:spTgt>
+                                        </p:tgtEl>
+                                        <p:attrNameLst>
+                                          <p:attrName>style.visibility</p:attrName>
+                                        </p:attrNameLst>
+                                      </p:cBhvr>
+                                      <p:to>
+                                        <p:strVal val="visible"/>
+                                      </p:to>
+                                    </p:set>
+                                  </p:childTnLst>
+                                </p:cTn>
+                              </p:par>
+                            </p:childTnLst>
+                          </p:cTn>
+                        </p:par>
+                      </p:childTnLst>
+                    </p:cTn>
+                  </p:par>
+                  <p:par>
+                    <p:cTn id="11" fill="hold">
+                      <p:stCondLst>
+                        <p:cond delay="indefinite"/>
+                      </p:stCondLst>
+                      <p:childTnLst>
+                        <p:par>
+                          <p:cTn id="12" fill="hold">
+                            <p:stCondLst>
+                              <p:cond delay="0"/>
+                            </p:stCondLst>
+                            <p:childTnLst>
+                              <p:par>
+                                <p:cTn id="13" presetID="1" presetClass="entr" presetSubtype="0" fill="hold" nodeType="clickEffect">
+                                  <p:stCondLst>
+                                    <p:cond delay="0"/>
+                                  </p:stCondLst>
+                                  <p:childTnLst>
+                                    <p:set>
+                                      <p:cBhvr>
+                                        <p:cTn id="14" dur="1" fill="hold">
+                                          <p:stCondLst>
+                                            <p:cond delay="0"/>
+                                          </p:stCondLst>
+                                        </p:cTn>
+                                        <p:tgtEl>
+                                          <p:spTgt spid="8">
+                                            <p:txEl>
+                                              <p:pRg st="8" end="8"/>
+                                            </p:txEl>
+                                          </p:spTgt>
+                                        </p:tgtEl>
+                                        <p:attrNameLst>
+                                          <p:attrName>style.visibility</p:attrName>
+                                        </p:attrNameLst>
+                                      </p:cBhvr>
+                                      <p:to>
+                                        <p:strVal val="visible"/>
+                                      </p:to>
+                                    </p:set>
+                                  </p:childTnLst>
+                                </p:cTn>
+                              </p:par>
+                            </p:childTnLst>
+                          </p:cTn>
+                        </p:par>
+                      </p:childTnLst>
+                    </p:cTn>
+                  </p:par>
+                  <p:par>
+                    <p:cTn id="15" fill="hold">
+                      <p:stCondLst>
+                        <p:cond delay="indefinite"/>
+                      </p:stCondLst>
+                      <p:childTnLst>
+                        <p:par>
+                          <p:cTn id="16" fill="hold">
+                            <p:stCondLst>
+                              <p:cond delay="0"/>
+                            </p:stCondLst>
+                            <p:childTnLst>
+                              <p:par>
+                                <p:cTn id="17" presetID="1" presetClass="entr" presetSubtype="0" fill="hold" nodeType="clickEffect">
+                                  <p:stCondLst>
+                                    <p:cond delay="0"/>
+                                  </p:stCondLst>
+                                  <p:childTnLst>
+                                    <p:set>
+                                      <p:cBhvr>
+                                        <p:cTn id="18" dur="1" fill="hold">
+                                          <p:stCondLst>
+                                            <p:cond delay="0"/>
+                                          </p:stCondLst>
+                                        </p:cTn>
+                                        <p:tgtEl>
+                                          <p:spTgt spid="8">
+                                            <p:txEl>
+                                              <p:pRg st="9" end="9"/>
+                                            </p:txEl>
+                                          </p:spTgt>
+                                        </p:tgtEl>
+                                        <p:attrNameLst>
+                                          <p:attrName>style.visibility</p:attrName>
+                                        </p:attrNameLst>
+                                      </p:cBhvr>
+                                      <p:to>
+                                        <p:strVal val="visible"/>
+                                      </p:to>
+                                    </p:set>
+                                  </p:childTnLst>
+                                </p:cTn>
+                              </p:par>
+                            </p:childTnLst>
+                          </p:cTn>
+                        </p:par>
+                      </p:childTnLst>
+                    </p:cTn>
+                  </p:par>
+                </p:childTnLst>
+              </p:cTn>
+              <p:prevCondLst>
+                <p:cond evt="onPrev" delay="0">
+                  <p:tgtEl>
+                    <p:sldTgt/>
+                  </p:tgtEl>
+                </p:cond>
+              </p:prevCondLst>
+              <p:nextCondLst>
+                <p:cond evt="onNext" delay="0">
+                  <p:tgtEl>
+                    <p:sldTgt/>
+                  </p:tgtEl>
+                </p:cond>
+              </p:nextCondLst>
+            </p:seq>
+          </p:childTnLst>
+        </p:cTn>
+      </p:par>
+    </p:tnLst>
+  </p:timing>
+</p:sld>
+</file>
+
+<file path=ppt/slides/slide7.xml><?xml version="1.0" encoding="utf-8"?>
+<p:sld xmlns:a="http://schemas.openxmlformats.org/drawingml/2006/main" xmlns:r="http://schemas.openxmlformats.org/officeDocument/2006/relationships" xmlns:p="http://schemas.openxmlformats.org/presentationml/2006/main">
+  <p:cSld>
+    <p:spTree>
+      <p:nvGrpSpPr>
+        <p:cNvPr id="1" name=""/>
+        <p:cNvGrpSpPr/>
+        <p:nvPr/>
+      </p:nvGrpSpPr>
+      <p:grpSpPr>
+        <a:xfrm>
+          <a:off x="0" y="0"/>
+          <a:ext cx="0" cy="0"/>
+          <a:chOff x="0" y="0"/>
+          <a:chExt cx="0" cy="0"/>
+        </a:xfrm>
+      </p:grpSpPr>
+      <p:sp>
+        <p:nvSpPr>
           <p:cNvPr id="8" name="HighlightTextShape201406241503265130"/>
           <p:cNvSpPr>
             <a:spLocks noChangeArrowheads="1"/>
@@ -10034,7 +12796,7 @@
               <a:pPr>
                 <a:defRPr/>
               </a:pPr>
-              <a:t>5</a:t>
+              <a:t>7</a:t>
             </a:fld>
             <a:endParaRPr lang="en-US" dirty="0"/>
           </a:p>
